--- a/tests/corpus/pptx/generated/transforms.pptx
+++ b/tests/corpus/pptx/generated/transforms.pptx
@@ -130,7 +130,7 @@
           <p:cNvPr id="2" name="Titel 1">
             <a:extLst>
               <a:ext uri="{FF2B5EF4-FFF2-40B4-BE49-F238E27FC236}">
-                <a16:creationId xmlns:a16="http://schemas.microsoft.com/office/drawing/2014/main" id="{1C0BA2D4-7E1A-51DA-C6AB-65C3DB7A568D}"/>
+                <a16:creationId xmlns:a16="http://schemas.microsoft.com/office/drawing/2014/main" id="{246D9068-143A-EA7E-7DD5-E8AA5E551415}"/>
               </a:ext>
             </a:extLst>
           </p:cNvPr>
@@ -167,7 +167,7 @@
           <p:cNvPr id="3" name="Untertitel 2">
             <a:extLst>
               <a:ext uri="{FF2B5EF4-FFF2-40B4-BE49-F238E27FC236}">
-                <a16:creationId xmlns:a16="http://schemas.microsoft.com/office/drawing/2014/main" id="{80FF0D84-896F-AA79-40D2-74055FD5837C}"/>
+                <a16:creationId xmlns:a16="http://schemas.microsoft.com/office/drawing/2014/main" id="{8F48431A-CF65-BE40-4670-9B144F590F8B}"/>
               </a:ext>
             </a:extLst>
           </p:cNvPr>
@@ -237,7 +237,7 @@
           <p:cNvPr id="4" name="Datumsplatzhalter 3">
             <a:extLst>
               <a:ext uri="{FF2B5EF4-FFF2-40B4-BE49-F238E27FC236}">
-                <a16:creationId xmlns:a16="http://schemas.microsoft.com/office/drawing/2014/main" id="{602CB9E4-D66E-EDA0-4EFA-21D167B725DB}"/>
+                <a16:creationId xmlns:a16="http://schemas.microsoft.com/office/drawing/2014/main" id="{2FE11F86-D5E8-E55A-182C-7797D1A16845}"/>
               </a:ext>
             </a:extLst>
           </p:cNvPr>
@@ -253,7 +253,7 @@
           <a:bodyPr/>
           <a:lstStyle/>
           <a:p>
-            <a:fld id="{23C745AF-0725-49AB-8576-7DEF1B074F5B}" type="datetimeFigureOut">
+            <a:fld id="{D46E0ADC-957C-47CD-B06F-5A3BBE763F89}" type="datetimeFigureOut">
               <a:rPr lang="de-DE" smtClean="0"/>
               <a:t>08.10.2026</a:t>
             </a:fld>
@@ -266,7 +266,7 @@
           <p:cNvPr id="5" name="Fußzeilenplatzhalter 4">
             <a:extLst>
               <a:ext uri="{FF2B5EF4-FFF2-40B4-BE49-F238E27FC236}">
-                <a16:creationId xmlns:a16="http://schemas.microsoft.com/office/drawing/2014/main" id="{6FBCF4C7-0582-4DA7-D128-1C42FE7AE561}"/>
+                <a16:creationId xmlns:a16="http://schemas.microsoft.com/office/drawing/2014/main" id="{C3FFC65E-58F4-D29C-D0C0-983CAD46FD71}"/>
               </a:ext>
             </a:extLst>
           </p:cNvPr>
@@ -291,7 +291,7 @@
           <p:cNvPr id="6" name="Foliennummernplatzhalter 5">
             <a:extLst>
               <a:ext uri="{FF2B5EF4-FFF2-40B4-BE49-F238E27FC236}">
-                <a16:creationId xmlns:a16="http://schemas.microsoft.com/office/drawing/2014/main" id="{77BB1B94-77B2-3974-2DCD-6BD08962D26B}"/>
+                <a16:creationId xmlns:a16="http://schemas.microsoft.com/office/drawing/2014/main" id="{DC773D49-CFA1-A0FD-5375-2CF7622F6EF9}"/>
               </a:ext>
             </a:extLst>
           </p:cNvPr>
@@ -307,7 +307,7 @@
           <a:bodyPr/>
           <a:lstStyle/>
           <a:p>
-            <a:fld id="{AD7C8FE7-722C-461D-B9B6-D70E9B308F90}" type="slidenum">
+            <a:fld id="{8D08BC1A-6D3C-4FE8-BEEE-EFB3D133AC21}" type="slidenum">
               <a:rPr lang="de-DE" smtClean="0"/>
               <a:t>‹Nr.›</a:t>
             </a:fld>
@@ -318,7 +318,7 @@
     </p:spTree>
     <p:extLst>
       <p:ext uri="{BB962C8B-B14F-4D97-AF65-F5344CB8AC3E}">
-        <p14:creationId xmlns:p14="http://schemas.microsoft.com/office/powerpoint/2010/main" val="3228903020"/>
+        <p14:creationId xmlns:p14="http://schemas.microsoft.com/office/powerpoint/2010/main" val="487608678"/>
       </p:ext>
     </p:extLst>
   </p:cSld>
@@ -350,7 +350,7 @@
           <p:cNvPr id="2" name="Titel 1">
             <a:extLst>
               <a:ext uri="{FF2B5EF4-FFF2-40B4-BE49-F238E27FC236}">
-                <a16:creationId xmlns:a16="http://schemas.microsoft.com/office/drawing/2014/main" id="{274DA1AA-F049-1A96-1BA4-4E01A11CBED5}"/>
+                <a16:creationId xmlns:a16="http://schemas.microsoft.com/office/drawing/2014/main" id="{B32428B7-3773-3FF0-A86F-10A3E44D22E0}"/>
               </a:ext>
             </a:extLst>
           </p:cNvPr>
@@ -378,7 +378,7 @@
           <p:cNvPr id="3" name="Vertikaler Textplatzhalter 2">
             <a:extLst>
               <a:ext uri="{FF2B5EF4-FFF2-40B4-BE49-F238E27FC236}">
-                <a16:creationId xmlns:a16="http://schemas.microsoft.com/office/drawing/2014/main" id="{49D7B006-D1C2-0D8C-4916-849CB31157B2}"/>
+                <a16:creationId xmlns:a16="http://schemas.microsoft.com/office/drawing/2014/main" id="{A1FB29CE-971C-9046-C631-D7F832405264}"/>
               </a:ext>
             </a:extLst>
           </p:cNvPr>
@@ -435,7 +435,7 @@
           <p:cNvPr id="4" name="Datumsplatzhalter 3">
             <a:extLst>
               <a:ext uri="{FF2B5EF4-FFF2-40B4-BE49-F238E27FC236}">
-                <a16:creationId xmlns:a16="http://schemas.microsoft.com/office/drawing/2014/main" id="{3CF5C6F1-4370-3CF0-3046-79FDD3EAB72E}"/>
+                <a16:creationId xmlns:a16="http://schemas.microsoft.com/office/drawing/2014/main" id="{76F458F8-758B-1B23-D3F2-FAE3752EA572}"/>
               </a:ext>
             </a:extLst>
           </p:cNvPr>
@@ -451,7 +451,7 @@
           <a:bodyPr/>
           <a:lstStyle/>
           <a:p>
-            <a:fld id="{23C745AF-0725-49AB-8576-7DEF1B074F5B}" type="datetimeFigureOut">
+            <a:fld id="{D46E0ADC-957C-47CD-B06F-5A3BBE763F89}" type="datetimeFigureOut">
               <a:rPr lang="de-DE" smtClean="0"/>
               <a:t>08.10.2026</a:t>
             </a:fld>
@@ -464,7 +464,7 @@
           <p:cNvPr id="5" name="Fußzeilenplatzhalter 4">
             <a:extLst>
               <a:ext uri="{FF2B5EF4-FFF2-40B4-BE49-F238E27FC236}">
-                <a16:creationId xmlns:a16="http://schemas.microsoft.com/office/drawing/2014/main" id="{DF60930C-8295-9CDB-BBBA-33BF2041D2A3}"/>
+                <a16:creationId xmlns:a16="http://schemas.microsoft.com/office/drawing/2014/main" id="{8BB1DE3F-D557-30E9-DF63-E503BC88C530}"/>
               </a:ext>
             </a:extLst>
           </p:cNvPr>
@@ -489,7 +489,7 @@
           <p:cNvPr id="6" name="Foliennummernplatzhalter 5">
             <a:extLst>
               <a:ext uri="{FF2B5EF4-FFF2-40B4-BE49-F238E27FC236}">
-                <a16:creationId xmlns:a16="http://schemas.microsoft.com/office/drawing/2014/main" id="{A664F60C-CD4B-8DE1-75C2-D36C29060B05}"/>
+                <a16:creationId xmlns:a16="http://schemas.microsoft.com/office/drawing/2014/main" id="{A877BBD5-1B51-575B-4707-3166150EDD4B}"/>
               </a:ext>
             </a:extLst>
           </p:cNvPr>
@@ -505,7 +505,7 @@
           <a:bodyPr/>
           <a:lstStyle/>
           <a:p>
-            <a:fld id="{AD7C8FE7-722C-461D-B9B6-D70E9B308F90}" type="slidenum">
+            <a:fld id="{8D08BC1A-6D3C-4FE8-BEEE-EFB3D133AC21}" type="slidenum">
               <a:rPr lang="de-DE" smtClean="0"/>
               <a:t>‹Nr.›</a:t>
             </a:fld>
@@ -516,7 +516,7 @@
     </p:spTree>
     <p:extLst>
       <p:ext uri="{BB962C8B-B14F-4D97-AF65-F5344CB8AC3E}">
-        <p14:creationId xmlns:p14="http://schemas.microsoft.com/office/powerpoint/2010/main" val="1824413702"/>
+        <p14:creationId xmlns:p14="http://schemas.microsoft.com/office/powerpoint/2010/main" val="2355288929"/>
       </p:ext>
     </p:extLst>
   </p:cSld>
@@ -548,7 +548,7 @@
           <p:cNvPr id="2" name="Vertikaler Titel 1">
             <a:extLst>
               <a:ext uri="{FF2B5EF4-FFF2-40B4-BE49-F238E27FC236}">
-                <a16:creationId xmlns:a16="http://schemas.microsoft.com/office/drawing/2014/main" id="{86CE7B69-0B9E-FD4F-388A-F9400AB843A7}"/>
+                <a16:creationId xmlns:a16="http://schemas.microsoft.com/office/drawing/2014/main" id="{5EA42702-A866-A445-6802-71F9C358DF4E}"/>
               </a:ext>
             </a:extLst>
           </p:cNvPr>
@@ -581,7 +581,7 @@
           <p:cNvPr id="3" name="Vertikaler Textplatzhalter 2">
             <a:extLst>
               <a:ext uri="{FF2B5EF4-FFF2-40B4-BE49-F238E27FC236}">
-                <a16:creationId xmlns:a16="http://schemas.microsoft.com/office/drawing/2014/main" id="{DE2DE30E-A068-BFDD-17FD-0CE155321296}"/>
+                <a16:creationId xmlns:a16="http://schemas.microsoft.com/office/drawing/2014/main" id="{EA461013-5915-7470-899A-93DD1D6614E3}"/>
               </a:ext>
             </a:extLst>
           </p:cNvPr>
@@ -643,7 +643,7 @@
           <p:cNvPr id="4" name="Datumsplatzhalter 3">
             <a:extLst>
               <a:ext uri="{FF2B5EF4-FFF2-40B4-BE49-F238E27FC236}">
-                <a16:creationId xmlns:a16="http://schemas.microsoft.com/office/drawing/2014/main" id="{836D4C2C-16A2-2D55-1DBE-B7C08B4AB9AB}"/>
+                <a16:creationId xmlns:a16="http://schemas.microsoft.com/office/drawing/2014/main" id="{B13F6376-C7BD-AAD7-0622-0C053883B549}"/>
               </a:ext>
             </a:extLst>
           </p:cNvPr>
@@ -659,7 +659,7 @@
           <a:bodyPr/>
           <a:lstStyle/>
           <a:p>
-            <a:fld id="{23C745AF-0725-49AB-8576-7DEF1B074F5B}" type="datetimeFigureOut">
+            <a:fld id="{D46E0ADC-957C-47CD-B06F-5A3BBE763F89}" type="datetimeFigureOut">
               <a:rPr lang="de-DE" smtClean="0"/>
               <a:t>08.10.2026</a:t>
             </a:fld>
@@ -672,7 +672,7 @@
           <p:cNvPr id="5" name="Fußzeilenplatzhalter 4">
             <a:extLst>
               <a:ext uri="{FF2B5EF4-FFF2-40B4-BE49-F238E27FC236}">
-                <a16:creationId xmlns:a16="http://schemas.microsoft.com/office/drawing/2014/main" id="{8099321F-38D6-7726-6BDA-23DB50049AC8}"/>
+                <a16:creationId xmlns:a16="http://schemas.microsoft.com/office/drawing/2014/main" id="{B0B0D330-966B-95F7-55A6-97E6B3D572AB}"/>
               </a:ext>
             </a:extLst>
           </p:cNvPr>
@@ -697,7 +697,7 @@
           <p:cNvPr id="6" name="Foliennummernplatzhalter 5">
             <a:extLst>
               <a:ext uri="{FF2B5EF4-FFF2-40B4-BE49-F238E27FC236}">
-                <a16:creationId xmlns:a16="http://schemas.microsoft.com/office/drawing/2014/main" id="{4EB72BAB-0E78-378F-5D1F-8B5C76B8A518}"/>
+                <a16:creationId xmlns:a16="http://schemas.microsoft.com/office/drawing/2014/main" id="{B8564510-7E30-1FB9-B997-03A8FE80B2B7}"/>
               </a:ext>
             </a:extLst>
           </p:cNvPr>
@@ -713,7 +713,7 @@
           <a:bodyPr/>
           <a:lstStyle/>
           <a:p>
-            <a:fld id="{AD7C8FE7-722C-461D-B9B6-D70E9B308F90}" type="slidenum">
+            <a:fld id="{8D08BC1A-6D3C-4FE8-BEEE-EFB3D133AC21}" type="slidenum">
               <a:rPr lang="de-DE" smtClean="0"/>
               <a:t>‹Nr.›</a:t>
             </a:fld>
@@ -724,7 +724,7 @@
     </p:spTree>
     <p:extLst>
       <p:ext uri="{BB962C8B-B14F-4D97-AF65-F5344CB8AC3E}">
-        <p14:creationId xmlns:p14="http://schemas.microsoft.com/office/powerpoint/2010/main" val="3684563336"/>
+        <p14:creationId xmlns:p14="http://schemas.microsoft.com/office/powerpoint/2010/main" val="1507730380"/>
       </p:ext>
     </p:extLst>
   </p:cSld>
@@ -756,7 +756,7 @@
           <p:cNvPr id="2" name="Titel 1">
             <a:extLst>
               <a:ext uri="{FF2B5EF4-FFF2-40B4-BE49-F238E27FC236}">
-                <a16:creationId xmlns:a16="http://schemas.microsoft.com/office/drawing/2014/main" id="{DF79BA5B-502A-AF14-4531-970CA54626A5}"/>
+                <a16:creationId xmlns:a16="http://schemas.microsoft.com/office/drawing/2014/main" id="{9639B1EC-76F0-EDCA-3E85-3F8E10111847}"/>
               </a:ext>
             </a:extLst>
           </p:cNvPr>
@@ -784,7 +784,7 @@
           <p:cNvPr id="3" name="Inhaltsplatzhalter 2">
             <a:extLst>
               <a:ext uri="{FF2B5EF4-FFF2-40B4-BE49-F238E27FC236}">
-                <a16:creationId xmlns:a16="http://schemas.microsoft.com/office/drawing/2014/main" id="{2B56902B-EB23-A10B-29DA-AB3D507BEEA3}"/>
+                <a16:creationId xmlns:a16="http://schemas.microsoft.com/office/drawing/2014/main" id="{7B05FBE8-2394-B023-5028-5623A9EB65CD}"/>
               </a:ext>
             </a:extLst>
           </p:cNvPr>
@@ -841,7 +841,7 @@
           <p:cNvPr id="4" name="Datumsplatzhalter 3">
             <a:extLst>
               <a:ext uri="{FF2B5EF4-FFF2-40B4-BE49-F238E27FC236}">
-                <a16:creationId xmlns:a16="http://schemas.microsoft.com/office/drawing/2014/main" id="{F024A00C-9A67-4830-F93B-24D7DE463439}"/>
+                <a16:creationId xmlns:a16="http://schemas.microsoft.com/office/drawing/2014/main" id="{1CF52524-2BAD-4E0D-9862-67B3313502AE}"/>
               </a:ext>
             </a:extLst>
           </p:cNvPr>
@@ -857,7 +857,7 @@
           <a:bodyPr/>
           <a:lstStyle/>
           <a:p>
-            <a:fld id="{23C745AF-0725-49AB-8576-7DEF1B074F5B}" type="datetimeFigureOut">
+            <a:fld id="{D46E0ADC-957C-47CD-B06F-5A3BBE763F89}" type="datetimeFigureOut">
               <a:rPr lang="de-DE" smtClean="0"/>
               <a:t>08.10.2026</a:t>
             </a:fld>
@@ -870,7 +870,7 @@
           <p:cNvPr id="5" name="Fußzeilenplatzhalter 4">
             <a:extLst>
               <a:ext uri="{FF2B5EF4-FFF2-40B4-BE49-F238E27FC236}">
-                <a16:creationId xmlns:a16="http://schemas.microsoft.com/office/drawing/2014/main" id="{C8EBEA98-D7DA-0D92-BC2B-84B00BB1C970}"/>
+                <a16:creationId xmlns:a16="http://schemas.microsoft.com/office/drawing/2014/main" id="{E5F4CDD7-767C-9AC5-25D4-C7086CFB1893}"/>
               </a:ext>
             </a:extLst>
           </p:cNvPr>
@@ -895,7 +895,7 @@
           <p:cNvPr id="6" name="Foliennummernplatzhalter 5">
             <a:extLst>
               <a:ext uri="{FF2B5EF4-FFF2-40B4-BE49-F238E27FC236}">
-                <a16:creationId xmlns:a16="http://schemas.microsoft.com/office/drawing/2014/main" id="{16E6DDE0-FBD6-BAC0-991A-F5E01D36C2C0}"/>
+                <a16:creationId xmlns:a16="http://schemas.microsoft.com/office/drawing/2014/main" id="{C06EE892-98CA-6D5E-4162-732BC3FA886B}"/>
               </a:ext>
             </a:extLst>
           </p:cNvPr>
@@ -911,7 +911,7 @@
           <a:bodyPr/>
           <a:lstStyle/>
           <a:p>
-            <a:fld id="{AD7C8FE7-722C-461D-B9B6-D70E9B308F90}" type="slidenum">
+            <a:fld id="{8D08BC1A-6D3C-4FE8-BEEE-EFB3D133AC21}" type="slidenum">
               <a:rPr lang="de-DE" smtClean="0"/>
               <a:t>‹Nr.›</a:t>
             </a:fld>
@@ -922,7 +922,7 @@
     </p:spTree>
     <p:extLst>
       <p:ext uri="{BB962C8B-B14F-4D97-AF65-F5344CB8AC3E}">
-        <p14:creationId xmlns:p14="http://schemas.microsoft.com/office/powerpoint/2010/main" val="4097039502"/>
+        <p14:creationId xmlns:p14="http://schemas.microsoft.com/office/powerpoint/2010/main" val="2873733122"/>
       </p:ext>
     </p:extLst>
   </p:cSld>
@@ -954,7 +954,7 @@
           <p:cNvPr id="2" name="Titel 1">
             <a:extLst>
               <a:ext uri="{FF2B5EF4-FFF2-40B4-BE49-F238E27FC236}">
-                <a16:creationId xmlns:a16="http://schemas.microsoft.com/office/drawing/2014/main" id="{7FC396C7-55A1-051E-775E-4E87B3CA83BB}"/>
+                <a16:creationId xmlns:a16="http://schemas.microsoft.com/office/drawing/2014/main" id="{7B00645D-9AE9-23A3-49B8-FAC495A9E0C3}"/>
               </a:ext>
             </a:extLst>
           </p:cNvPr>
@@ -991,7 +991,7 @@
           <p:cNvPr id="3" name="Textplatzhalter 2">
             <a:extLst>
               <a:ext uri="{FF2B5EF4-FFF2-40B4-BE49-F238E27FC236}">
-                <a16:creationId xmlns:a16="http://schemas.microsoft.com/office/drawing/2014/main" id="{09373B65-FD2C-09B2-211C-182E1A2D575E}"/>
+                <a16:creationId xmlns:a16="http://schemas.microsoft.com/office/drawing/2014/main" id="{0A5DBBE7-5795-D540-413C-57DDFD132DDC}"/>
               </a:ext>
             </a:extLst>
           </p:cNvPr>
@@ -1116,7 +1116,7 @@
           <p:cNvPr id="4" name="Datumsplatzhalter 3">
             <a:extLst>
               <a:ext uri="{FF2B5EF4-FFF2-40B4-BE49-F238E27FC236}">
-                <a16:creationId xmlns:a16="http://schemas.microsoft.com/office/drawing/2014/main" id="{5B1EF75A-8ED7-B709-A054-9CD614D7C3B2}"/>
+                <a16:creationId xmlns:a16="http://schemas.microsoft.com/office/drawing/2014/main" id="{CDCA625A-3784-B49C-0DD8-7F10A755C39F}"/>
               </a:ext>
             </a:extLst>
           </p:cNvPr>
@@ -1132,7 +1132,7 @@
           <a:bodyPr/>
           <a:lstStyle/>
           <a:p>
-            <a:fld id="{23C745AF-0725-49AB-8576-7DEF1B074F5B}" type="datetimeFigureOut">
+            <a:fld id="{D46E0ADC-957C-47CD-B06F-5A3BBE763F89}" type="datetimeFigureOut">
               <a:rPr lang="de-DE" smtClean="0"/>
               <a:t>08.10.2026</a:t>
             </a:fld>
@@ -1145,7 +1145,7 @@
           <p:cNvPr id="5" name="Fußzeilenplatzhalter 4">
             <a:extLst>
               <a:ext uri="{FF2B5EF4-FFF2-40B4-BE49-F238E27FC236}">
-                <a16:creationId xmlns:a16="http://schemas.microsoft.com/office/drawing/2014/main" id="{DADDE928-C789-C9B4-B601-F06C99CEB698}"/>
+                <a16:creationId xmlns:a16="http://schemas.microsoft.com/office/drawing/2014/main" id="{53888A2F-EE77-9AF2-4F01-17E45DFDD3B0}"/>
               </a:ext>
             </a:extLst>
           </p:cNvPr>
@@ -1170,7 +1170,7 @@
           <p:cNvPr id="6" name="Foliennummernplatzhalter 5">
             <a:extLst>
               <a:ext uri="{FF2B5EF4-FFF2-40B4-BE49-F238E27FC236}">
-                <a16:creationId xmlns:a16="http://schemas.microsoft.com/office/drawing/2014/main" id="{5A941E19-1DD3-0E64-5946-B49B9ACAEF7D}"/>
+                <a16:creationId xmlns:a16="http://schemas.microsoft.com/office/drawing/2014/main" id="{E566A03A-E0C3-5BB3-1182-86D05147863C}"/>
               </a:ext>
             </a:extLst>
           </p:cNvPr>
@@ -1186,7 +1186,7 @@
           <a:bodyPr/>
           <a:lstStyle/>
           <a:p>
-            <a:fld id="{AD7C8FE7-722C-461D-B9B6-D70E9B308F90}" type="slidenum">
+            <a:fld id="{8D08BC1A-6D3C-4FE8-BEEE-EFB3D133AC21}" type="slidenum">
               <a:rPr lang="de-DE" smtClean="0"/>
               <a:t>‹Nr.›</a:t>
             </a:fld>
@@ -1197,7 +1197,7 @@
     </p:spTree>
     <p:extLst>
       <p:ext uri="{BB962C8B-B14F-4D97-AF65-F5344CB8AC3E}">
-        <p14:creationId xmlns:p14="http://schemas.microsoft.com/office/powerpoint/2010/main" val="171420857"/>
+        <p14:creationId xmlns:p14="http://schemas.microsoft.com/office/powerpoint/2010/main" val="63609766"/>
       </p:ext>
     </p:extLst>
   </p:cSld>
@@ -1229,7 +1229,7 @@
           <p:cNvPr id="2" name="Titel 1">
             <a:extLst>
               <a:ext uri="{FF2B5EF4-FFF2-40B4-BE49-F238E27FC236}">
-                <a16:creationId xmlns:a16="http://schemas.microsoft.com/office/drawing/2014/main" id="{2857DC39-B5B0-0D72-B78D-787B4BB0BE52}"/>
+                <a16:creationId xmlns:a16="http://schemas.microsoft.com/office/drawing/2014/main" id="{B03A535D-C570-E715-B173-25564FFD9B5D}"/>
               </a:ext>
             </a:extLst>
           </p:cNvPr>
@@ -1257,7 +1257,7 @@
           <p:cNvPr id="3" name="Inhaltsplatzhalter 2">
             <a:extLst>
               <a:ext uri="{FF2B5EF4-FFF2-40B4-BE49-F238E27FC236}">
-                <a16:creationId xmlns:a16="http://schemas.microsoft.com/office/drawing/2014/main" id="{B9724999-C762-DC53-9CA2-5E2C76F83D83}"/>
+                <a16:creationId xmlns:a16="http://schemas.microsoft.com/office/drawing/2014/main" id="{3FC6EAC9-2C30-470B-97EA-629D90BC9AA4}"/>
               </a:ext>
             </a:extLst>
           </p:cNvPr>
@@ -1319,7 +1319,7 @@
           <p:cNvPr id="4" name="Inhaltsplatzhalter 3">
             <a:extLst>
               <a:ext uri="{FF2B5EF4-FFF2-40B4-BE49-F238E27FC236}">
-                <a16:creationId xmlns:a16="http://schemas.microsoft.com/office/drawing/2014/main" id="{10EB3246-2FC2-6074-1724-076C1273E8C9}"/>
+                <a16:creationId xmlns:a16="http://schemas.microsoft.com/office/drawing/2014/main" id="{3455A411-362D-5267-537A-098DAC51B2D4}"/>
               </a:ext>
             </a:extLst>
           </p:cNvPr>
@@ -1381,7 +1381,7 @@
           <p:cNvPr id="5" name="Datumsplatzhalter 4">
             <a:extLst>
               <a:ext uri="{FF2B5EF4-FFF2-40B4-BE49-F238E27FC236}">
-                <a16:creationId xmlns:a16="http://schemas.microsoft.com/office/drawing/2014/main" id="{0D09962E-9D8C-8A2D-C114-2ECAD8DB3DEC}"/>
+                <a16:creationId xmlns:a16="http://schemas.microsoft.com/office/drawing/2014/main" id="{27A66166-E027-20D6-226E-C74C55FC26D7}"/>
               </a:ext>
             </a:extLst>
           </p:cNvPr>
@@ -1397,7 +1397,7 @@
           <a:bodyPr/>
           <a:lstStyle/>
           <a:p>
-            <a:fld id="{23C745AF-0725-49AB-8576-7DEF1B074F5B}" type="datetimeFigureOut">
+            <a:fld id="{D46E0ADC-957C-47CD-B06F-5A3BBE763F89}" type="datetimeFigureOut">
               <a:rPr lang="de-DE" smtClean="0"/>
               <a:t>08.10.2026</a:t>
             </a:fld>
@@ -1410,7 +1410,7 @@
           <p:cNvPr id="6" name="Fußzeilenplatzhalter 5">
             <a:extLst>
               <a:ext uri="{FF2B5EF4-FFF2-40B4-BE49-F238E27FC236}">
-                <a16:creationId xmlns:a16="http://schemas.microsoft.com/office/drawing/2014/main" id="{00144B5D-531B-6434-4D86-E1F49AD94541}"/>
+                <a16:creationId xmlns:a16="http://schemas.microsoft.com/office/drawing/2014/main" id="{9929274F-58B5-F60C-CFB6-7DE528740436}"/>
               </a:ext>
             </a:extLst>
           </p:cNvPr>
@@ -1435,7 +1435,7 @@
           <p:cNvPr id="7" name="Foliennummernplatzhalter 6">
             <a:extLst>
               <a:ext uri="{FF2B5EF4-FFF2-40B4-BE49-F238E27FC236}">
-                <a16:creationId xmlns:a16="http://schemas.microsoft.com/office/drawing/2014/main" id="{00EB7935-F4DB-38F0-5365-67F7828CE67A}"/>
+                <a16:creationId xmlns:a16="http://schemas.microsoft.com/office/drawing/2014/main" id="{ACB75237-F97A-3513-A2AB-63480CDC8D0C}"/>
               </a:ext>
             </a:extLst>
           </p:cNvPr>
@@ -1451,7 +1451,7 @@
           <a:bodyPr/>
           <a:lstStyle/>
           <a:p>
-            <a:fld id="{AD7C8FE7-722C-461D-B9B6-D70E9B308F90}" type="slidenum">
+            <a:fld id="{8D08BC1A-6D3C-4FE8-BEEE-EFB3D133AC21}" type="slidenum">
               <a:rPr lang="de-DE" smtClean="0"/>
               <a:t>‹Nr.›</a:t>
             </a:fld>
@@ -1462,7 +1462,7 @@
     </p:spTree>
     <p:extLst>
       <p:ext uri="{BB962C8B-B14F-4D97-AF65-F5344CB8AC3E}">
-        <p14:creationId xmlns:p14="http://schemas.microsoft.com/office/powerpoint/2010/main" val="2047360668"/>
+        <p14:creationId xmlns:p14="http://schemas.microsoft.com/office/powerpoint/2010/main" val="1119121814"/>
       </p:ext>
     </p:extLst>
   </p:cSld>
@@ -1494,7 +1494,7 @@
           <p:cNvPr id="2" name="Titel 1">
             <a:extLst>
               <a:ext uri="{FF2B5EF4-FFF2-40B4-BE49-F238E27FC236}">
-                <a16:creationId xmlns:a16="http://schemas.microsoft.com/office/drawing/2014/main" id="{595C4A71-4ACB-189C-742D-B29FF821340B}"/>
+                <a16:creationId xmlns:a16="http://schemas.microsoft.com/office/drawing/2014/main" id="{5A5181B4-D0AB-3C5E-6913-BD4D892EB220}"/>
               </a:ext>
             </a:extLst>
           </p:cNvPr>
@@ -1527,7 +1527,7 @@
           <p:cNvPr id="3" name="Textplatzhalter 2">
             <a:extLst>
               <a:ext uri="{FF2B5EF4-FFF2-40B4-BE49-F238E27FC236}">
-                <a16:creationId xmlns:a16="http://schemas.microsoft.com/office/drawing/2014/main" id="{FCCDF1A1-E282-A3AA-09DA-F96D0757110A}"/>
+                <a16:creationId xmlns:a16="http://schemas.microsoft.com/office/drawing/2014/main" id="{D43522D8-A82C-EFCC-CDA8-0A9553719203}"/>
               </a:ext>
             </a:extLst>
           </p:cNvPr>
@@ -1598,7 +1598,7 @@
           <p:cNvPr id="4" name="Inhaltsplatzhalter 3">
             <a:extLst>
               <a:ext uri="{FF2B5EF4-FFF2-40B4-BE49-F238E27FC236}">
-                <a16:creationId xmlns:a16="http://schemas.microsoft.com/office/drawing/2014/main" id="{8BD0D4DF-127E-780C-DC71-B9770E70D903}"/>
+                <a16:creationId xmlns:a16="http://schemas.microsoft.com/office/drawing/2014/main" id="{3E31D16A-B2C6-B4B9-F9C7-22B195466FC9}"/>
               </a:ext>
             </a:extLst>
           </p:cNvPr>
@@ -1660,7 +1660,7 @@
           <p:cNvPr id="5" name="Textplatzhalter 4">
             <a:extLst>
               <a:ext uri="{FF2B5EF4-FFF2-40B4-BE49-F238E27FC236}">
-                <a16:creationId xmlns:a16="http://schemas.microsoft.com/office/drawing/2014/main" id="{D942FDF3-BB0D-20B0-2EAA-0E6DA91315FD}"/>
+                <a16:creationId xmlns:a16="http://schemas.microsoft.com/office/drawing/2014/main" id="{4765F997-57F2-78F0-FDC8-5FFA15B8E84E}"/>
               </a:ext>
             </a:extLst>
           </p:cNvPr>
@@ -1731,7 +1731,7 @@
           <p:cNvPr id="6" name="Inhaltsplatzhalter 5">
             <a:extLst>
               <a:ext uri="{FF2B5EF4-FFF2-40B4-BE49-F238E27FC236}">
-                <a16:creationId xmlns:a16="http://schemas.microsoft.com/office/drawing/2014/main" id="{8DA1AD05-9423-DAE7-A64B-2318587D73AB}"/>
+                <a16:creationId xmlns:a16="http://schemas.microsoft.com/office/drawing/2014/main" id="{62CB1403-C343-4891-34E4-15B95F4AF2C5}"/>
               </a:ext>
             </a:extLst>
           </p:cNvPr>
@@ -1793,7 +1793,7 @@
           <p:cNvPr id="7" name="Datumsplatzhalter 6">
             <a:extLst>
               <a:ext uri="{FF2B5EF4-FFF2-40B4-BE49-F238E27FC236}">
-                <a16:creationId xmlns:a16="http://schemas.microsoft.com/office/drawing/2014/main" id="{A8C6BE4E-CEA9-BF95-91BE-CCFA98843372}"/>
+                <a16:creationId xmlns:a16="http://schemas.microsoft.com/office/drawing/2014/main" id="{0425EA08-7C2E-FA2D-B6C2-2B7CFC2B52E9}"/>
               </a:ext>
             </a:extLst>
           </p:cNvPr>
@@ -1809,7 +1809,7 @@
           <a:bodyPr/>
           <a:lstStyle/>
           <a:p>
-            <a:fld id="{23C745AF-0725-49AB-8576-7DEF1B074F5B}" type="datetimeFigureOut">
+            <a:fld id="{D46E0ADC-957C-47CD-B06F-5A3BBE763F89}" type="datetimeFigureOut">
               <a:rPr lang="de-DE" smtClean="0"/>
               <a:t>08.10.2026</a:t>
             </a:fld>
@@ -1822,7 +1822,7 @@
           <p:cNvPr id="8" name="Fußzeilenplatzhalter 7">
             <a:extLst>
               <a:ext uri="{FF2B5EF4-FFF2-40B4-BE49-F238E27FC236}">
-                <a16:creationId xmlns:a16="http://schemas.microsoft.com/office/drawing/2014/main" id="{EE1F9B53-3798-0532-A34F-2B7C44FC82A6}"/>
+                <a16:creationId xmlns:a16="http://schemas.microsoft.com/office/drawing/2014/main" id="{F8540747-E29A-AFE9-5F60-3927A6E40A4C}"/>
               </a:ext>
             </a:extLst>
           </p:cNvPr>
@@ -1847,7 +1847,7 @@
           <p:cNvPr id="9" name="Foliennummernplatzhalter 8">
             <a:extLst>
               <a:ext uri="{FF2B5EF4-FFF2-40B4-BE49-F238E27FC236}">
-                <a16:creationId xmlns:a16="http://schemas.microsoft.com/office/drawing/2014/main" id="{19D58CF5-F219-2384-9E69-D7C296578F1A}"/>
+                <a16:creationId xmlns:a16="http://schemas.microsoft.com/office/drawing/2014/main" id="{8C34C308-BD7D-CA5B-F30D-0E14C4A0D484}"/>
               </a:ext>
             </a:extLst>
           </p:cNvPr>
@@ -1863,7 +1863,7 @@
           <a:bodyPr/>
           <a:lstStyle/>
           <a:p>
-            <a:fld id="{AD7C8FE7-722C-461D-B9B6-D70E9B308F90}" type="slidenum">
+            <a:fld id="{8D08BC1A-6D3C-4FE8-BEEE-EFB3D133AC21}" type="slidenum">
               <a:rPr lang="de-DE" smtClean="0"/>
               <a:t>‹Nr.›</a:t>
             </a:fld>
@@ -1874,7 +1874,7 @@
     </p:spTree>
     <p:extLst>
       <p:ext uri="{BB962C8B-B14F-4D97-AF65-F5344CB8AC3E}">
-        <p14:creationId xmlns:p14="http://schemas.microsoft.com/office/powerpoint/2010/main" val="672347126"/>
+        <p14:creationId xmlns:p14="http://schemas.microsoft.com/office/powerpoint/2010/main" val="268187403"/>
       </p:ext>
     </p:extLst>
   </p:cSld>
@@ -1906,7 +1906,7 @@
           <p:cNvPr id="2" name="Titel 1">
             <a:extLst>
               <a:ext uri="{FF2B5EF4-FFF2-40B4-BE49-F238E27FC236}">
-                <a16:creationId xmlns:a16="http://schemas.microsoft.com/office/drawing/2014/main" id="{D4D18701-A093-ADA8-DAA1-22346E1F701F}"/>
+                <a16:creationId xmlns:a16="http://schemas.microsoft.com/office/drawing/2014/main" id="{328EA436-AFA3-8185-8792-1FF4E922ABDF}"/>
               </a:ext>
             </a:extLst>
           </p:cNvPr>
@@ -1934,7 +1934,7 @@
           <p:cNvPr id="3" name="Datumsplatzhalter 2">
             <a:extLst>
               <a:ext uri="{FF2B5EF4-FFF2-40B4-BE49-F238E27FC236}">
-                <a16:creationId xmlns:a16="http://schemas.microsoft.com/office/drawing/2014/main" id="{8A1AE8E4-E1D6-7D7C-8C3C-FB521C29D343}"/>
+                <a16:creationId xmlns:a16="http://schemas.microsoft.com/office/drawing/2014/main" id="{F7DA9279-0CC1-4434-84A9-9E584A284B88}"/>
               </a:ext>
             </a:extLst>
           </p:cNvPr>
@@ -1950,7 +1950,7 @@
           <a:bodyPr/>
           <a:lstStyle/>
           <a:p>
-            <a:fld id="{23C745AF-0725-49AB-8576-7DEF1B074F5B}" type="datetimeFigureOut">
+            <a:fld id="{D46E0ADC-957C-47CD-B06F-5A3BBE763F89}" type="datetimeFigureOut">
               <a:rPr lang="de-DE" smtClean="0"/>
               <a:t>08.10.2026</a:t>
             </a:fld>
@@ -1963,7 +1963,7 @@
           <p:cNvPr id="4" name="Fußzeilenplatzhalter 3">
             <a:extLst>
               <a:ext uri="{FF2B5EF4-FFF2-40B4-BE49-F238E27FC236}">
-                <a16:creationId xmlns:a16="http://schemas.microsoft.com/office/drawing/2014/main" id="{4B28FB86-F659-A2D5-5B64-66F974A1D200}"/>
+                <a16:creationId xmlns:a16="http://schemas.microsoft.com/office/drawing/2014/main" id="{86B04289-DB36-81DA-EC31-D215D920D5A9}"/>
               </a:ext>
             </a:extLst>
           </p:cNvPr>
@@ -1988,7 +1988,7 @@
           <p:cNvPr id="5" name="Foliennummernplatzhalter 4">
             <a:extLst>
               <a:ext uri="{FF2B5EF4-FFF2-40B4-BE49-F238E27FC236}">
-                <a16:creationId xmlns:a16="http://schemas.microsoft.com/office/drawing/2014/main" id="{3AEC6751-E930-9A9A-0A2D-93C14E78EF3A}"/>
+                <a16:creationId xmlns:a16="http://schemas.microsoft.com/office/drawing/2014/main" id="{50E61088-20A8-3B04-69E5-47C1FB974F8F}"/>
               </a:ext>
             </a:extLst>
           </p:cNvPr>
@@ -2004,7 +2004,7 @@
           <a:bodyPr/>
           <a:lstStyle/>
           <a:p>
-            <a:fld id="{AD7C8FE7-722C-461D-B9B6-D70E9B308F90}" type="slidenum">
+            <a:fld id="{8D08BC1A-6D3C-4FE8-BEEE-EFB3D133AC21}" type="slidenum">
               <a:rPr lang="de-DE" smtClean="0"/>
               <a:t>‹Nr.›</a:t>
             </a:fld>
@@ -2015,7 +2015,7 @@
     </p:spTree>
     <p:extLst>
       <p:ext uri="{BB962C8B-B14F-4D97-AF65-F5344CB8AC3E}">
-        <p14:creationId xmlns:p14="http://schemas.microsoft.com/office/powerpoint/2010/main" val="3393786749"/>
+        <p14:creationId xmlns:p14="http://schemas.microsoft.com/office/powerpoint/2010/main" val="3791721059"/>
       </p:ext>
     </p:extLst>
   </p:cSld>
@@ -2047,7 +2047,7 @@
           <p:cNvPr id="2" name="Datumsplatzhalter 1">
             <a:extLst>
               <a:ext uri="{FF2B5EF4-FFF2-40B4-BE49-F238E27FC236}">
-                <a16:creationId xmlns:a16="http://schemas.microsoft.com/office/drawing/2014/main" id="{940ADC2C-4775-4191-E154-27E07C1A4611}"/>
+                <a16:creationId xmlns:a16="http://schemas.microsoft.com/office/drawing/2014/main" id="{B95711CA-CD33-B0B5-C10B-8C92363D4352}"/>
               </a:ext>
             </a:extLst>
           </p:cNvPr>
@@ -2063,7 +2063,7 @@
           <a:bodyPr/>
           <a:lstStyle/>
           <a:p>
-            <a:fld id="{23C745AF-0725-49AB-8576-7DEF1B074F5B}" type="datetimeFigureOut">
+            <a:fld id="{D46E0ADC-957C-47CD-B06F-5A3BBE763F89}" type="datetimeFigureOut">
               <a:rPr lang="de-DE" smtClean="0"/>
               <a:t>08.10.2026</a:t>
             </a:fld>
@@ -2076,7 +2076,7 @@
           <p:cNvPr id="3" name="Fußzeilenplatzhalter 2">
             <a:extLst>
               <a:ext uri="{FF2B5EF4-FFF2-40B4-BE49-F238E27FC236}">
-                <a16:creationId xmlns:a16="http://schemas.microsoft.com/office/drawing/2014/main" id="{D6752EE0-2CCF-9D3D-0B6B-1E0CFA66DF40}"/>
+                <a16:creationId xmlns:a16="http://schemas.microsoft.com/office/drawing/2014/main" id="{D3AE8994-D6A8-2B25-1737-721B16B9739C}"/>
               </a:ext>
             </a:extLst>
           </p:cNvPr>
@@ -2101,7 +2101,7 @@
           <p:cNvPr id="4" name="Foliennummernplatzhalter 3">
             <a:extLst>
               <a:ext uri="{FF2B5EF4-FFF2-40B4-BE49-F238E27FC236}">
-                <a16:creationId xmlns:a16="http://schemas.microsoft.com/office/drawing/2014/main" id="{55023384-7ADE-4184-FF8D-B138B7A8EBD1}"/>
+                <a16:creationId xmlns:a16="http://schemas.microsoft.com/office/drawing/2014/main" id="{C2F3842E-5E50-BC3B-E697-0EB854BC5E11}"/>
               </a:ext>
             </a:extLst>
           </p:cNvPr>
@@ -2117,7 +2117,7 @@
           <a:bodyPr/>
           <a:lstStyle/>
           <a:p>
-            <a:fld id="{AD7C8FE7-722C-461D-B9B6-D70E9B308F90}" type="slidenum">
+            <a:fld id="{8D08BC1A-6D3C-4FE8-BEEE-EFB3D133AC21}" type="slidenum">
               <a:rPr lang="de-DE" smtClean="0"/>
               <a:t>‹Nr.›</a:t>
             </a:fld>
@@ -2128,7 +2128,7 @@
     </p:spTree>
     <p:extLst>
       <p:ext uri="{BB962C8B-B14F-4D97-AF65-F5344CB8AC3E}">
-        <p14:creationId xmlns:p14="http://schemas.microsoft.com/office/powerpoint/2010/main" val="330324621"/>
+        <p14:creationId xmlns:p14="http://schemas.microsoft.com/office/powerpoint/2010/main" val="1884897600"/>
       </p:ext>
     </p:extLst>
   </p:cSld>
@@ -2160,7 +2160,7 @@
           <p:cNvPr id="2" name="Titel 1">
             <a:extLst>
               <a:ext uri="{FF2B5EF4-FFF2-40B4-BE49-F238E27FC236}">
-                <a16:creationId xmlns:a16="http://schemas.microsoft.com/office/drawing/2014/main" id="{2AB49A69-978C-07F4-9FA5-EF22E4E8CE97}"/>
+                <a16:creationId xmlns:a16="http://schemas.microsoft.com/office/drawing/2014/main" id="{186A5DFB-5CFF-EE04-F70B-2D9A439EF3CF}"/>
               </a:ext>
             </a:extLst>
           </p:cNvPr>
@@ -2197,7 +2197,7 @@
           <p:cNvPr id="3" name="Inhaltsplatzhalter 2">
             <a:extLst>
               <a:ext uri="{FF2B5EF4-FFF2-40B4-BE49-F238E27FC236}">
-                <a16:creationId xmlns:a16="http://schemas.microsoft.com/office/drawing/2014/main" id="{EE13FB68-7BA1-4BCB-5D7E-E349C0308846}"/>
+                <a16:creationId xmlns:a16="http://schemas.microsoft.com/office/drawing/2014/main" id="{C2933BE8-77A8-1F0E-43D3-CD94C0E50720}"/>
               </a:ext>
             </a:extLst>
           </p:cNvPr>
@@ -2287,7 +2287,7 @@
           <p:cNvPr id="4" name="Textplatzhalter 3">
             <a:extLst>
               <a:ext uri="{FF2B5EF4-FFF2-40B4-BE49-F238E27FC236}">
-                <a16:creationId xmlns:a16="http://schemas.microsoft.com/office/drawing/2014/main" id="{061781AC-AA51-B656-C30D-4BDD6A35B3D5}"/>
+                <a16:creationId xmlns:a16="http://schemas.microsoft.com/office/drawing/2014/main" id="{9953DAF8-58A2-38DC-8753-8EC20D6E3149}"/>
               </a:ext>
             </a:extLst>
           </p:cNvPr>
@@ -2358,7 +2358,7 @@
           <p:cNvPr id="5" name="Datumsplatzhalter 4">
             <a:extLst>
               <a:ext uri="{FF2B5EF4-FFF2-40B4-BE49-F238E27FC236}">
-                <a16:creationId xmlns:a16="http://schemas.microsoft.com/office/drawing/2014/main" id="{1E440796-E9E2-7EB1-DFCA-3F40D5AD4F63}"/>
+                <a16:creationId xmlns:a16="http://schemas.microsoft.com/office/drawing/2014/main" id="{827C8D6F-739E-382A-39B1-EC7E9505164E}"/>
               </a:ext>
             </a:extLst>
           </p:cNvPr>
@@ -2374,7 +2374,7 @@
           <a:bodyPr/>
           <a:lstStyle/>
           <a:p>
-            <a:fld id="{23C745AF-0725-49AB-8576-7DEF1B074F5B}" type="datetimeFigureOut">
+            <a:fld id="{D46E0ADC-957C-47CD-B06F-5A3BBE763F89}" type="datetimeFigureOut">
               <a:rPr lang="de-DE" smtClean="0"/>
               <a:t>08.10.2026</a:t>
             </a:fld>
@@ -2387,7 +2387,7 @@
           <p:cNvPr id="6" name="Fußzeilenplatzhalter 5">
             <a:extLst>
               <a:ext uri="{FF2B5EF4-FFF2-40B4-BE49-F238E27FC236}">
-                <a16:creationId xmlns:a16="http://schemas.microsoft.com/office/drawing/2014/main" id="{0A34E55F-D0FF-02E1-59F3-72E0455DB769}"/>
+                <a16:creationId xmlns:a16="http://schemas.microsoft.com/office/drawing/2014/main" id="{A50DEB93-8195-0913-C3B0-B3653FE53639}"/>
               </a:ext>
             </a:extLst>
           </p:cNvPr>
@@ -2412,7 +2412,7 @@
           <p:cNvPr id="7" name="Foliennummernplatzhalter 6">
             <a:extLst>
               <a:ext uri="{FF2B5EF4-FFF2-40B4-BE49-F238E27FC236}">
-                <a16:creationId xmlns:a16="http://schemas.microsoft.com/office/drawing/2014/main" id="{7CAE78C3-CD48-BBB8-CD75-90A05D9AA9D0}"/>
+                <a16:creationId xmlns:a16="http://schemas.microsoft.com/office/drawing/2014/main" id="{B15AFA8E-898F-4E00-AA13-741D68AEB817}"/>
               </a:ext>
             </a:extLst>
           </p:cNvPr>
@@ -2428,7 +2428,7 @@
           <a:bodyPr/>
           <a:lstStyle/>
           <a:p>
-            <a:fld id="{AD7C8FE7-722C-461D-B9B6-D70E9B308F90}" type="slidenum">
+            <a:fld id="{8D08BC1A-6D3C-4FE8-BEEE-EFB3D133AC21}" type="slidenum">
               <a:rPr lang="de-DE" smtClean="0"/>
               <a:t>‹Nr.›</a:t>
             </a:fld>
@@ -2439,7 +2439,7 @@
     </p:spTree>
     <p:extLst>
       <p:ext uri="{BB962C8B-B14F-4D97-AF65-F5344CB8AC3E}">
-        <p14:creationId xmlns:p14="http://schemas.microsoft.com/office/powerpoint/2010/main" val="3389436497"/>
+        <p14:creationId xmlns:p14="http://schemas.microsoft.com/office/powerpoint/2010/main" val="3435576511"/>
       </p:ext>
     </p:extLst>
   </p:cSld>
@@ -2471,7 +2471,7 @@
           <p:cNvPr id="2" name="Titel 1">
             <a:extLst>
               <a:ext uri="{FF2B5EF4-FFF2-40B4-BE49-F238E27FC236}">
-                <a16:creationId xmlns:a16="http://schemas.microsoft.com/office/drawing/2014/main" id="{86286344-0856-8ADD-35F5-07707674FEC2}"/>
+                <a16:creationId xmlns:a16="http://schemas.microsoft.com/office/drawing/2014/main" id="{F6F8A600-2129-F920-4F96-83CE1D896E0E}"/>
               </a:ext>
             </a:extLst>
           </p:cNvPr>
@@ -2508,7 +2508,7 @@
           <p:cNvPr id="3" name="Bildplatzhalter 2">
             <a:extLst>
               <a:ext uri="{FF2B5EF4-FFF2-40B4-BE49-F238E27FC236}">
-                <a16:creationId xmlns:a16="http://schemas.microsoft.com/office/drawing/2014/main" id="{49437F93-6DD5-BD95-F94C-3F0096AEBF54}"/>
+                <a16:creationId xmlns:a16="http://schemas.microsoft.com/office/drawing/2014/main" id="{DF73ED25-FA3C-237D-4C17-3E71014DD8A9}"/>
               </a:ext>
             </a:extLst>
           </p:cNvPr>
@@ -2575,7 +2575,7 @@
           <p:cNvPr id="4" name="Textplatzhalter 3">
             <a:extLst>
               <a:ext uri="{FF2B5EF4-FFF2-40B4-BE49-F238E27FC236}">
-                <a16:creationId xmlns:a16="http://schemas.microsoft.com/office/drawing/2014/main" id="{45038F4E-487B-2F19-E5A9-312AA55E3CE4}"/>
+                <a16:creationId xmlns:a16="http://schemas.microsoft.com/office/drawing/2014/main" id="{9B2135B6-6333-A3CA-6EBF-017B07020B64}"/>
               </a:ext>
             </a:extLst>
           </p:cNvPr>
@@ -2646,7 +2646,7 @@
           <p:cNvPr id="5" name="Datumsplatzhalter 4">
             <a:extLst>
               <a:ext uri="{FF2B5EF4-FFF2-40B4-BE49-F238E27FC236}">
-                <a16:creationId xmlns:a16="http://schemas.microsoft.com/office/drawing/2014/main" id="{50CD34C8-18C1-95AE-625A-7C25506362E3}"/>
+                <a16:creationId xmlns:a16="http://schemas.microsoft.com/office/drawing/2014/main" id="{0CACC9A3-04A7-22B2-A489-5E6361B45DD5}"/>
               </a:ext>
             </a:extLst>
           </p:cNvPr>
@@ -2662,7 +2662,7 @@
           <a:bodyPr/>
           <a:lstStyle/>
           <a:p>
-            <a:fld id="{23C745AF-0725-49AB-8576-7DEF1B074F5B}" type="datetimeFigureOut">
+            <a:fld id="{D46E0ADC-957C-47CD-B06F-5A3BBE763F89}" type="datetimeFigureOut">
               <a:rPr lang="de-DE" smtClean="0"/>
               <a:t>08.10.2026</a:t>
             </a:fld>
@@ -2675,7 +2675,7 @@
           <p:cNvPr id="6" name="Fußzeilenplatzhalter 5">
             <a:extLst>
               <a:ext uri="{FF2B5EF4-FFF2-40B4-BE49-F238E27FC236}">
-                <a16:creationId xmlns:a16="http://schemas.microsoft.com/office/drawing/2014/main" id="{BBEEEECD-3318-C27C-4E6C-DE0C0039E86D}"/>
+                <a16:creationId xmlns:a16="http://schemas.microsoft.com/office/drawing/2014/main" id="{98228EB8-7753-9E39-B166-42B1F667A479}"/>
               </a:ext>
             </a:extLst>
           </p:cNvPr>
@@ -2700,7 +2700,7 @@
           <p:cNvPr id="7" name="Foliennummernplatzhalter 6">
             <a:extLst>
               <a:ext uri="{FF2B5EF4-FFF2-40B4-BE49-F238E27FC236}">
-                <a16:creationId xmlns:a16="http://schemas.microsoft.com/office/drawing/2014/main" id="{F966E5F8-EEEE-1DE0-CD75-322BAB1CC49E}"/>
+                <a16:creationId xmlns:a16="http://schemas.microsoft.com/office/drawing/2014/main" id="{6FCE41E2-A849-A277-76E8-4EF5D7C68525}"/>
               </a:ext>
             </a:extLst>
           </p:cNvPr>
@@ -2716,7 +2716,7 @@
           <a:bodyPr/>
           <a:lstStyle/>
           <a:p>
-            <a:fld id="{AD7C8FE7-722C-461D-B9B6-D70E9B308F90}" type="slidenum">
+            <a:fld id="{8D08BC1A-6D3C-4FE8-BEEE-EFB3D133AC21}" type="slidenum">
               <a:rPr lang="de-DE" smtClean="0"/>
               <a:t>‹Nr.›</a:t>
             </a:fld>
@@ -2727,7 +2727,7 @@
     </p:spTree>
     <p:extLst>
       <p:ext uri="{BB962C8B-B14F-4D97-AF65-F5344CB8AC3E}">
-        <p14:creationId xmlns:p14="http://schemas.microsoft.com/office/powerpoint/2010/main" val="3618481278"/>
+        <p14:creationId xmlns:p14="http://schemas.microsoft.com/office/powerpoint/2010/main" val="124583038"/>
       </p:ext>
     </p:extLst>
   </p:cSld>
@@ -2764,7 +2764,7 @@
           <p:cNvPr id="2" name="Titelplatzhalter 1">
             <a:extLst>
               <a:ext uri="{FF2B5EF4-FFF2-40B4-BE49-F238E27FC236}">
-                <a16:creationId xmlns:a16="http://schemas.microsoft.com/office/drawing/2014/main" id="{7A0C1EC3-5221-1FA4-D52F-BBBF4D08D519}"/>
+                <a16:creationId xmlns:a16="http://schemas.microsoft.com/office/drawing/2014/main" id="{45FF5407-A597-0EE2-D65E-2D565D784EF5}"/>
               </a:ext>
             </a:extLst>
           </p:cNvPr>
@@ -2802,7 +2802,7 @@
           <p:cNvPr id="3" name="Textplatzhalter 2">
             <a:extLst>
               <a:ext uri="{FF2B5EF4-FFF2-40B4-BE49-F238E27FC236}">
-                <a16:creationId xmlns:a16="http://schemas.microsoft.com/office/drawing/2014/main" id="{118D508F-B094-32E8-4F18-B1BFBCE5A156}"/>
+                <a16:creationId xmlns:a16="http://schemas.microsoft.com/office/drawing/2014/main" id="{F1FD6D89-3747-AD6D-5920-6B6B04965D8E}"/>
               </a:ext>
             </a:extLst>
           </p:cNvPr>
@@ -2869,7 +2869,7 @@
           <p:cNvPr id="4" name="Datumsplatzhalter 3">
             <a:extLst>
               <a:ext uri="{FF2B5EF4-FFF2-40B4-BE49-F238E27FC236}">
-                <a16:creationId xmlns:a16="http://schemas.microsoft.com/office/drawing/2014/main" id="{F5D47B3F-85EF-A102-9DB8-8F50EEA689D9}"/>
+                <a16:creationId xmlns:a16="http://schemas.microsoft.com/office/drawing/2014/main" id="{353B2896-E4E4-4AA0-13FB-2F4A3301D683}"/>
               </a:ext>
             </a:extLst>
           </p:cNvPr>
@@ -2903,7 +2903,7 @@
             </a:lvl1pPr>
           </a:lstStyle>
           <a:p>
-            <a:fld id="{23C745AF-0725-49AB-8576-7DEF1B074F5B}" type="datetimeFigureOut">
+            <a:fld id="{D46E0ADC-957C-47CD-B06F-5A3BBE763F89}" type="datetimeFigureOut">
               <a:rPr lang="de-DE" smtClean="0"/>
               <a:t>08.10.2026</a:t>
             </a:fld>
@@ -2916,7 +2916,7 @@
           <p:cNvPr id="5" name="Fußzeilenplatzhalter 4">
             <a:extLst>
               <a:ext uri="{FF2B5EF4-FFF2-40B4-BE49-F238E27FC236}">
-                <a16:creationId xmlns:a16="http://schemas.microsoft.com/office/drawing/2014/main" id="{36A22CD8-F9C1-9EBF-5233-E8C90BE92F80}"/>
+                <a16:creationId xmlns:a16="http://schemas.microsoft.com/office/drawing/2014/main" id="{C48CBB6D-5E64-B8F2-D1D2-E606FC0830F0}"/>
               </a:ext>
             </a:extLst>
           </p:cNvPr>
@@ -2959,7 +2959,7 @@
           <p:cNvPr id="6" name="Foliennummernplatzhalter 5">
             <a:extLst>
               <a:ext uri="{FF2B5EF4-FFF2-40B4-BE49-F238E27FC236}">
-                <a16:creationId xmlns:a16="http://schemas.microsoft.com/office/drawing/2014/main" id="{97EC6D5B-CCC7-E937-5F13-BEF843AD70E0}"/>
+                <a16:creationId xmlns:a16="http://schemas.microsoft.com/office/drawing/2014/main" id="{F2920101-7EAE-79F9-5408-7F09B8E91ACF}"/>
               </a:ext>
             </a:extLst>
           </p:cNvPr>
@@ -2993,7 +2993,7 @@
             </a:lvl1pPr>
           </a:lstStyle>
           <a:p>
-            <a:fld id="{AD7C8FE7-722C-461D-B9B6-D70E9B308F90}" type="slidenum">
+            <a:fld id="{8D08BC1A-6D3C-4FE8-BEEE-EFB3D133AC21}" type="slidenum">
               <a:rPr lang="de-DE" smtClean="0"/>
               <a:t>‹Nr.›</a:t>
             </a:fld>
@@ -3004,7 +3004,7 @@
     </p:spTree>
     <p:extLst>
       <p:ext uri="{BB962C8B-B14F-4D97-AF65-F5344CB8AC3E}">
-        <p14:creationId xmlns:p14="http://schemas.microsoft.com/office/powerpoint/2010/main" val="453200974"/>
+        <p14:creationId xmlns:p14="http://schemas.microsoft.com/office/powerpoint/2010/main" val="1104313220"/>
       </p:ext>
     </p:extLst>
   </p:cSld>
@@ -3327,7 +3327,7 @@
           <p:cNvPr id="2" name="Pfeil: nach rechts 1">
             <a:extLst>
               <a:ext uri="{FF2B5EF4-FFF2-40B4-BE49-F238E27FC236}">
-                <a16:creationId xmlns:a16="http://schemas.microsoft.com/office/drawing/2014/main" id="{CE09917C-6958-BA85-5599-82CEBF137F2A}"/>
+                <a16:creationId xmlns:a16="http://schemas.microsoft.com/office/drawing/2014/main" id="{D22CAAC3-B389-CCA3-3285-E409769E5166}"/>
               </a:ext>
             </a:extLst>
           </p:cNvPr>
@@ -3373,7 +3373,7 @@
           <p:cNvPr id="3" name="Rechteck 2">
             <a:extLst>
               <a:ext uri="{FF2B5EF4-FFF2-40B4-BE49-F238E27FC236}">
-                <a16:creationId xmlns:a16="http://schemas.microsoft.com/office/drawing/2014/main" id="{B27A6165-086F-8526-22B1-D96E4D751FBD}"/>
+                <a16:creationId xmlns:a16="http://schemas.microsoft.com/office/drawing/2014/main" id="{20CC08E8-AD26-7F89-4469-338E641F1379}"/>
               </a:ext>
             </a:extLst>
           </p:cNvPr>
@@ -3422,7 +3422,7 @@
           <p:cNvPr id="4" name="Pfeil: nach rechts 3">
             <a:extLst>
               <a:ext uri="{FF2B5EF4-FFF2-40B4-BE49-F238E27FC236}">
-                <a16:creationId xmlns:a16="http://schemas.microsoft.com/office/drawing/2014/main" id="{ABA98950-7379-DD5C-A849-A35FBB7DB83A}"/>
+                <a16:creationId xmlns:a16="http://schemas.microsoft.com/office/drawing/2014/main" id="{01B56EEA-E18E-F879-EEE3-75223C64510B}"/>
               </a:ext>
             </a:extLst>
           </p:cNvPr>
@@ -3468,7 +3468,7 @@
           <p:cNvPr id="5" name="Rechteck 4">
             <a:extLst>
               <a:ext uri="{FF2B5EF4-FFF2-40B4-BE49-F238E27FC236}">
-                <a16:creationId xmlns:a16="http://schemas.microsoft.com/office/drawing/2014/main" id="{1D7F2BF8-8EAB-AD5A-A2FA-B8152CB9CCA4}"/>
+                <a16:creationId xmlns:a16="http://schemas.microsoft.com/office/drawing/2014/main" id="{60417F79-F44F-8233-60D6-6C32BF4F4FEF}"/>
               </a:ext>
             </a:extLst>
           </p:cNvPr>
@@ -3517,7 +3517,7 @@
           <p:cNvPr id="6" name="Pfeil: nach rechts 5">
             <a:extLst>
               <a:ext uri="{FF2B5EF4-FFF2-40B4-BE49-F238E27FC236}">
-                <a16:creationId xmlns:a16="http://schemas.microsoft.com/office/drawing/2014/main" id="{F84A38C5-39FF-3DAF-C33C-B2C47DFE2B5C}"/>
+                <a16:creationId xmlns:a16="http://schemas.microsoft.com/office/drawing/2014/main" id="{FAC40657-8115-0CEA-71CB-B8D7CD3481BC}"/>
               </a:ext>
             </a:extLst>
           </p:cNvPr>
@@ -3563,7 +3563,7 @@
           <p:cNvPr id="7" name="Rechteck 6">
             <a:extLst>
               <a:ext uri="{FF2B5EF4-FFF2-40B4-BE49-F238E27FC236}">
-                <a16:creationId xmlns:a16="http://schemas.microsoft.com/office/drawing/2014/main" id="{5226BD2B-9859-8109-487B-6E17EAB739C2}"/>
+                <a16:creationId xmlns:a16="http://schemas.microsoft.com/office/drawing/2014/main" id="{4184F249-F9CA-8067-1E80-7DE83774190F}"/>
               </a:ext>
             </a:extLst>
           </p:cNvPr>
@@ -3612,7 +3612,7 @@
           <p:cNvPr id="8" name="Pfeil: nach rechts 7">
             <a:extLst>
               <a:ext uri="{FF2B5EF4-FFF2-40B4-BE49-F238E27FC236}">
-                <a16:creationId xmlns:a16="http://schemas.microsoft.com/office/drawing/2014/main" id="{7F5398EA-FDE7-3BB8-D164-B0EE484B2AD9}"/>
+                <a16:creationId xmlns:a16="http://schemas.microsoft.com/office/drawing/2014/main" id="{0D80189E-E714-F8AE-81AB-003158AF4EB1}"/>
               </a:ext>
             </a:extLst>
           </p:cNvPr>
@@ -3658,7 +3658,7 @@
           <p:cNvPr id="9" name="Rechteck 8">
             <a:extLst>
               <a:ext uri="{FF2B5EF4-FFF2-40B4-BE49-F238E27FC236}">
-                <a16:creationId xmlns:a16="http://schemas.microsoft.com/office/drawing/2014/main" id="{352DD4D4-E160-E4D3-41ED-DB1C8CBCD5F2}"/>
+                <a16:creationId xmlns:a16="http://schemas.microsoft.com/office/drawing/2014/main" id="{F9216189-48A6-37D6-610E-95F900B4CDEE}"/>
               </a:ext>
             </a:extLst>
           </p:cNvPr>
@@ -3707,7 +3707,7 @@
           <p:cNvPr id="10" name="Pfeil: nach rechts 9">
             <a:extLst>
               <a:ext uri="{FF2B5EF4-FFF2-40B4-BE49-F238E27FC236}">
-                <a16:creationId xmlns:a16="http://schemas.microsoft.com/office/drawing/2014/main" id="{0D734B70-4909-5531-B736-AD313E3772EC}"/>
+                <a16:creationId xmlns:a16="http://schemas.microsoft.com/office/drawing/2014/main" id="{362644EF-0556-4A55-67F3-F21F21ECD3F0}"/>
               </a:ext>
             </a:extLst>
           </p:cNvPr>
@@ -3753,7 +3753,7 @@
           <p:cNvPr id="11" name="Rechteck 10">
             <a:extLst>
               <a:ext uri="{FF2B5EF4-FFF2-40B4-BE49-F238E27FC236}">
-                <a16:creationId xmlns:a16="http://schemas.microsoft.com/office/drawing/2014/main" id="{95CEBB3B-FAD0-1FE1-C147-9F792F9C77EB}"/>
+                <a16:creationId xmlns:a16="http://schemas.microsoft.com/office/drawing/2014/main" id="{95950525-1327-3CE0-EC17-E1728E420881}"/>
               </a:ext>
             </a:extLst>
           </p:cNvPr>
@@ -3802,7 +3802,7 @@
           <p:cNvPr id="12" name="Pfeil: nach rechts 11">
             <a:extLst>
               <a:ext uri="{FF2B5EF4-FFF2-40B4-BE49-F238E27FC236}">
-                <a16:creationId xmlns:a16="http://schemas.microsoft.com/office/drawing/2014/main" id="{5BB3FECC-0AB2-8DD5-0FD3-8EA409AF9E8D}"/>
+                <a16:creationId xmlns:a16="http://schemas.microsoft.com/office/drawing/2014/main" id="{3CCDAFD8-5B38-559B-0A97-4A694B84F694}"/>
               </a:ext>
             </a:extLst>
           </p:cNvPr>
@@ -3848,7 +3848,7 @@
           <p:cNvPr id="13" name="Rechteck 12">
             <a:extLst>
               <a:ext uri="{FF2B5EF4-FFF2-40B4-BE49-F238E27FC236}">
-                <a16:creationId xmlns:a16="http://schemas.microsoft.com/office/drawing/2014/main" id="{6B40E3FB-2102-77C3-DD63-B9951F256B78}"/>
+                <a16:creationId xmlns:a16="http://schemas.microsoft.com/office/drawing/2014/main" id="{5FC89E20-7C7C-9F5C-BC85-C50135B44939}"/>
               </a:ext>
             </a:extLst>
           </p:cNvPr>
@@ -3897,7 +3897,7 @@
           <p:cNvPr id="14" name="Pfeil: nach rechts 13">
             <a:extLst>
               <a:ext uri="{FF2B5EF4-FFF2-40B4-BE49-F238E27FC236}">
-                <a16:creationId xmlns:a16="http://schemas.microsoft.com/office/drawing/2014/main" id="{F19CC69F-24E7-ED3D-CDEB-B079F5F57AAD}"/>
+                <a16:creationId xmlns:a16="http://schemas.microsoft.com/office/drawing/2014/main" id="{E9BEBA61-DFFF-88C1-0DB2-01FCC0822414}"/>
               </a:ext>
             </a:extLst>
           </p:cNvPr>
@@ -3946,7 +3946,7 @@
           <p:cNvPr id="15" name="Pfeil: nach rechts 14">
             <a:extLst>
               <a:ext uri="{FF2B5EF4-FFF2-40B4-BE49-F238E27FC236}">
-                <a16:creationId xmlns:a16="http://schemas.microsoft.com/office/drawing/2014/main" id="{EDDC0FBF-2A78-F0ED-E91C-2DE0F8C2FB35}"/>
+                <a16:creationId xmlns:a16="http://schemas.microsoft.com/office/drawing/2014/main" id="{14F8625A-B7D2-D7E5-CA95-332DF72FC418}"/>
               </a:ext>
             </a:extLst>
           </p:cNvPr>
@@ -3995,7 +3995,7 @@
           <p:cNvPr id="16" name="Pfeil: nach rechts 15">
             <a:extLst>
               <a:ext uri="{FF2B5EF4-FFF2-40B4-BE49-F238E27FC236}">
-                <a16:creationId xmlns:a16="http://schemas.microsoft.com/office/drawing/2014/main" id="{03E9F57D-4195-ACDF-18A7-1EAB3D14534F}"/>
+                <a16:creationId xmlns:a16="http://schemas.microsoft.com/office/drawing/2014/main" id="{D3B167D2-7F73-F3B6-9CCC-D07DECA88C35}"/>
               </a:ext>
             </a:extLst>
           </p:cNvPr>
@@ -4044,7 +4044,7 @@
           <p:cNvPr id="17" name="Pfeil: nach rechts 16">
             <a:extLst>
               <a:ext uri="{FF2B5EF4-FFF2-40B4-BE49-F238E27FC236}">
-                <a16:creationId xmlns:a16="http://schemas.microsoft.com/office/drawing/2014/main" id="{ECDF15FA-23DB-98B9-0F09-8FE2D2E7BDC1}"/>
+                <a16:creationId xmlns:a16="http://schemas.microsoft.com/office/drawing/2014/main" id="{BDB8B560-B1CF-4B07-F40E-7439B1FBB7D5}"/>
               </a:ext>
             </a:extLst>
           </p:cNvPr>
@@ -4091,7 +4091,7 @@
     </p:spTree>
     <p:extLst>
       <p:ext uri="{BB962C8B-B14F-4D97-AF65-F5344CB8AC3E}">
-        <p14:creationId xmlns:p14="http://schemas.microsoft.com/office/powerpoint/2010/main" val="2885940623"/>
+        <p14:creationId xmlns:p14="http://schemas.microsoft.com/office/powerpoint/2010/main" val="1001195420"/>
       </p:ext>
     </p:extLst>
   </p:cSld>
@@ -4123,7 +4123,7 @@
           <p:cNvPr id="5" name="Gruppieren 4">
             <a:extLst>
               <a:ext uri="{FF2B5EF4-FFF2-40B4-BE49-F238E27FC236}">
-                <a16:creationId xmlns:a16="http://schemas.microsoft.com/office/drawing/2014/main" id="{242AEB26-3273-DACF-D053-55ACEF9EA39F}"/>
+                <a16:creationId xmlns:a16="http://schemas.microsoft.com/office/drawing/2014/main" id="{61FD9569-7D2E-E1CF-138A-B822706A3899}"/>
               </a:ext>
             </a:extLst>
           </p:cNvPr>
@@ -4143,7 +4143,7 @@
             <p:cNvPr id="2" name="A">
               <a:extLst>
                 <a:ext uri="{FF2B5EF4-FFF2-40B4-BE49-F238E27FC236}">
-                  <a16:creationId xmlns:a16="http://schemas.microsoft.com/office/drawing/2014/main" id="{EA14DB9C-5E6D-20B9-731D-D43565005BB6}"/>
+                  <a16:creationId xmlns:a16="http://schemas.microsoft.com/office/drawing/2014/main" id="{3A7C6F11-C854-0BD6-3334-023F7BA15973}"/>
                 </a:ext>
               </a:extLst>
             </p:cNvPr>
@@ -4189,7 +4189,7 @@
             <p:cNvPr id="3" name="B">
               <a:extLst>
                 <a:ext uri="{FF2B5EF4-FFF2-40B4-BE49-F238E27FC236}">
-                  <a16:creationId xmlns:a16="http://schemas.microsoft.com/office/drawing/2014/main" id="{D37AD6C4-59F6-DD83-9E42-39370DA7AE1B}"/>
+                  <a16:creationId xmlns:a16="http://schemas.microsoft.com/office/drawing/2014/main" id="{30F6AE03-1F0D-3FC9-84B0-6AD8D95B51DD}"/>
                 </a:ext>
               </a:extLst>
             </p:cNvPr>
@@ -4235,7 +4235,7 @@
             <p:cNvPr id="4" name="C">
               <a:extLst>
                 <a:ext uri="{FF2B5EF4-FFF2-40B4-BE49-F238E27FC236}">
-                  <a16:creationId xmlns:a16="http://schemas.microsoft.com/office/drawing/2014/main" id="{B93F3C91-068E-27F1-311A-A02459E3DB5E}"/>
+                  <a16:creationId xmlns:a16="http://schemas.microsoft.com/office/drawing/2014/main" id="{AC101AF9-E4D2-F413-071F-031B70E405FB}"/>
                 </a:ext>
               </a:extLst>
             </p:cNvPr>
@@ -4282,7 +4282,7 @@
           <p:cNvPr id="6" name="D">
             <a:extLst>
               <a:ext uri="{FF2B5EF4-FFF2-40B4-BE49-F238E27FC236}">
-                <a16:creationId xmlns:a16="http://schemas.microsoft.com/office/drawing/2014/main" id="{535D46AD-53CC-4557-0A05-90E4D30D9664}"/>
+                <a16:creationId xmlns:a16="http://schemas.microsoft.com/office/drawing/2014/main" id="{7C905D55-2207-BB3F-7758-E7D6F7F66CC0}"/>
               </a:ext>
             </a:extLst>
           </p:cNvPr>
@@ -4328,7 +4328,7 @@
           <p:cNvPr id="7" name="E">
             <a:extLst>
               <a:ext uri="{FF2B5EF4-FFF2-40B4-BE49-F238E27FC236}">
-                <a16:creationId xmlns:a16="http://schemas.microsoft.com/office/drawing/2014/main" id="{5394A387-3FBC-B222-AFF2-47283DE785A8}"/>
+                <a16:creationId xmlns:a16="http://schemas.microsoft.com/office/drawing/2014/main" id="{B33FBFD5-F26F-F13A-48C6-4D9E8BDB4749}"/>
               </a:ext>
             </a:extLst>
           </p:cNvPr>
@@ -4374,7 +4374,7 @@
           <p:cNvPr id="8" name="Gerade Verbindung mit Pfeil 7">
             <a:extLst>
               <a:ext uri="{FF2B5EF4-FFF2-40B4-BE49-F238E27FC236}">
-                <a16:creationId xmlns:a16="http://schemas.microsoft.com/office/drawing/2014/main" id="{73398C97-9086-F275-6227-0F7AAD18F370}"/>
+                <a16:creationId xmlns:a16="http://schemas.microsoft.com/office/drawing/2014/main" id="{7BFA7A7D-44F7-BA2A-98CE-3DE8E6962AFB}"/>
               </a:ext>
             </a:extLst>
           </p:cNvPr>
@@ -4415,7 +4415,7 @@
           <p:cNvPr id="9" name="Verbinder: gewinkelt 8">
             <a:extLst>
               <a:ext uri="{FF2B5EF4-FFF2-40B4-BE49-F238E27FC236}">
-                <a16:creationId xmlns:a16="http://schemas.microsoft.com/office/drawing/2014/main" id="{F877DF83-D4DC-6A7A-E446-B4F019A80417}"/>
+                <a16:creationId xmlns:a16="http://schemas.microsoft.com/office/drawing/2014/main" id="{0233B4EF-59F0-D9CC-B47D-8022F9E81D3B}"/>
               </a:ext>
             </a:extLst>
           </p:cNvPr>
@@ -4456,7 +4456,7 @@
           <p:cNvPr id="10" name="Verbinder: gekrümmt 9">
             <a:extLst>
               <a:ext uri="{FF2B5EF4-FFF2-40B4-BE49-F238E27FC236}">
-                <a16:creationId xmlns:a16="http://schemas.microsoft.com/office/drawing/2014/main" id="{0B1914FD-589F-C8F9-DA6B-7AD1630056CE}"/>
+                <a16:creationId xmlns:a16="http://schemas.microsoft.com/office/drawing/2014/main" id="{ABF2DF53-7E0F-66E5-E54B-E2355B269DC7}"/>
               </a:ext>
             </a:extLst>
           </p:cNvPr>
@@ -4495,7 +4495,7 @@
     </p:spTree>
     <p:extLst>
       <p:ext uri="{BB962C8B-B14F-4D97-AF65-F5344CB8AC3E}">
-        <p14:creationId xmlns:p14="http://schemas.microsoft.com/office/powerpoint/2010/main" val="3813828737"/>
+        <p14:creationId xmlns:p14="http://schemas.microsoft.com/office/powerpoint/2010/main" val="205862273"/>
       </p:ext>
     </p:extLst>
   </p:cSld>

--- a/tests/corpus/pptx/generated/transforms.pptx
+++ b/tests/corpus/pptx/generated/transforms.pptx
@@ -130,7 +130,7 @@
           <p:cNvPr id="2" name="Titel 1">
             <a:extLst>
               <a:ext uri="{FF2B5EF4-FFF2-40B4-BE49-F238E27FC236}">
-                <a16:creationId xmlns:a16="http://schemas.microsoft.com/office/drawing/2014/main" id="{246D9068-143A-EA7E-7DD5-E8AA5E551415}"/>
+                <a16:creationId xmlns:a16="http://schemas.microsoft.com/office/drawing/2014/main" id="{0DA1796B-2B5A-7F26-F393-2CD24C3698E2}"/>
               </a:ext>
             </a:extLst>
           </p:cNvPr>
@@ -167,7 +167,7 @@
           <p:cNvPr id="3" name="Untertitel 2">
             <a:extLst>
               <a:ext uri="{FF2B5EF4-FFF2-40B4-BE49-F238E27FC236}">
-                <a16:creationId xmlns:a16="http://schemas.microsoft.com/office/drawing/2014/main" id="{8F48431A-CF65-BE40-4670-9B144F590F8B}"/>
+                <a16:creationId xmlns:a16="http://schemas.microsoft.com/office/drawing/2014/main" id="{81B9BD4C-523D-D111-ACD5-D91D928EF037}"/>
               </a:ext>
             </a:extLst>
           </p:cNvPr>
@@ -237,7 +237,7 @@
           <p:cNvPr id="4" name="Datumsplatzhalter 3">
             <a:extLst>
               <a:ext uri="{FF2B5EF4-FFF2-40B4-BE49-F238E27FC236}">
-                <a16:creationId xmlns:a16="http://schemas.microsoft.com/office/drawing/2014/main" id="{2FE11F86-D5E8-E55A-182C-7797D1A16845}"/>
+                <a16:creationId xmlns:a16="http://schemas.microsoft.com/office/drawing/2014/main" id="{89445268-903F-2CE7-45A9-0A19F02D7865}"/>
               </a:ext>
             </a:extLst>
           </p:cNvPr>
@@ -253,7 +253,7 @@
           <a:bodyPr/>
           <a:lstStyle/>
           <a:p>
-            <a:fld id="{D46E0ADC-957C-47CD-B06F-5A3BBE763F89}" type="datetimeFigureOut">
+            <a:fld id="{A6D1D2A2-AD13-4142-B938-4FE911EA0C8A}" type="datetimeFigureOut">
               <a:rPr lang="de-DE" smtClean="0"/>
               <a:t>08.10.2026</a:t>
             </a:fld>
@@ -266,7 +266,7 @@
           <p:cNvPr id="5" name="Fußzeilenplatzhalter 4">
             <a:extLst>
               <a:ext uri="{FF2B5EF4-FFF2-40B4-BE49-F238E27FC236}">
-                <a16:creationId xmlns:a16="http://schemas.microsoft.com/office/drawing/2014/main" id="{C3FFC65E-58F4-D29C-D0C0-983CAD46FD71}"/>
+                <a16:creationId xmlns:a16="http://schemas.microsoft.com/office/drawing/2014/main" id="{5E6EC8EC-4881-AC02-5EAB-2097632269D2}"/>
               </a:ext>
             </a:extLst>
           </p:cNvPr>
@@ -291,7 +291,7 @@
           <p:cNvPr id="6" name="Foliennummernplatzhalter 5">
             <a:extLst>
               <a:ext uri="{FF2B5EF4-FFF2-40B4-BE49-F238E27FC236}">
-                <a16:creationId xmlns:a16="http://schemas.microsoft.com/office/drawing/2014/main" id="{DC773D49-CFA1-A0FD-5375-2CF7622F6EF9}"/>
+                <a16:creationId xmlns:a16="http://schemas.microsoft.com/office/drawing/2014/main" id="{09E0ACA0-2AF4-0481-6294-9C60DFCC3BBE}"/>
               </a:ext>
             </a:extLst>
           </p:cNvPr>
@@ -307,7 +307,7 @@
           <a:bodyPr/>
           <a:lstStyle/>
           <a:p>
-            <a:fld id="{8D08BC1A-6D3C-4FE8-BEEE-EFB3D133AC21}" type="slidenum">
+            <a:fld id="{8EA70C56-1F2C-4F2D-9E80-8179F8AB0650}" type="slidenum">
               <a:rPr lang="de-DE" smtClean="0"/>
               <a:t>‹Nr.›</a:t>
             </a:fld>
@@ -318,7 +318,7 @@
     </p:spTree>
     <p:extLst>
       <p:ext uri="{BB962C8B-B14F-4D97-AF65-F5344CB8AC3E}">
-        <p14:creationId xmlns:p14="http://schemas.microsoft.com/office/powerpoint/2010/main" val="487608678"/>
+        <p14:creationId xmlns:p14="http://schemas.microsoft.com/office/powerpoint/2010/main" val="2484037699"/>
       </p:ext>
     </p:extLst>
   </p:cSld>
@@ -350,7 +350,7 @@
           <p:cNvPr id="2" name="Titel 1">
             <a:extLst>
               <a:ext uri="{FF2B5EF4-FFF2-40B4-BE49-F238E27FC236}">
-                <a16:creationId xmlns:a16="http://schemas.microsoft.com/office/drawing/2014/main" id="{B32428B7-3773-3FF0-A86F-10A3E44D22E0}"/>
+                <a16:creationId xmlns:a16="http://schemas.microsoft.com/office/drawing/2014/main" id="{0C7FC551-1FF9-F752-0FFF-56374F77126A}"/>
               </a:ext>
             </a:extLst>
           </p:cNvPr>
@@ -378,7 +378,7 @@
           <p:cNvPr id="3" name="Vertikaler Textplatzhalter 2">
             <a:extLst>
               <a:ext uri="{FF2B5EF4-FFF2-40B4-BE49-F238E27FC236}">
-                <a16:creationId xmlns:a16="http://schemas.microsoft.com/office/drawing/2014/main" id="{A1FB29CE-971C-9046-C631-D7F832405264}"/>
+                <a16:creationId xmlns:a16="http://schemas.microsoft.com/office/drawing/2014/main" id="{49D011A3-0985-7FF7-A4D8-EBDD2177844F}"/>
               </a:ext>
             </a:extLst>
           </p:cNvPr>
@@ -435,7 +435,7 @@
           <p:cNvPr id="4" name="Datumsplatzhalter 3">
             <a:extLst>
               <a:ext uri="{FF2B5EF4-FFF2-40B4-BE49-F238E27FC236}">
-                <a16:creationId xmlns:a16="http://schemas.microsoft.com/office/drawing/2014/main" id="{76F458F8-758B-1B23-D3F2-FAE3752EA572}"/>
+                <a16:creationId xmlns:a16="http://schemas.microsoft.com/office/drawing/2014/main" id="{1B2415A6-7753-396E-B83D-E5D0CD484976}"/>
               </a:ext>
             </a:extLst>
           </p:cNvPr>
@@ -451,7 +451,7 @@
           <a:bodyPr/>
           <a:lstStyle/>
           <a:p>
-            <a:fld id="{D46E0ADC-957C-47CD-B06F-5A3BBE763F89}" type="datetimeFigureOut">
+            <a:fld id="{A6D1D2A2-AD13-4142-B938-4FE911EA0C8A}" type="datetimeFigureOut">
               <a:rPr lang="de-DE" smtClean="0"/>
               <a:t>08.10.2026</a:t>
             </a:fld>
@@ -464,7 +464,7 @@
           <p:cNvPr id="5" name="Fußzeilenplatzhalter 4">
             <a:extLst>
               <a:ext uri="{FF2B5EF4-FFF2-40B4-BE49-F238E27FC236}">
-                <a16:creationId xmlns:a16="http://schemas.microsoft.com/office/drawing/2014/main" id="{8BB1DE3F-D557-30E9-DF63-E503BC88C530}"/>
+                <a16:creationId xmlns:a16="http://schemas.microsoft.com/office/drawing/2014/main" id="{72CE9497-EE6D-8239-8B6D-BE4C7B5534F2}"/>
               </a:ext>
             </a:extLst>
           </p:cNvPr>
@@ -489,7 +489,7 @@
           <p:cNvPr id="6" name="Foliennummernplatzhalter 5">
             <a:extLst>
               <a:ext uri="{FF2B5EF4-FFF2-40B4-BE49-F238E27FC236}">
-                <a16:creationId xmlns:a16="http://schemas.microsoft.com/office/drawing/2014/main" id="{A877BBD5-1B51-575B-4707-3166150EDD4B}"/>
+                <a16:creationId xmlns:a16="http://schemas.microsoft.com/office/drawing/2014/main" id="{3F0B5801-024B-BC60-E7F3-AD95D480B669}"/>
               </a:ext>
             </a:extLst>
           </p:cNvPr>
@@ -505,7 +505,7 @@
           <a:bodyPr/>
           <a:lstStyle/>
           <a:p>
-            <a:fld id="{8D08BC1A-6D3C-4FE8-BEEE-EFB3D133AC21}" type="slidenum">
+            <a:fld id="{8EA70C56-1F2C-4F2D-9E80-8179F8AB0650}" type="slidenum">
               <a:rPr lang="de-DE" smtClean="0"/>
               <a:t>‹Nr.›</a:t>
             </a:fld>
@@ -516,7 +516,7 @@
     </p:spTree>
     <p:extLst>
       <p:ext uri="{BB962C8B-B14F-4D97-AF65-F5344CB8AC3E}">
-        <p14:creationId xmlns:p14="http://schemas.microsoft.com/office/powerpoint/2010/main" val="2355288929"/>
+        <p14:creationId xmlns:p14="http://schemas.microsoft.com/office/powerpoint/2010/main" val="2416293760"/>
       </p:ext>
     </p:extLst>
   </p:cSld>
@@ -548,7 +548,7 @@
           <p:cNvPr id="2" name="Vertikaler Titel 1">
             <a:extLst>
               <a:ext uri="{FF2B5EF4-FFF2-40B4-BE49-F238E27FC236}">
-                <a16:creationId xmlns:a16="http://schemas.microsoft.com/office/drawing/2014/main" id="{5EA42702-A866-A445-6802-71F9C358DF4E}"/>
+                <a16:creationId xmlns:a16="http://schemas.microsoft.com/office/drawing/2014/main" id="{FE5C9A0C-FC48-B3F8-B54F-ADF85E65BD04}"/>
               </a:ext>
             </a:extLst>
           </p:cNvPr>
@@ -581,7 +581,7 @@
           <p:cNvPr id="3" name="Vertikaler Textplatzhalter 2">
             <a:extLst>
               <a:ext uri="{FF2B5EF4-FFF2-40B4-BE49-F238E27FC236}">
-                <a16:creationId xmlns:a16="http://schemas.microsoft.com/office/drawing/2014/main" id="{EA461013-5915-7470-899A-93DD1D6614E3}"/>
+                <a16:creationId xmlns:a16="http://schemas.microsoft.com/office/drawing/2014/main" id="{E5A501C5-E42E-F734-DAC0-D98ACE35C92C}"/>
               </a:ext>
             </a:extLst>
           </p:cNvPr>
@@ -643,7 +643,7 @@
           <p:cNvPr id="4" name="Datumsplatzhalter 3">
             <a:extLst>
               <a:ext uri="{FF2B5EF4-FFF2-40B4-BE49-F238E27FC236}">
-                <a16:creationId xmlns:a16="http://schemas.microsoft.com/office/drawing/2014/main" id="{B13F6376-C7BD-AAD7-0622-0C053883B549}"/>
+                <a16:creationId xmlns:a16="http://schemas.microsoft.com/office/drawing/2014/main" id="{0C5197CD-CFE1-471D-5489-51F1A244468F}"/>
               </a:ext>
             </a:extLst>
           </p:cNvPr>
@@ -659,7 +659,7 @@
           <a:bodyPr/>
           <a:lstStyle/>
           <a:p>
-            <a:fld id="{D46E0ADC-957C-47CD-B06F-5A3BBE763F89}" type="datetimeFigureOut">
+            <a:fld id="{A6D1D2A2-AD13-4142-B938-4FE911EA0C8A}" type="datetimeFigureOut">
               <a:rPr lang="de-DE" smtClean="0"/>
               <a:t>08.10.2026</a:t>
             </a:fld>
@@ -672,7 +672,7 @@
           <p:cNvPr id="5" name="Fußzeilenplatzhalter 4">
             <a:extLst>
               <a:ext uri="{FF2B5EF4-FFF2-40B4-BE49-F238E27FC236}">
-                <a16:creationId xmlns:a16="http://schemas.microsoft.com/office/drawing/2014/main" id="{B0B0D330-966B-95F7-55A6-97E6B3D572AB}"/>
+                <a16:creationId xmlns:a16="http://schemas.microsoft.com/office/drawing/2014/main" id="{64828635-F2F3-EE16-BAE6-E451A7AE9C05}"/>
               </a:ext>
             </a:extLst>
           </p:cNvPr>
@@ -697,7 +697,7 @@
           <p:cNvPr id="6" name="Foliennummernplatzhalter 5">
             <a:extLst>
               <a:ext uri="{FF2B5EF4-FFF2-40B4-BE49-F238E27FC236}">
-                <a16:creationId xmlns:a16="http://schemas.microsoft.com/office/drawing/2014/main" id="{B8564510-7E30-1FB9-B997-03A8FE80B2B7}"/>
+                <a16:creationId xmlns:a16="http://schemas.microsoft.com/office/drawing/2014/main" id="{B1767A4B-BAC0-B6F5-268E-5CFD37BA79EF}"/>
               </a:ext>
             </a:extLst>
           </p:cNvPr>
@@ -713,7 +713,7 @@
           <a:bodyPr/>
           <a:lstStyle/>
           <a:p>
-            <a:fld id="{8D08BC1A-6D3C-4FE8-BEEE-EFB3D133AC21}" type="slidenum">
+            <a:fld id="{8EA70C56-1F2C-4F2D-9E80-8179F8AB0650}" type="slidenum">
               <a:rPr lang="de-DE" smtClean="0"/>
               <a:t>‹Nr.›</a:t>
             </a:fld>
@@ -724,7 +724,7 @@
     </p:spTree>
     <p:extLst>
       <p:ext uri="{BB962C8B-B14F-4D97-AF65-F5344CB8AC3E}">
-        <p14:creationId xmlns:p14="http://schemas.microsoft.com/office/powerpoint/2010/main" val="1507730380"/>
+        <p14:creationId xmlns:p14="http://schemas.microsoft.com/office/powerpoint/2010/main" val="1643278654"/>
       </p:ext>
     </p:extLst>
   </p:cSld>
@@ -756,7 +756,7 @@
           <p:cNvPr id="2" name="Titel 1">
             <a:extLst>
               <a:ext uri="{FF2B5EF4-FFF2-40B4-BE49-F238E27FC236}">
-                <a16:creationId xmlns:a16="http://schemas.microsoft.com/office/drawing/2014/main" id="{9639B1EC-76F0-EDCA-3E85-3F8E10111847}"/>
+                <a16:creationId xmlns:a16="http://schemas.microsoft.com/office/drawing/2014/main" id="{9FDCA81B-D918-33F8-2F2F-A913451329CF}"/>
               </a:ext>
             </a:extLst>
           </p:cNvPr>
@@ -784,7 +784,7 @@
           <p:cNvPr id="3" name="Inhaltsplatzhalter 2">
             <a:extLst>
               <a:ext uri="{FF2B5EF4-FFF2-40B4-BE49-F238E27FC236}">
-                <a16:creationId xmlns:a16="http://schemas.microsoft.com/office/drawing/2014/main" id="{7B05FBE8-2394-B023-5028-5623A9EB65CD}"/>
+                <a16:creationId xmlns:a16="http://schemas.microsoft.com/office/drawing/2014/main" id="{D3529A66-573F-61C0-5B48-0F5A2F0745B4}"/>
               </a:ext>
             </a:extLst>
           </p:cNvPr>
@@ -841,7 +841,7 @@
           <p:cNvPr id="4" name="Datumsplatzhalter 3">
             <a:extLst>
               <a:ext uri="{FF2B5EF4-FFF2-40B4-BE49-F238E27FC236}">
-                <a16:creationId xmlns:a16="http://schemas.microsoft.com/office/drawing/2014/main" id="{1CF52524-2BAD-4E0D-9862-67B3313502AE}"/>
+                <a16:creationId xmlns:a16="http://schemas.microsoft.com/office/drawing/2014/main" id="{372841B7-D54B-D483-CC38-121B4AEFD9F2}"/>
               </a:ext>
             </a:extLst>
           </p:cNvPr>
@@ -857,7 +857,7 @@
           <a:bodyPr/>
           <a:lstStyle/>
           <a:p>
-            <a:fld id="{D46E0ADC-957C-47CD-B06F-5A3BBE763F89}" type="datetimeFigureOut">
+            <a:fld id="{A6D1D2A2-AD13-4142-B938-4FE911EA0C8A}" type="datetimeFigureOut">
               <a:rPr lang="de-DE" smtClean="0"/>
               <a:t>08.10.2026</a:t>
             </a:fld>
@@ -870,7 +870,7 @@
           <p:cNvPr id="5" name="Fußzeilenplatzhalter 4">
             <a:extLst>
               <a:ext uri="{FF2B5EF4-FFF2-40B4-BE49-F238E27FC236}">
-                <a16:creationId xmlns:a16="http://schemas.microsoft.com/office/drawing/2014/main" id="{E5F4CDD7-767C-9AC5-25D4-C7086CFB1893}"/>
+                <a16:creationId xmlns:a16="http://schemas.microsoft.com/office/drawing/2014/main" id="{0085C1DA-E6E4-0347-845D-E7D70E90E4A9}"/>
               </a:ext>
             </a:extLst>
           </p:cNvPr>
@@ -895,7 +895,7 @@
           <p:cNvPr id="6" name="Foliennummernplatzhalter 5">
             <a:extLst>
               <a:ext uri="{FF2B5EF4-FFF2-40B4-BE49-F238E27FC236}">
-                <a16:creationId xmlns:a16="http://schemas.microsoft.com/office/drawing/2014/main" id="{C06EE892-98CA-6D5E-4162-732BC3FA886B}"/>
+                <a16:creationId xmlns:a16="http://schemas.microsoft.com/office/drawing/2014/main" id="{B6E60779-F259-AD01-029E-E305169D1951}"/>
               </a:ext>
             </a:extLst>
           </p:cNvPr>
@@ -911,7 +911,7 @@
           <a:bodyPr/>
           <a:lstStyle/>
           <a:p>
-            <a:fld id="{8D08BC1A-6D3C-4FE8-BEEE-EFB3D133AC21}" type="slidenum">
+            <a:fld id="{8EA70C56-1F2C-4F2D-9E80-8179F8AB0650}" type="slidenum">
               <a:rPr lang="de-DE" smtClean="0"/>
               <a:t>‹Nr.›</a:t>
             </a:fld>
@@ -922,7 +922,7 @@
     </p:spTree>
     <p:extLst>
       <p:ext uri="{BB962C8B-B14F-4D97-AF65-F5344CB8AC3E}">
-        <p14:creationId xmlns:p14="http://schemas.microsoft.com/office/powerpoint/2010/main" val="2873733122"/>
+        <p14:creationId xmlns:p14="http://schemas.microsoft.com/office/powerpoint/2010/main" val="1314783399"/>
       </p:ext>
     </p:extLst>
   </p:cSld>
@@ -954,7 +954,7 @@
           <p:cNvPr id="2" name="Titel 1">
             <a:extLst>
               <a:ext uri="{FF2B5EF4-FFF2-40B4-BE49-F238E27FC236}">
-                <a16:creationId xmlns:a16="http://schemas.microsoft.com/office/drawing/2014/main" id="{7B00645D-9AE9-23A3-49B8-FAC495A9E0C3}"/>
+                <a16:creationId xmlns:a16="http://schemas.microsoft.com/office/drawing/2014/main" id="{26CE1CF0-2E6F-8550-AC8E-7CE3C7B5FA0F}"/>
               </a:ext>
             </a:extLst>
           </p:cNvPr>
@@ -991,7 +991,7 @@
           <p:cNvPr id="3" name="Textplatzhalter 2">
             <a:extLst>
               <a:ext uri="{FF2B5EF4-FFF2-40B4-BE49-F238E27FC236}">
-                <a16:creationId xmlns:a16="http://schemas.microsoft.com/office/drawing/2014/main" id="{0A5DBBE7-5795-D540-413C-57DDFD132DDC}"/>
+                <a16:creationId xmlns:a16="http://schemas.microsoft.com/office/drawing/2014/main" id="{9BA66EF9-B336-B6AB-2229-42593B611CAD}"/>
               </a:ext>
             </a:extLst>
           </p:cNvPr>
@@ -1116,7 +1116,7 @@
           <p:cNvPr id="4" name="Datumsplatzhalter 3">
             <a:extLst>
               <a:ext uri="{FF2B5EF4-FFF2-40B4-BE49-F238E27FC236}">
-                <a16:creationId xmlns:a16="http://schemas.microsoft.com/office/drawing/2014/main" id="{CDCA625A-3784-B49C-0DD8-7F10A755C39F}"/>
+                <a16:creationId xmlns:a16="http://schemas.microsoft.com/office/drawing/2014/main" id="{15C3CB7F-10AD-EE86-A3E4-F54E1FCC6343}"/>
               </a:ext>
             </a:extLst>
           </p:cNvPr>
@@ -1132,7 +1132,7 @@
           <a:bodyPr/>
           <a:lstStyle/>
           <a:p>
-            <a:fld id="{D46E0ADC-957C-47CD-B06F-5A3BBE763F89}" type="datetimeFigureOut">
+            <a:fld id="{A6D1D2A2-AD13-4142-B938-4FE911EA0C8A}" type="datetimeFigureOut">
               <a:rPr lang="de-DE" smtClean="0"/>
               <a:t>08.10.2026</a:t>
             </a:fld>
@@ -1145,7 +1145,7 @@
           <p:cNvPr id="5" name="Fußzeilenplatzhalter 4">
             <a:extLst>
               <a:ext uri="{FF2B5EF4-FFF2-40B4-BE49-F238E27FC236}">
-                <a16:creationId xmlns:a16="http://schemas.microsoft.com/office/drawing/2014/main" id="{53888A2F-EE77-9AF2-4F01-17E45DFDD3B0}"/>
+                <a16:creationId xmlns:a16="http://schemas.microsoft.com/office/drawing/2014/main" id="{B1B9EC24-0E17-EDED-4161-70EF93B60743}"/>
               </a:ext>
             </a:extLst>
           </p:cNvPr>
@@ -1170,7 +1170,7 @@
           <p:cNvPr id="6" name="Foliennummernplatzhalter 5">
             <a:extLst>
               <a:ext uri="{FF2B5EF4-FFF2-40B4-BE49-F238E27FC236}">
-                <a16:creationId xmlns:a16="http://schemas.microsoft.com/office/drawing/2014/main" id="{E566A03A-E0C3-5BB3-1182-86D05147863C}"/>
+                <a16:creationId xmlns:a16="http://schemas.microsoft.com/office/drawing/2014/main" id="{0AC0C35D-4967-4B63-41C8-D0B6FDABFB15}"/>
               </a:ext>
             </a:extLst>
           </p:cNvPr>
@@ -1186,7 +1186,7 @@
           <a:bodyPr/>
           <a:lstStyle/>
           <a:p>
-            <a:fld id="{8D08BC1A-6D3C-4FE8-BEEE-EFB3D133AC21}" type="slidenum">
+            <a:fld id="{8EA70C56-1F2C-4F2D-9E80-8179F8AB0650}" type="slidenum">
               <a:rPr lang="de-DE" smtClean="0"/>
               <a:t>‹Nr.›</a:t>
             </a:fld>
@@ -1197,7 +1197,7 @@
     </p:spTree>
     <p:extLst>
       <p:ext uri="{BB962C8B-B14F-4D97-AF65-F5344CB8AC3E}">
-        <p14:creationId xmlns:p14="http://schemas.microsoft.com/office/powerpoint/2010/main" val="63609766"/>
+        <p14:creationId xmlns:p14="http://schemas.microsoft.com/office/powerpoint/2010/main" val="2431454350"/>
       </p:ext>
     </p:extLst>
   </p:cSld>
@@ -1229,7 +1229,7 @@
           <p:cNvPr id="2" name="Titel 1">
             <a:extLst>
               <a:ext uri="{FF2B5EF4-FFF2-40B4-BE49-F238E27FC236}">
-                <a16:creationId xmlns:a16="http://schemas.microsoft.com/office/drawing/2014/main" id="{B03A535D-C570-E715-B173-25564FFD9B5D}"/>
+                <a16:creationId xmlns:a16="http://schemas.microsoft.com/office/drawing/2014/main" id="{E4191892-6061-FC1A-69DC-09B9297AC35A}"/>
               </a:ext>
             </a:extLst>
           </p:cNvPr>
@@ -1257,7 +1257,7 @@
           <p:cNvPr id="3" name="Inhaltsplatzhalter 2">
             <a:extLst>
               <a:ext uri="{FF2B5EF4-FFF2-40B4-BE49-F238E27FC236}">
-                <a16:creationId xmlns:a16="http://schemas.microsoft.com/office/drawing/2014/main" id="{3FC6EAC9-2C30-470B-97EA-629D90BC9AA4}"/>
+                <a16:creationId xmlns:a16="http://schemas.microsoft.com/office/drawing/2014/main" id="{AC514EFA-CD59-3773-C29F-644E3FF8428F}"/>
               </a:ext>
             </a:extLst>
           </p:cNvPr>
@@ -1319,7 +1319,7 @@
           <p:cNvPr id="4" name="Inhaltsplatzhalter 3">
             <a:extLst>
               <a:ext uri="{FF2B5EF4-FFF2-40B4-BE49-F238E27FC236}">
-                <a16:creationId xmlns:a16="http://schemas.microsoft.com/office/drawing/2014/main" id="{3455A411-362D-5267-537A-098DAC51B2D4}"/>
+                <a16:creationId xmlns:a16="http://schemas.microsoft.com/office/drawing/2014/main" id="{906BDF27-A29E-2BE1-861A-64394237C60C}"/>
               </a:ext>
             </a:extLst>
           </p:cNvPr>
@@ -1381,7 +1381,7 @@
           <p:cNvPr id="5" name="Datumsplatzhalter 4">
             <a:extLst>
               <a:ext uri="{FF2B5EF4-FFF2-40B4-BE49-F238E27FC236}">
-                <a16:creationId xmlns:a16="http://schemas.microsoft.com/office/drawing/2014/main" id="{27A66166-E027-20D6-226E-C74C55FC26D7}"/>
+                <a16:creationId xmlns:a16="http://schemas.microsoft.com/office/drawing/2014/main" id="{61B40A7C-F353-2280-7F85-63B71B6EFC9C}"/>
               </a:ext>
             </a:extLst>
           </p:cNvPr>
@@ -1397,7 +1397,7 @@
           <a:bodyPr/>
           <a:lstStyle/>
           <a:p>
-            <a:fld id="{D46E0ADC-957C-47CD-B06F-5A3BBE763F89}" type="datetimeFigureOut">
+            <a:fld id="{A6D1D2A2-AD13-4142-B938-4FE911EA0C8A}" type="datetimeFigureOut">
               <a:rPr lang="de-DE" smtClean="0"/>
               <a:t>08.10.2026</a:t>
             </a:fld>
@@ -1410,7 +1410,7 @@
           <p:cNvPr id="6" name="Fußzeilenplatzhalter 5">
             <a:extLst>
               <a:ext uri="{FF2B5EF4-FFF2-40B4-BE49-F238E27FC236}">
-                <a16:creationId xmlns:a16="http://schemas.microsoft.com/office/drawing/2014/main" id="{9929274F-58B5-F60C-CFB6-7DE528740436}"/>
+                <a16:creationId xmlns:a16="http://schemas.microsoft.com/office/drawing/2014/main" id="{F8C735F8-D631-3F20-CAEE-BE3ABD67AF8D}"/>
               </a:ext>
             </a:extLst>
           </p:cNvPr>
@@ -1435,7 +1435,7 @@
           <p:cNvPr id="7" name="Foliennummernplatzhalter 6">
             <a:extLst>
               <a:ext uri="{FF2B5EF4-FFF2-40B4-BE49-F238E27FC236}">
-                <a16:creationId xmlns:a16="http://schemas.microsoft.com/office/drawing/2014/main" id="{ACB75237-F97A-3513-A2AB-63480CDC8D0C}"/>
+                <a16:creationId xmlns:a16="http://schemas.microsoft.com/office/drawing/2014/main" id="{45893E0E-2549-27B8-6E4E-3E6A40E0A713}"/>
               </a:ext>
             </a:extLst>
           </p:cNvPr>
@@ -1451,7 +1451,7 @@
           <a:bodyPr/>
           <a:lstStyle/>
           <a:p>
-            <a:fld id="{8D08BC1A-6D3C-4FE8-BEEE-EFB3D133AC21}" type="slidenum">
+            <a:fld id="{8EA70C56-1F2C-4F2D-9E80-8179F8AB0650}" type="slidenum">
               <a:rPr lang="de-DE" smtClean="0"/>
               <a:t>‹Nr.›</a:t>
             </a:fld>
@@ -1462,7 +1462,7 @@
     </p:spTree>
     <p:extLst>
       <p:ext uri="{BB962C8B-B14F-4D97-AF65-F5344CB8AC3E}">
-        <p14:creationId xmlns:p14="http://schemas.microsoft.com/office/powerpoint/2010/main" val="1119121814"/>
+        <p14:creationId xmlns:p14="http://schemas.microsoft.com/office/powerpoint/2010/main" val="3904398295"/>
       </p:ext>
     </p:extLst>
   </p:cSld>
@@ -1494,7 +1494,7 @@
           <p:cNvPr id="2" name="Titel 1">
             <a:extLst>
               <a:ext uri="{FF2B5EF4-FFF2-40B4-BE49-F238E27FC236}">
-                <a16:creationId xmlns:a16="http://schemas.microsoft.com/office/drawing/2014/main" id="{5A5181B4-D0AB-3C5E-6913-BD4D892EB220}"/>
+                <a16:creationId xmlns:a16="http://schemas.microsoft.com/office/drawing/2014/main" id="{5DF7A8D9-ED00-409A-A6C7-1369362E65ED}"/>
               </a:ext>
             </a:extLst>
           </p:cNvPr>
@@ -1527,7 +1527,7 @@
           <p:cNvPr id="3" name="Textplatzhalter 2">
             <a:extLst>
               <a:ext uri="{FF2B5EF4-FFF2-40B4-BE49-F238E27FC236}">
-                <a16:creationId xmlns:a16="http://schemas.microsoft.com/office/drawing/2014/main" id="{D43522D8-A82C-EFCC-CDA8-0A9553719203}"/>
+                <a16:creationId xmlns:a16="http://schemas.microsoft.com/office/drawing/2014/main" id="{161BEB8B-133C-A3F0-6129-76A09B0BF75D}"/>
               </a:ext>
             </a:extLst>
           </p:cNvPr>
@@ -1598,7 +1598,7 @@
           <p:cNvPr id="4" name="Inhaltsplatzhalter 3">
             <a:extLst>
               <a:ext uri="{FF2B5EF4-FFF2-40B4-BE49-F238E27FC236}">
-                <a16:creationId xmlns:a16="http://schemas.microsoft.com/office/drawing/2014/main" id="{3E31D16A-B2C6-B4B9-F9C7-22B195466FC9}"/>
+                <a16:creationId xmlns:a16="http://schemas.microsoft.com/office/drawing/2014/main" id="{22946888-872B-976A-97E6-37B3829C5E7C}"/>
               </a:ext>
             </a:extLst>
           </p:cNvPr>
@@ -1660,7 +1660,7 @@
           <p:cNvPr id="5" name="Textplatzhalter 4">
             <a:extLst>
               <a:ext uri="{FF2B5EF4-FFF2-40B4-BE49-F238E27FC236}">
-                <a16:creationId xmlns:a16="http://schemas.microsoft.com/office/drawing/2014/main" id="{4765F997-57F2-78F0-FDC8-5FFA15B8E84E}"/>
+                <a16:creationId xmlns:a16="http://schemas.microsoft.com/office/drawing/2014/main" id="{F5326D47-6299-1916-9611-737C52CF6099}"/>
               </a:ext>
             </a:extLst>
           </p:cNvPr>
@@ -1731,7 +1731,7 @@
           <p:cNvPr id="6" name="Inhaltsplatzhalter 5">
             <a:extLst>
               <a:ext uri="{FF2B5EF4-FFF2-40B4-BE49-F238E27FC236}">
-                <a16:creationId xmlns:a16="http://schemas.microsoft.com/office/drawing/2014/main" id="{62CB1403-C343-4891-34E4-15B95F4AF2C5}"/>
+                <a16:creationId xmlns:a16="http://schemas.microsoft.com/office/drawing/2014/main" id="{767200E8-DCCE-93A3-C28F-8AD2599FF3E1}"/>
               </a:ext>
             </a:extLst>
           </p:cNvPr>
@@ -1793,7 +1793,7 @@
           <p:cNvPr id="7" name="Datumsplatzhalter 6">
             <a:extLst>
               <a:ext uri="{FF2B5EF4-FFF2-40B4-BE49-F238E27FC236}">
-                <a16:creationId xmlns:a16="http://schemas.microsoft.com/office/drawing/2014/main" id="{0425EA08-7C2E-FA2D-B6C2-2B7CFC2B52E9}"/>
+                <a16:creationId xmlns:a16="http://schemas.microsoft.com/office/drawing/2014/main" id="{850D696D-1998-E70B-1A84-D69FC18E4C0A}"/>
               </a:ext>
             </a:extLst>
           </p:cNvPr>
@@ -1809,7 +1809,7 @@
           <a:bodyPr/>
           <a:lstStyle/>
           <a:p>
-            <a:fld id="{D46E0ADC-957C-47CD-B06F-5A3BBE763F89}" type="datetimeFigureOut">
+            <a:fld id="{A6D1D2A2-AD13-4142-B938-4FE911EA0C8A}" type="datetimeFigureOut">
               <a:rPr lang="de-DE" smtClean="0"/>
               <a:t>08.10.2026</a:t>
             </a:fld>
@@ -1822,7 +1822,7 @@
           <p:cNvPr id="8" name="Fußzeilenplatzhalter 7">
             <a:extLst>
               <a:ext uri="{FF2B5EF4-FFF2-40B4-BE49-F238E27FC236}">
-                <a16:creationId xmlns:a16="http://schemas.microsoft.com/office/drawing/2014/main" id="{F8540747-E29A-AFE9-5F60-3927A6E40A4C}"/>
+                <a16:creationId xmlns:a16="http://schemas.microsoft.com/office/drawing/2014/main" id="{F9B86181-0CD7-9C0D-6CFC-BDBACF666C60}"/>
               </a:ext>
             </a:extLst>
           </p:cNvPr>
@@ -1847,7 +1847,7 @@
           <p:cNvPr id="9" name="Foliennummernplatzhalter 8">
             <a:extLst>
               <a:ext uri="{FF2B5EF4-FFF2-40B4-BE49-F238E27FC236}">
-                <a16:creationId xmlns:a16="http://schemas.microsoft.com/office/drawing/2014/main" id="{8C34C308-BD7D-CA5B-F30D-0E14C4A0D484}"/>
+                <a16:creationId xmlns:a16="http://schemas.microsoft.com/office/drawing/2014/main" id="{B635C10C-F09E-1F6C-89A3-EA033B103D00}"/>
               </a:ext>
             </a:extLst>
           </p:cNvPr>
@@ -1863,7 +1863,7 @@
           <a:bodyPr/>
           <a:lstStyle/>
           <a:p>
-            <a:fld id="{8D08BC1A-6D3C-4FE8-BEEE-EFB3D133AC21}" type="slidenum">
+            <a:fld id="{8EA70C56-1F2C-4F2D-9E80-8179F8AB0650}" type="slidenum">
               <a:rPr lang="de-DE" smtClean="0"/>
               <a:t>‹Nr.›</a:t>
             </a:fld>
@@ -1874,7 +1874,7 @@
     </p:spTree>
     <p:extLst>
       <p:ext uri="{BB962C8B-B14F-4D97-AF65-F5344CB8AC3E}">
-        <p14:creationId xmlns:p14="http://schemas.microsoft.com/office/powerpoint/2010/main" val="268187403"/>
+        <p14:creationId xmlns:p14="http://schemas.microsoft.com/office/powerpoint/2010/main" val="3741897218"/>
       </p:ext>
     </p:extLst>
   </p:cSld>
@@ -1906,7 +1906,7 @@
           <p:cNvPr id="2" name="Titel 1">
             <a:extLst>
               <a:ext uri="{FF2B5EF4-FFF2-40B4-BE49-F238E27FC236}">
-                <a16:creationId xmlns:a16="http://schemas.microsoft.com/office/drawing/2014/main" id="{328EA436-AFA3-8185-8792-1FF4E922ABDF}"/>
+                <a16:creationId xmlns:a16="http://schemas.microsoft.com/office/drawing/2014/main" id="{FAABC53F-EA01-1F7B-1D69-F8AF69A96478}"/>
               </a:ext>
             </a:extLst>
           </p:cNvPr>
@@ -1934,7 +1934,7 @@
           <p:cNvPr id="3" name="Datumsplatzhalter 2">
             <a:extLst>
               <a:ext uri="{FF2B5EF4-FFF2-40B4-BE49-F238E27FC236}">
-                <a16:creationId xmlns:a16="http://schemas.microsoft.com/office/drawing/2014/main" id="{F7DA9279-0CC1-4434-84A9-9E584A284B88}"/>
+                <a16:creationId xmlns:a16="http://schemas.microsoft.com/office/drawing/2014/main" id="{BAF777B4-4F75-1731-8C66-DD0C86DEF394}"/>
               </a:ext>
             </a:extLst>
           </p:cNvPr>
@@ -1950,7 +1950,7 @@
           <a:bodyPr/>
           <a:lstStyle/>
           <a:p>
-            <a:fld id="{D46E0ADC-957C-47CD-B06F-5A3BBE763F89}" type="datetimeFigureOut">
+            <a:fld id="{A6D1D2A2-AD13-4142-B938-4FE911EA0C8A}" type="datetimeFigureOut">
               <a:rPr lang="de-DE" smtClean="0"/>
               <a:t>08.10.2026</a:t>
             </a:fld>
@@ -1963,7 +1963,7 @@
           <p:cNvPr id="4" name="Fußzeilenplatzhalter 3">
             <a:extLst>
               <a:ext uri="{FF2B5EF4-FFF2-40B4-BE49-F238E27FC236}">
-                <a16:creationId xmlns:a16="http://schemas.microsoft.com/office/drawing/2014/main" id="{86B04289-DB36-81DA-EC31-D215D920D5A9}"/>
+                <a16:creationId xmlns:a16="http://schemas.microsoft.com/office/drawing/2014/main" id="{4E399383-B263-2EB1-8B1F-DF06DEAE49C3}"/>
               </a:ext>
             </a:extLst>
           </p:cNvPr>
@@ -1988,7 +1988,7 @@
           <p:cNvPr id="5" name="Foliennummernplatzhalter 4">
             <a:extLst>
               <a:ext uri="{FF2B5EF4-FFF2-40B4-BE49-F238E27FC236}">
-                <a16:creationId xmlns:a16="http://schemas.microsoft.com/office/drawing/2014/main" id="{50E61088-20A8-3B04-69E5-47C1FB974F8F}"/>
+                <a16:creationId xmlns:a16="http://schemas.microsoft.com/office/drawing/2014/main" id="{FCAABCA0-ADE6-6387-133E-58709C393CCD}"/>
               </a:ext>
             </a:extLst>
           </p:cNvPr>
@@ -2004,7 +2004,7 @@
           <a:bodyPr/>
           <a:lstStyle/>
           <a:p>
-            <a:fld id="{8D08BC1A-6D3C-4FE8-BEEE-EFB3D133AC21}" type="slidenum">
+            <a:fld id="{8EA70C56-1F2C-4F2D-9E80-8179F8AB0650}" type="slidenum">
               <a:rPr lang="de-DE" smtClean="0"/>
               <a:t>‹Nr.›</a:t>
             </a:fld>
@@ -2015,7 +2015,7 @@
     </p:spTree>
     <p:extLst>
       <p:ext uri="{BB962C8B-B14F-4D97-AF65-F5344CB8AC3E}">
-        <p14:creationId xmlns:p14="http://schemas.microsoft.com/office/powerpoint/2010/main" val="3791721059"/>
+        <p14:creationId xmlns:p14="http://schemas.microsoft.com/office/powerpoint/2010/main" val="2860355314"/>
       </p:ext>
     </p:extLst>
   </p:cSld>
@@ -2047,7 +2047,7 @@
           <p:cNvPr id="2" name="Datumsplatzhalter 1">
             <a:extLst>
               <a:ext uri="{FF2B5EF4-FFF2-40B4-BE49-F238E27FC236}">
-                <a16:creationId xmlns:a16="http://schemas.microsoft.com/office/drawing/2014/main" id="{B95711CA-CD33-B0B5-C10B-8C92363D4352}"/>
+                <a16:creationId xmlns:a16="http://schemas.microsoft.com/office/drawing/2014/main" id="{69DF8851-11F9-ACF6-FA49-3BAB651BACAA}"/>
               </a:ext>
             </a:extLst>
           </p:cNvPr>
@@ -2063,7 +2063,7 @@
           <a:bodyPr/>
           <a:lstStyle/>
           <a:p>
-            <a:fld id="{D46E0ADC-957C-47CD-B06F-5A3BBE763F89}" type="datetimeFigureOut">
+            <a:fld id="{A6D1D2A2-AD13-4142-B938-4FE911EA0C8A}" type="datetimeFigureOut">
               <a:rPr lang="de-DE" smtClean="0"/>
               <a:t>08.10.2026</a:t>
             </a:fld>
@@ -2076,7 +2076,7 @@
           <p:cNvPr id="3" name="Fußzeilenplatzhalter 2">
             <a:extLst>
               <a:ext uri="{FF2B5EF4-FFF2-40B4-BE49-F238E27FC236}">
-                <a16:creationId xmlns:a16="http://schemas.microsoft.com/office/drawing/2014/main" id="{D3AE8994-D6A8-2B25-1737-721B16B9739C}"/>
+                <a16:creationId xmlns:a16="http://schemas.microsoft.com/office/drawing/2014/main" id="{09A83EDD-C1DF-DAE6-7CBB-879C808AB0F1}"/>
               </a:ext>
             </a:extLst>
           </p:cNvPr>
@@ -2101,7 +2101,7 @@
           <p:cNvPr id="4" name="Foliennummernplatzhalter 3">
             <a:extLst>
               <a:ext uri="{FF2B5EF4-FFF2-40B4-BE49-F238E27FC236}">
-                <a16:creationId xmlns:a16="http://schemas.microsoft.com/office/drawing/2014/main" id="{C2F3842E-5E50-BC3B-E697-0EB854BC5E11}"/>
+                <a16:creationId xmlns:a16="http://schemas.microsoft.com/office/drawing/2014/main" id="{D33E9774-49D3-9CF8-A97E-E4F0797EFA9F}"/>
               </a:ext>
             </a:extLst>
           </p:cNvPr>
@@ -2117,7 +2117,7 @@
           <a:bodyPr/>
           <a:lstStyle/>
           <a:p>
-            <a:fld id="{8D08BC1A-6D3C-4FE8-BEEE-EFB3D133AC21}" type="slidenum">
+            <a:fld id="{8EA70C56-1F2C-4F2D-9E80-8179F8AB0650}" type="slidenum">
               <a:rPr lang="de-DE" smtClean="0"/>
               <a:t>‹Nr.›</a:t>
             </a:fld>
@@ -2128,7 +2128,7 @@
     </p:spTree>
     <p:extLst>
       <p:ext uri="{BB962C8B-B14F-4D97-AF65-F5344CB8AC3E}">
-        <p14:creationId xmlns:p14="http://schemas.microsoft.com/office/powerpoint/2010/main" val="1884897600"/>
+        <p14:creationId xmlns:p14="http://schemas.microsoft.com/office/powerpoint/2010/main" val="1937625464"/>
       </p:ext>
     </p:extLst>
   </p:cSld>
@@ -2160,7 +2160,7 @@
           <p:cNvPr id="2" name="Titel 1">
             <a:extLst>
               <a:ext uri="{FF2B5EF4-FFF2-40B4-BE49-F238E27FC236}">
-                <a16:creationId xmlns:a16="http://schemas.microsoft.com/office/drawing/2014/main" id="{186A5DFB-5CFF-EE04-F70B-2D9A439EF3CF}"/>
+                <a16:creationId xmlns:a16="http://schemas.microsoft.com/office/drawing/2014/main" id="{EE70409B-6750-71F5-1CBD-2BF2098DF5CB}"/>
               </a:ext>
             </a:extLst>
           </p:cNvPr>
@@ -2197,7 +2197,7 @@
           <p:cNvPr id="3" name="Inhaltsplatzhalter 2">
             <a:extLst>
               <a:ext uri="{FF2B5EF4-FFF2-40B4-BE49-F238E27FC236}">
-                <a16:creationId xmlns:a16="http://schemas.microsoft.com/office/drawing/2014/main" id="{C2933BE8-77A8-1F0E-43D3-CD94C0E50720}"/>
+                <a16:creationId xmlns:a16="http://schemas.microsoft.com/office/drawing/2014/main" id="{FE5C73A3-FB9C-5C00-7527-478265BE63F6}"/>
               </a:ext>
             </a:extLst>
           </p:cNvPr>
@@ -2287,7 +2287,7 @@
           <p:cNvPr id="4" name="Textplatzhalter 3">
             <a:extLst>
               <a:ext uri="{FF2B5EF4-FFF2-40B4-BE49-F238E27FC236}">
-                <a16:creationId xmlns:a16="http://schemas.microsoft.com/office/drawing/2014/main" id="{9953DAF8-58A2-38DC-8753-8EC20D6E3149}"/>
+                <a16:creationId xmlns:a16="http://schemas.microsoft.com/office/drawing/2014/main" id="{8830FCDE-B960-0BBC-E7C6-5E7C2A3C8D40}"/>
               </a:ext>
             </a:extLst>
           </p:cNvPr>
@@ -2358,7 +2358,7 @@
           <p:cNvPr id="5" name="Datumsplatzhalter 4">
             <a:extLst>
               <a:ext uri="{FF2B5EF4-FFF2-40B4-BE49-F238E27FC236}">
-                <a16:creationId xmlns:a16="http://schemas.microsoft.com/office/drawing/2014/main" id="{827C8D6F-739E-382A-39B1-EC7E9505164E}"/>
+                <a16:creationId xmlns:a16="http://schemas.microsoft.com/office/drawing/2014/main" id="{B57558D8-EF34-1189-04B7-DC8C007D69A8}"/>
               </a:ext>
             </a:extLst>
           </p:cNvPr>
@@ -2374,7 +2374,7 @@
           <a:bodyPr/>
           <a:lstStyle/>
           <a:p>
-            <a:fld id="{D46E0ADC-957C-47CD-B06F-5A3BBE763F89}" type="datetimeFigureOut">
+            <a:fld id="{A6D1D2A2-AD13-4142-B938-4FE911EA0C8A}" type="datetimeFigureOut">
               <a:rPr lang="de-DE" smtClean="0"/>
               <a:t>08.10.2026</a:t>
             </a:fld>
@@ -2387,7 +2387,7 @@
           <p:cNvPr id="6" name="Fußzeilenplatzhalter 5">
             <a:extLst>
               <a:ext uri="{FF2B5EF4-FFF2-40B4-BE49-F238E27FC236}">
-                <a16:creationId xmlns:a16="http://schemas.microsoft.com/office/drawing/2014/main" id="{A50DEB93-8195-0913-C3B0-B3653FE53639}"/>
+                <a16:creationId xmlns:a16="http://schemas.microsoft.com/office/drawing/2014/main" id="{E7CF3DA2-88A4-148F-3981-F2707A87666D}"/>
               </a:ext>
             </a:extLst>
           </p:cNvPr>
@@ -2412,7 +2412,7 @@
           <p:cNvPr id="7" name="Foliennummernplatzhalter 6">
             <a:extLst>
               <a:ext uri="{FF2B5EF4-FFF2-40B4-BE49-F238E27FC236}">
-                <a16:creationId xmlns:a16="http://schemas.microsoft.com/office/drawing/2014/main" id="{B15AFA8E-898F-4E00-AA13-741D68AEB817}"/>
+                <a16:creationId xmlns:a16="http://schemas.microsoft.com/office/drawing/2014/main" id="{63DC42F3-52D6-9394-E742-765881229E98}"/>
               </a:ext>
             </a:extLst>
           </p:cNvPr>
@@ -2428,7 +2428,7 @@
           <a:bodyPr/>
           <a:lstStyle/>
           <a:p>
-            <a:fld id="{8D08BC1A-6D3C-4FE8-BEEE-EFB3D133AC21}" type="slidenum">
+            <a:fld id="{8EA70C56-1F2C-4F2D-9E80-8179F8AB0650}" type="slidenum">
               <a:rPr lang="de-DE" smtClean="0"/>
               <a:t>‹Nr.›</a:t>
             </a:fld>
@@ -2439,7 +2439,7 @@
     </p:spTree>
     <p:extLst>
       <p:ext uri="{BB962C8B-B14F-4D97-AF65-F5344CB8AC3E}">
-        <p14:creationId xmlns:p14="http://schemas.microsoft.com/office/powerpoint/2010/main" val="3435576511"/>
+        <p14:creationId xmlns:p14="http://schemas.microsoft.com/office/powerpoint/2010/main" val="3010766903"/>
       </p:ext>
     </p:extLst>
   </p:cSld>
@@ -2471,7 +2471,7 @@
           <p:cNvPr id="2" name="Titel 1">
             <a:extLst>
               <a:ext uri="{FF2B5EF4-FFF2-40B4-BE49-F238E27FC236}">
-                <a16:creationId xmlns:a16="http://schemas.microsoft.com/office/drawing/2014/main" id="{F6F8A600-2129-F920-4F96-83CE1D896E0E}"/>
+                <a16:creationId xmlns:a16="http://schemas.microsoft.com/office/drawing/2014/main" id="{B59EACDE-7CA8-36E0-6F89-6EDCD392BE5D}"/>
               </a:ext>
             </a:extLst>
           </p:cNvPr>
@@ -2508,7 +2508,7 @@
           <p:cNvPr id="3" name="Bildplatzhalter 2">
             <a:extLst>
               <a:ext uri="{FF2B5EF4-FFF2-40B4-BE49-F238E27FC236}">
-                <a16:creationId xmlns:a16="http://schemas.microsoft.com/office/drawing/2014/main" id="{DF73ED25-FA3C-237D-4C17-3E71014DD8A9}"/>
+                <a16:creationId xmlns:a16="http://schemas.microsoft.com/office/drawing/2014/main" id="{981ADD2D-59FB-2AA1-AD8B-100E2B950DF2}"/>
               </a:ext>
             </a:extLst>
           </p:cNvPr>
@@ -2575,7 +2575,7 @@
           <p:cNvPr id="4" name="Textplatzhalter 3">
             <a:extLst>
               <a:ext uri="{FF2B5EF4-FFF2-40B4-BE49-F238E27FC236}">
-                <a16:creationId xmlns:a16="http://schemas.microsoft.com/office/drawing/2014/main" id="{9B2135B6-6333-A3CA-6EBF-017B07020B64}"/>
+                <a16:creationId xmlns:a16="http://schemas.microsoft.com/office/drawing/2014/main" id="{0A0ACD3A-D677-ABBC-E385-971ED080729A}"/>
               </a:ext>
             </a:extLst>
           </p:cNvPr>
@@ -2646,7 +2646,7 @@
           <p:cNvPr id="5" name="Datumsplatzhalter 4">
             <a:extLst>
               <a:ext uri="{FF2B5EF4-FFF2-40B4-BE49-F238E27FC236}">
-                <a16:creationId xmlns:a16="http://schemas.microsoft.com/office/drawing/2014/main" id="{0CACC9A3-04A7-22B2-A489-5E6361B45DD5}"/>
+                <a16:creationId xmlns:a16="http://schemas.microsoft.com/office/drawing/2014/main" id="{43E76369-9882-E87C-13AD-F852025A704C}"/>
               </a:ext>
             </a:extLst>
           </p:cNvPr>
@@ -2662,7 +2662,7 @@
           <a:bodyPr/>
           <a:lstStyle/>
           <a:p>
-            <a:fld id="{D46E0ADC-957C-47CD-B06F-5A3BBE763F89}" type="datetimeFigureOut">
+            <a:fld id="{A6D1D2A2-AD13-4142-B938-4FE911EA0C8A}" type="datetimeFigureOut">
               <a:rPr lang="de-DE" smtClean="0"/>
               <a:t>08.10.2026</a:t>
             </a:fld>
@@ -2675,7 +2675,7 @@
           <p:cNvPr id="6" name="Fußzeilenplatzhalter 5">
             <a:extLst>
               <a:ext uri="{FF2B5EF4-FFF2-40B4-BE49-F238E27FC236}">
-                <a16:creationId xmlns:a16="http://schemas.microsoft.com/office/drawing/2014/main" id="{98228EB8-7753-9E39-B166-42B1F667A479}"/>
+                <a16:creationId xmlns:a16="http://schemas.microsoft.com/office/drawing/2014/main" id="{7CD3F85C-3822-9A59-2CFF-4DBC1245F767}"/>
               </a:ext>
             </a:extLst>
           </p:cNvPr>
@@ -2700,7 +2700,7 @@
           <p:cNvPr id="7" name="Foliennummernplatzhalter 6">
             <a:extLst>
               <a:ext uri="{FF2B5EF4-FFF2-40B4-BE49-F238E27FC236}">
-                <a16:creationId xmlns:a16="http://schemas.microsoft.com/office/drawing/2014/main" id="{6FCE41E2-A849-A277-76E8-4EF5D7C68525}"/>
+                <a16:creationId xmlns:a16="http://schemas.microsoft.com/office/drawing/2014/main" id="{95D94800-DA98-ED6A-4BE0-BFE1CA1CCAE1}"/>
               </a:ext>
             </a:extLst>
           </p:cNvPr>
@@ -2716,7 +2716,7 @@
           <a:bodyPr/>
           <a:lstStyle/>
           <a:p>
-            <a:fld id="{8D08BC1A-6D3C-4FE8-BEEE-EFB3D133AC21}" type="slidenum">
+            <a:fld id="{8EA70C56-1F2C-4F2D-9E80-8179F8AB0650}" type="slidenum">
               <a:rPr lang="de-DE" smtClean="0"/>
               <a:t>‹Nr.›</a:t>
             </a:fld>
@@ -2727,7 +2727,7 @@
     </p:spTree>
     <p:extLst>
       <p:ext uri="{BB962C8B-B14F-4D97-AF65-F5344CB8AC3E}">
-        <p14:creationId xmlns:p14="http://schemas.microsoft.com/office/powerpoint/2010/main" val="124583038"/>
+        <p14:creationId xmlns:p14="http://schemas.microsoft.com/office/powerpoint/2010/main" val="976357740"/>
       </p:ext>
     </p:extLst>
   </p:cSld>
@@ -2764,7 +2764,7 @@
           <p:cNvPr id="2" name="Titelplatzhalter 1">
             <a:extLst>
               <a:ext uri="{FF2B5EF4-FFF2-40B4-BE49-F238E27FC236}">
-                <a16:creationId xmlns:a16="http://schemas.microsoft.com/office/drawing/2014/main" id="{45FF5407-A597-0EE2-D65E-2D565D784EF5}"/>
+                <a16:creationId xmlns:a16="http://schemas.microsoft.com/office/drawing/2014/main" id="{2056B14D-64A2-0EDC-B566-EC03D5167215}"/>
               </a:ext>
             </a:extLst>
           </p:cNvPr>
@@ -2802,7 +2802,7 @@
           <p:cNvPr id="3" name="Textplatzhalter 2">
             <a:extLst>
               <a:ext uri="{FF2B5EF4-FFF2-40B4-BE49-F238E27FC236}">
-                <a16:creationId xmlns:a16="http://schemas.microsoft.com/office/drawing/2014/main" id="{F1FD6D89-3747-AD6D-5920-6B6B04965D8E}"/>
+                <a16:creationId xmlns:a16="http://schemas.microsoft.com/office/drawing/2014/main" id="{DFA1323B-F0AC-2D49-4D58-634F5A3D86EF}"/>
               </a:ext>
             </a:extLst>
           </p:cNvPr>
@@ -2869,7 +2869,7 @@
           <p:cNvPr id="4" name="Datumsplatzhalter 3">
             <a:extLst>
               <a:ext uri="{FF2B5EF4-FFF2-40B4-BE49-F238E27FC236}">
-                <a16:creationId xmlns:a16="http://schemas.microsoft.com/office/drawing/2014/main" id="{353B2896-E4E4-4AA0-13FB-2F4A3301D683}"/>
+                <a16:creationId xmlns:a16="http://schemas.microsoft.com/office/drawing/2014/main" id="{AE4AF9DD-3B76-BD1A-6568-C21A48F40296}"/>
               </a:ext>
             </a:extLst>
           </p:cNvPr>
@@ -2903,7 +2903,7 @@
             </a:lvl1pPr>
           </a:lstStyle>
           <a:p>
-            <a:fld id="{D46E0ADC-957C-47CD-B06F-5A3BBE763F89}" type="datetimeFigureOut">
+            <a:fld id="{A6D1D2A2-AD13-4142-B938-4FE911EA0C8A}" type="datetimeFigureOut">
               <a:rPr lang="de-DE" smtClean="0"/>
               <a:t>08.10.2026</a:t>
             </a:fld>
@@ -2916,7 +2916,7 @@
           <p:cNvPr id="5" name="Fußzeilenplatzhalter 4">
             <a:extLst>
               <a:ext uri="{FF2B5EF4-FFF2-40B4-BE49-F238E27FC236}">
-                <a16:creationId xmlns:a16="http://schemas.microsoft.com/office/drawing/2014/main" id="{C48CBB6D-5E64-B8F2-D1D2-E606FC0830F0}"/>
+                <a16:creationId xmlns:a16="http://schemas.microsoft.com/office/drawing/2014/main" id="{0D29DBB4-DF76-B196-263E-DEB3347705B9}"/>
               </a:ext>
             </a:extLst>
           </p:cNvPr>
@@ -2959,7 +2959,7 @@
           <p:cNvPr id="6" name="Foliennummernplatzhalter 5">
             <a:extLst>
               <a:ext uri="{FF2B5EF4-FFF2-40B4-BE49-F238E27FC236}">
-                <a16:creationId xmlns:a16="http://schemas.microsoft.com/office/drawing/2014/main" id="{F2920101-7EAE-79F9-5408-7F09B8E91ACF}"/>
+                <a16:creationId xmlns:a16="http://schemas.microsoft.com/office/drawing/2014/main" id="{49DA36F0-148E-E230-CE69-C12E0AD7B19B}"/>
               </a:ext>
             </a:extLst>
           </p:cNvPr>
@@ -2993,7 +2993,7 @@
             </a:lvl1pPr>
           </a:lstStyle>
           <a:p>
-            <a:fld id="{8D08BC1A-6D3C-4FE8-BEEE-EFB3D133AC21}" type="slidenum">
+            <a:fld id="{8EA70C56-1F2C-4F2D-9E80-8179F8AB0650}" type="slidenum">
               <a:rPr lang="de-DE" smtClean="0"/>
               <a:t>‹Nr.›</a:t>
             </a:fld>
@@ -3004,7 +3004,7 @@
     </p:spTree>
     <p:extLst>
       <p:ext uri="{BB962C8B-B14F-4D97-AF65-F5344CB8AC3E}">
-        <p14:creationId xmlns:p14="http://schemas.microsoft.com/office/powerpoint/2010/main" val="1104313220"/>
+        <p14:creationId xmlns:p14="http://schemas.microsoft.com/office/powerpoint/2010/main" val="3768285246"/>
       </p:ext>
     </p:extLst>
   </p:cSld>
@@ -3327,7 +3327,7 @@
           <p:cNvPr id="2" name="Pfeil: nach rechts 1">
             <a:extLst>
               <a:ext uri="{FF2B5EF4-FFF2-40B4-BE49-F238E27FC236}">
-                <a16:creationId xmlns:a16="http://schemas.microsoft.com/office/drawing/2014/main" id="{D22CAAC3-B389-CCA3-3285-E409769E5166}"/>
+                <a16:creationId xmlns:a16="http://schemas.microsoft.com/office/drawing/2014/main" id="{53E1E22B-D65F-C47B-E8B8-6664F66A9282}"/>
               </a:ext>
             </a:extLst>
           </p:cNvPr>
@@ -3373,7 +3373,7 @@
           <p:cNvPr id="3" name="Rechteck 2">
             <a:extLst>
               <a:ext uri="{FF2B5EF4-FFF2-40B4-BE49-F238E27FC236}">
-                <a16:creationId xmlns:a16="http://schemas.microsoft.com/office/drawing/2014/main" id="{20CC08E8-AD26-7F89-4469-338E641F1379}"/>
+                <a16:creationId xmlns:a16="http://schemas.microsoft.com/office/drawing/2014/main" id="{2EDDB8F5-7368-13CF-47CF-9F3ECE23FFDF}"/>
               </a:ext>
             </a:extLst>
           </p:cNvPr>
@@ -3422,7 +3422,7 @@
           <p:cNvPr id="4" name="Pfeil: nach rechts 3">
             <a:extLst>
               <a:ext uri="{FF2B5EF4-FFF2-40B4-BE49-F238E27FC236}">
-                <a16:creationId xmlns:a16="http://schemas.microsoft.com/office/drawing/2014/main" id="{01B56EEA-E18E-F879-EEE3-75223C64510B}"/>
+                <a16:creationId xmlns:a16="http://schemas.microsoft.com/office/drawing/2014/main" id="{A35929DA-7D0B-C8DB-6A4B-685E6C0A21C8}"/>
               </a:ext>
             </a:extLst>
           </p:cNvPr>
@@ -3468,7 +3468,7 @@
           <p:cNvPr id="5" name="Rechteck 4">
             <a:extLst>
               <a:ext uri="{FF2B5EF4-FFF2-40B4-BE49-F238E27FC236}">
-                <a16:creationId xmlns:a16="http://schemas.microsoft.com/office/drawing/2014/main" id="{60417F79-F44F-8233-60D6-6C32BF4F4FEF}"/>
+                <a16:creationId xmlns:a16="http://schemas.microsoft.com/office/drawing/2014/main" id="{38352699-2AE4-42DD-C533-BA26D644B998}"/>
               </a:ext>
             </a:extLst>
           </p:cNvPr>
@@ -3517,7 +3517,7 @@
           <p:cNvPr id="6" name="Pfeil: nach rechts 5">
             <a:extLst>
               <a:ext uri="{FF2B5EF4-FFF2-40B4-BE49-F238E27FC236}">
-                <a16:creationId xmlns:a16="http://schemas.microsoft.com/office/drawing/2014/main" id="{FAC40657-8115-0CEA-71CB-B8D7CD3481BC}"/>
+                <a16:creationId xmlns:a16="http://schemas.microsoft.com/office/drawing/2014/main" id="{7A62EFA8-805C-405B-3FAB-F40E3F93D385}"/>
               </a:ext>
             </a:extLst>
           </p:cNvPr>
@@ -3563,7 +3563,7 @@
           <p:cNvPr id="7" name="Rechteck 6">
             <a:extLst>
               <a:ext uri="{FF2B5EF4-FFF2-40B4-BE49-F238E27FC236}">
-                <a16:creationId xmlns:a16="http://schemas.microsoft.com/office/drawing/2014/main" id="{4184F249-F9CA-8067-1E80-7DE83774190F}"/>
+                <a16:creationId xmlns:a16="http://schemas.microsoft.com/office/drawing/2014/main" id="{5833A65F-D90C-E7E0-CF6D-E1B1EB13DB84}"/>
               </a:ext>
             </a:extLst>
           </p:cNvPr>
@@ -3612,7 +3612,7 @@
           <p:cNvPr id="8" name="Pfeil: nach rechts 7">
             <a:extLst>
               <a:ext uri="{FF2B5EF4-FFF2-40B4-BE49-F238E27FC236}">
-                <a16:creationId xmlns:a16="http://schemas.microsoft.com/office/drawing/2014/main" id="{0D80189E-E714-F8AE-81AB-003158AF4EB1}"/>
+                <a16:creationId xmlns:a16="http://schemas.microsoft.com/office/drawing/2014/main" id="{2AC62190-5563-F324-C409-76B890F94858}"/>
               </a:ext>
             </a:extLst>
           </p:cNvPr>
@@ -3658,7 +3658,7 @@
           <p:cNvPr id="9" name="Rechteck 8">
             <a:extLst>
               <a:ext uri="{FF2B5EF4-FFF2-40B4-BE49-F238E27FC236}">
-                <a16:creationId xmlns:a16="http://schemas.microsoft.com/office/drawing/2014/main" id="{F9216189-48A6-37D6-610E-95F900B4CDEE}"/>
+                <a16:creationId xmlns:a16="http://schemas.microsoft.com/office/drawing/2014/main" id="{9FDEEF91-8C1C-3448-8DC4-A8BC6CAFC68B}"/>
               </a:ext>
             </a:extLst>
           </p:cNvPr>
@@ -3707,7 +3707,7 @@
           <p:cNvPr id="10" name="Pfeil: nach rechts 9">
             <a:extLst>
               <a:ext uri="{FF2B5EF4-FFF2-40B4-BE49-F238E27FC236}">
-                <a16:creationId xmlns:a16="http://schemas.microsoft.com/office/drawing/2014/main" id="{362644EF-0556-4A55-67F3-F21F21ECD3F0}"/>
+                <a16:creationId xmlns:a16="http://schemas.microsoft.com/office/drawing/2014/main" id="{83B5B962-68AF-4493-82CE-DAB5F9939E12}"/>
               </a:ext>
             </a:extLst>
           </p:cNvPr>
@@ -3753,7 +3753,7 @@
           <p:cNvPr id="11" name="Rechteck 10">
             <a:extLst>
               <a:ext uri="{FF2B5EF4-FFF2-40B4-BE49-F238E27FC236}">
-                <a16:creationId xmlns:a16="http://schemas.microsoft.com/office/drawing/2014/main" id="{95950525-1327-3CE0-EC17-E1728E420881}"/>
+                <a16:creationId xmlns:a16="http://schemas.microsoft.com/office/drawing/2014/main" id="{4BC8A6B1-740F-7967-2AB8-27F5318F1863}"/>
               </a:ext>
             </a:extLst>
           </p:cNvPr>
@@ -3802,7 +3802,7 @@
           <p:cNvPr id="12" name="Pfeil: nach rechts 11">
             <a:extLst>
               <a:ext uri="{FF2B5EF4-FFF2-40B4-BE49-F238E27FC236}">
-                <a16:creationId xmlns:a16="http://schemas.microsoft.com/office/drawing/2014/main" id="{3CCDAFD8-5B38-559B-0A97-4A694B84F694}"/>
+                <a16:creationId xmlns:a16="http://schemas.microsoft.com/office/drawing/2014/main" id="{CC9CC58D-78EC-AC6C-F15E-DDF09C39F8F7}"/>
               </a:ext>
             </a:extLst>
           </p:cNvPr>
@@ -3848,7 +3848,7 @@
           <p:cNvPr id="13" name="Rechteck 12">
             <a:extLst>
               <a:ext uri="{FF2B5EF4-FFF2-40B4-BE49-F238E27FC236}">
-                <a16:creationId xmlns:a16="http://schemas.microsoft.com/office/drawing/2014/main" id="{5FC89E20-7C7C-9F5C-BC85-C50135B44939}"/>
+                <a16:creationId xmlns:a16="http://schemas.microsoft.com/office/drawing/2014/main" id="{A6F8231B-D52F-B342-5A4D-98590626CC7D}"/>
               </a:ext>
             </a:extLst>
           </p:cNvPr>
@@ -3897,7 +3897,7 @@
           <p:cNvPr id="14" name="Pfeil: nach rechts 13">
             <a:extLst>
               <a:ext uri="{FF2B5EF4-FFF2-40B4-BE49-F238E27FC236}">
-                <a16:creationId xmlns:a16="http://schemas.microsoft.com/office/drawing/2014/main" id="{E9BEBA61-DFFF-88C1-0DB2-01FCC0822414}"/>
+                <a16:creationId xmlns:a16="http://schemas.microsoft.com/office/drawing/2014/main" id="{EBA2662A-3198-4476-33AE-F2E940B734BA}"/>
               </a:ext>
             </a:extLst>
           </p:cNvPr>
@@ -3946,7 +3946,7 @@
           <p:cNvPr id="15" name="Pfeil: nach rechts 14">
             <a:extLst>
               <a:ext uri="{FF2B5EF4-FFF2-40B4-BE49-F238E27FC236}">
-                <a16:creationId xmlns:a16="http://schemas.microsoft.com/office/drawing/2014/main" id="{14F8625A-B7D2-D7E5-CA95-332DF72FC418}"/>
+                <a16:creationId xmlns:a16="http://schemas.microsoft.com/office/drawing/2014/main" id="{5D306AFA-2D5E-20BA-1E04-9300DAE14355}"/>
               </a:ext>
             </a:extLst>
           </p:cNvPr>
@@ -3995,7 +3995,7 @@
           <p:cNvPr id="16" name="Pfeil: nach rechts 15">
             <a:extLst>
               <a:ext uri="{FF2B5EF4-FFF2-40B4-BE49-F238E27FC236}">
-                <a16:creationId xmlns:a16="http://schemas.microsoft.com/office/drawing/2014/main" id="{D3B167D2-7F73-F3B6-9CCC-D07DECA88C35}"/>
+                <a16:creationId xmlns:a16="http://schemas.microsoft.com/office/drawing/2014/main" id="{BCDA7E30-7861-88DC-BCE3-0A1798BC65C2}"/>
               </a:ext>
             </a:extLst>
           </p:cNvPr>
@@ -4044,7 +4044,7 @@
           <p:cNvPr id="17" name="Pfeil: nach rechts 16">
             <a:extLst>
               <a:ext uri="{FF2B5EF4-FFF2-40B4-BE49-F238E27FC236}">
-                <a16:creationId xmlns:a16="http://schemas.microsoft.com/office/drawing/2014/main" id="{BDB8B560-B1CF-4B07-F40E-7439B1FBB7D5}"/>
+                <a16:creationId xmlns:a16="http://schemas.microsoft.com/office/drawing/2014/main" id="{6F072F93-724B-72D2-490E-AB64C430E90C}"/>
               </a:ext>
             </a:extLst>
           </p:cNvPr>
@@ -4091,7 +4091,7 @@
     </p:spTree>
     <p:extLst>
       <p:ext uri="{BB962C8B-B14F-4D97-AF65-F5344CB8AC3E}">
-        <p14:creationId xmlns:p14="http://schemas.microsoft.com/office/powerpoint/2010/main" val="1001195420"/>
+        <p14:creationId xmlns:p14="http://schemas.microsoft.com/office/powerpoint/2010/main" val="1631126142"/>
       </p:ext>
     </p:extLst>
   </p:cSld>
@@ -4123,7 +4123,7 @@
           <p:cNvPr id="5" name="Gruppieren 4">
             <a:extLst>
               <a:ext uri="{FF2B5EF4-FFF2-40B4-BE49-F238E27FC236}">
-                <a16:creationId xmlns:a16="http://schemas.microsoft.com/office/drawing/2014/main" id="{61FD9569-7D2E-E1CF-138A-B822706A3899}"/>
+                <a16:creationId xmlns:a16="http://schemas.microsoft.com/office/drawing/2014/main" id="{779DF130-2DC4-17E3-8CEA-B7854D4A35A9}"/>
               </a:ext>
             </a:extLst>
           </p:cNvPr>
@@ -4143,7 +4143,7 @@
             <p:cNvPr id="2" name="A">
               <a:extLst>
                 <a:ext uri="{FF2B5EF4-FFF2-40B4-BE49-F238E27FC236}">
-                  <a16:creationId xmlns:a16="http://schemas.microsoft.com/office/drawing/2014/main" id="{3A7C6F11-C854-0BD6-3334-023F7BA15973}"/>
+                  <a16:creationId xmlns:a16="http://schemas.microsoft.com/office/drawing/2014/main" id="{CFDD4FF6-7C09-0F50-C1ED-ED8212B1FCB2}"/>
                 </a:ext>
               </a:extLst>
             </p:cNvPr>
@@ -4189,7 +4189,7 @@
             <p:cNvPr id="3" name="B">
               <a:extLst>
                 <a:ext uri="{FF2B5EF4-FFF2-40B4-BE49-F238E27FC236}">
-                  <a16:creationId xmlns:a16="http://schemas.microsoft.com/office/drawing/2014/main" id="{30F6AE03-1F0D-3FC9-84B0-6AD8D95B51DD}"/>
+                  <a16:creationId xmlns:a16="http://schemas.microsoft.com/office/drawing/2014/main" id="{264A7714-0F05-56EF-AF72-6E14ABA990BE}"/>
                 </a:ext>
               </a:extLst>
             </p:cNvPr>
@@ -4235,7 +4235,7 @@
             <p:cNvPr id="4" name="C">
               <a:extLst>
                 <a:ext uri="{FF2B5EF4-FFF2-40B4-BE49-F238E27FC236}">
-                  <a16:creationId xmlns:a16="http://schemas.microsoft.com/office/drawing/2014/main" id="{AC101AF9-E4D2-F413-071F-031B70E405FB}"/>
+                  <a16:creationId xmlns:a16="http://schemas.microsoft.com/office/drawing/2014/main" id="{526B2836-3F16-C138-BB0D-2C8A3CEA3A2E}"/>
                 </a:ext>
               </a:extLst>
             </p:cNvPr>
@@ -4282,7 +4282,7 @@
           <p:cNvPr id="6" name="D">
             <a:extLst>
               <a:ext uri="{FF2B5EF4-FFF2-40B4-BE49-F238E27FC236}">
-                <a16:creationId xmlns:a16="http://schemas.microsoft.com/office/drawing/2014/main" id="{7C905D55-2207-BB3F-7758-E7D6F7F66CC0}"/>
+                <a16:creationId xmlns:a16="http://schemas.microsoft.com/office/drawing/2014/main" id="{3E201273-E95B-A1D0-8E67-4384D7BE7CE1}"/>
               </a:ext>
             </a:extLst>
           </p:cNvPr>
@@ -4328,7 +4328,7 @@
           <p:cNvPr id="7" name="E">
             <a:extLst>
               <a:ext uri="{FF2B5EF4-FFF2-40B4-BE49-F238E27FC236}">
-                <a16:creationId xmlns:a16="http://schemas.microsoft.com/office/drawing/2014/main" id="{B33FBFD5-F26F-F13A-48C6-4D9E8BDB4749}"/>
+                <a16:creationId xmlns:a16="http://schemas.microsoft.com/office/drawing/2014/main" id="{6301EA8A-4302-8A24-69C1-BE56F6590419}"/>
               </a:ext>
             </a:extLst>
           </p:cNvPr>
@@ -4374,7 +4374,7 @@
           <p:cNvPr id="8" name="Gerade Verbindung mit Pfeil 7">
             <a:extLst>
               <a:ext uri="{FF2B5EF4-FFF2-40B4-BE49-F238E27FC236}">
-                <a16:creationId xmlns:a16="http://schemas.microsoft.com/office/drawing/2014/main" id="{7BFA7A7D-44F7-BA2A-98CE-3DE8E6962AFB}"/>
+                <a16:creationId xmlns:a16="http://schemas.microsoft.com/office/drawing/2014/main" id="{65E3A1ED-7CA5-8862-5F6D-6E82E7AD9ED7}"/>
               </a:ext>
             </a:extLst>
           </p:cNvPr>
@@ -4415,7 +4415,7 @@
           <p:cNvPr id="9" name="Verbinder: gewinkelt 8">
             <a:extLst>
               <a:ext uri="{FF2B5EF4-FFF2-40B4-BE49-F238E27FC236}">
-                <a16:creationId xmlns:a16="http://schemas.microsoft.com/office/drawing/2014/main" id="{0233B4EF-59F0-D9CC-B47D-8022F9E81D3B}"/>
+                <a16:creationId xmlns:a16="http://schemas.microsoft.com/office/drawing/2014/main" id="{E90BF3C6-A70F-C65C-90B4-83FA7EC92DD3}"/>
               </a:ext>
             </a:extLst>
           </p:cNvPr>
@@ -4456,7 +4456,7 @@
           <p:cNvPr id="10" name="Verbinder: gekrümmt 9">
             <a:extLst>
               <a:ext uri="{FF2B5EF4-FFF2-40B4-BE49-F238E27FC236}">
-                <a16:creationId xmlns:a16="http://schemas.microsoft.com/office/drawing/2014/main" id="{ABF2DF53-7E0F-66E5-E54B-E2355B269DC7}"/>
+                <a16:creationId xmlns:a16="http://schemas.microsoft.com/office/drawing/2014/main" id="{B31D111F-180B-63AD-14D9-23CB1B13A57F}"/>
               </a:ext>
             </a:extLst>
           </p:cNvPr>
@@ -4495,7 +4495,7 @@
     </p:spTree>
     <p:extLst>
       <p:ext uri="{BB962C8B-B14F-4D97-AF65-F5344CB8AC3E}">
-        <p14:creationId xmlns:p14="http://schemas.microsoft.com/office/powerpoint/2010/main" val="205862273"/>
+        <p14:creationId xmlns:p14="http://schemas.microsoft.com/office/powerpoint/2010/main" val="2294278314"/>
       </p:ext>
     </p:extLst>
   </p:cSld>

--- a/tests/corpus/pptx/generated/transforms.pptx
+++ b/tests/corpus/pptx/generated/transforms.pptx
@@ -130,7 +130,7 @@
           <p:cNvPr id="2" name="Titel 1">
             <a:extLst>
               <a:ext uri="{FF2B5EF4-FFF2-40B4-BE49-F238E27FC236}">
-                <a16:creationId xmlns:a16="http://schemas.microsoft.com/office/drawing/2014/main" id="{0DA1796B-2B5A-7F26-F393-2CD24C3698E2}"/>
+                <a16:creationId xmlns:a16="http://schemas.microsoft.com/office/drawing/2014/main" id="{99CCA6F9-1079-D3AF-D4C6-258748610555}"/>
               </a:ext>
             </a:extLst>
           </p:cNvPr>
@@ -167,7 +167,7 @@
           <p:cNvPr id="3" name="Untertitel 2">
             <a:extLst>
               <a:ext uri="{FF2B5EF4-FFF2-40B4-BE49-F238E27FC236}">
-                <a16:creationId xmlns:a16="http://schemas.microsoft.com/office/drawing/2014/main" id="{81B9BD4C-523D-D111-ACD5-D91D928EF037}"/>
+                <a16:creationId xmlns:a16="http://schemas.microsoft.com/office/drawing/2014/main" id="{1FC24820-D1F1-6CBD-0974-E507A5A2588A}"/>
               </a:ext>
             </a:extLst>
           </p:cNvPr>
@@ -237,7 +237,7 @@
           <p:cNvPr id="4" name="Datumsplatzhalter 3">
             <a:extLst>
               <a:ext uri="{FF2B5EF4-FFF2-40B4-BE49-F238E27FC236}">
-                <a16:creationId xmlns:a16="http://schemas.microsoft.com/office/drawing/2014/main" id="{89445268-903F-2CE7-45A9-0A19F02D7865}"/>
+                <a16:creationId xmlns:a16="http://schemas.microsoft.com/office/drawing/2014/main" id="{633E368C-5F65-40E6-6601-CBEDBA4324C2}"/>
               </a:ext>
             </a:extLst>
           </p:cNvPr>
@@ -253,7 +253,7 @@
           <a:bodyPr/>
           <a:lstStyle/>
           <a:p>
-            <a:fld id="{A6D1D2A2-AD13-4142-B938-4FE911EA0C8A}" type="datetimeFigureOut">
+            <a:fld id="{07E4EA72-3DA5-4AD3-AE39-39BBBD950BD8}" type="datetimeFigureOut">
               <a:rPr lang="de-DE" smtClean="0"/>
               <a:t>08.10.2026</a:t>
             </a:fld>
@@ -266,7 +266,7 @@
           <p:cNvPr id="5" name="Fußzeilenplatzhalter 4">
             <a:extLst>
               <a:ext uri="{FF2B5EF4-FFF2-40B4-BE49-F238E27FC236}">
-                <a16:creationId xmlns:a16="http://schemas.microsoft.com/office/drawing/2014/main" id="{5E6EC8EC-4881-AC02-5EAB-2097632269D2}"/>
+                <a16:creationId xmlns:a16="http://schemas.microsoft.com/office/drawing/2014/main" id="{4C5AE363-28B8-90B6-569F-9CB86B5888F7}"/>
               </a:ext>
             </a:extLst>
           </p:cNvPr>
@@ -291,7 +291,7 @@
           <p:cNvPr id="6" name="Foliennummernplatzhalter 5">
             <a:extLst>
               <a:ext uri="{FF2B5EF4-FFF2-40B4-BE49-F238E27FC236}">
-                <a16:creationId xmlns:a16="http://schemas.microsoft.com/office/drawing/2014/main" id="{09E0ACA0-2AF4-0481-6294-9C60DFCC3BBE}"/>
+                <a16:creationId xmlns:a16="http://schemas.microsoft.com/office/drawing/2014/main" id="{0201DFCA-D102-F875-5798-B0D0C24EAED2}"/>
               </a:ext>
             </a:extLst>
           </p:cNvPr>
@@ -307,7 +307,7 @@
           <a:bodyPr/>
           <a:lstStyle/>
           <a:p>
-            <a:fld id="{8EA70C56-1F2C-4F2D-9E80-8179F8AB0650}" type="slidenum">
+            <a:fld id="{1784575D-677E-4E90-8385-507E4A12F277}" type="slidenum">
               <a:rPr lang="de-DE" smtClean="0"/>
               <a:t>‹Nr.›</a:t>
             </a:fld>
@@ -318,7 +318,7 @@
     </p:spTree>
     <p:extLst>
       <p:ext uri="{BB962C8B-B14F-4D97-AF65-F5344CB8AC3E}">
-        <p14:creationId xmlns:p14="http://schemas.microsoft.com/office/powerpoint/2010/main" val="2484037699"/>
+        <p14:creationId xmlns:p14="http://schemas.microsoft.com/office/powerpoint/2010/main" val="498031144"/>
       </p:ext>
     </p:extLst>
   </p:cSld>
@@ -350,7 +350,7 @@
           <p:cNvPr id="2" name="Titel 1">
             <a:extLst>
               <a:ext uri="{FF2B5EF4-FFF2-40B4-BE49-F238E27FC236}">
-                <a16:creationId xmlns:a16="http://schemas.microsoft.com/office/drawing/2014/main" id="{0C7FC551-1FF9-F752-0FFF-56374F77126A}"/>
+                <a16:creationId xmlns:a16="http://schemas.microsoft.com/office/drawing/2014/main" id="{0AA8364E-5407-4C66-4EAC-5B1AC6EBFE39}"/>
               </a:ext>
             </a:extLst>
           </p:cNvPr>
@@ -378,7 +378,7 @@
           <p:cNvPr id="3" name="Vertikaler Textplatzhalter 2">
             <a:extLst>
               <a:ext uri="{FF2B5EF4-FFF2-40B4-BE49-F238E27FC236}">
-                <a16:creationId xmlns:a16="http://schemas.microsoft.com/office/drawing/2014/main" id="{49D011A3-0985-7FF7-A4D8-EBDD2177844F}"/>
+                <a16:creationId xmlns:a16="http://schemas.microsoft.com/office/drawing/2014/main" id="{B81E1AC7-ED57-31A1-BC85-93896EC95CAB}"/>
               </a:ext>
             </a:extLst>
           </p:cNvPr>
@@ -435,7 +435,7 @@
           <p:cNvPr id="4" name="Datumsplatzhalter 3">
             <a:extLst>
               <a:ext uri="{FF2B5EF4-FFF2-40B4-BE49-F238E27FC236}">
-                <a16:creationId xmlns:a16="http://schemas.microsoft.com/office/drawing/2014/main" id="{1B2415A6-7753-396E-B83D-E5D0CD484976}"/>
+                <a16:creationId xmlns:a16="http://schemas.microsoft.com/office/drawing/2014/main" id="{21689904-BEF2-90C5-28D9-FA5BB3590AD9}"/>
               </a:ext>
             </a:extLst>
           </p:cNvPr>
@@ -451,7 +451,7 @@
           <a:bodyPr/>
           <a:lstStyle/>
           <a:p>
-            <a:fld id="{A6D1D2A2-AD13-4142-B938-4FE911EA0C8A}" type="datetimeFigureOut">
+            <a:fld id="{07E4EA72-3DA5-4AD3-AE39-39BBBD950BD8}" type="datetimeFigureOut">
               <a:rPr lang="de-DE" smtClean="0"/>
               <a:t>08.10.2026</a:t>
             </a:fld>
@@ -464,7 +464,7 @@
           <p:cNvPr id="5" name="Fußzeilenplatzhalter 4">
             <a:extLst>
               <a:ext uri="{FF2B5EF4-FFF2-40B4-BE49-F238E27FC236}">
-                <a16:creationId xmlns:a16="http://schemas.microsoft.com/office/drawing/2014/main" id="{72CE9497-EE6D-8239-8B6D-BE4C7B5534F2}"/>
+                <a16:creationId xmlns:a16="http://schemas.microsoft.com/office/drawing/2014/main" id="{943C3D7E-BD6B-C9C6-218D-D09C15026FF3}"/>
               </a:ext>
             </a:extLst>
           </p:cNvPr>
@@ -489,7 +489,7 @@
           <p:cNvPr id="6" name="Foliennummernplatzhalter 5">
             <a:extLst>
               <a:ext uri="{FF2B5EF4-FFF2-40B4-BE49-F238E27FC236}">
-                <a16:creationId xmlns:a16="http://schemas.microsoft.com/office/drawing/2014/main" id="{3F0B5801-024B-BC60-E7F3-AD95D480B669}"/>
+                <a16:creationId xmlns:a16="http://schemas.microsoft.com/office/drawing/2014/main" id="{6131AB1E-3E50-90AF-C060-55FDEEC68836}"/>
               </a:ext>
             </a:extLst>
           </p:cNvPr>
@@ -505,7 +505,7 @@
           <a:bodyPr/>
           <a:lstStyle/>
           <a:p>
-            <a:fld id="{8EA70C56-1F2C-4F2D-9E80-8179F8AB0650}" type="slidenum">
+            <a:fld id="{1784575D-677E-4E90-8385-507E4A12F277}" type="slidenum">
               <a:rPr lang="de-DE" smtClean="0"/>
               <a:t>‹Nr.›</a:t>
             </a:fld>
@@ -516,7 +516,7 @@
     </p:spTree>
     <p:extLst>
       <p:ext uri="{BB962C8B-B14F-4D97-AF65-F5344CB8AC3E}">
-        <p14:creationId xmlns:p14="http://schemas.microsoft.com/office/powerpoint/2010/main" val="2416293760"/>
+        <p14:creationId xmlns:p14="http://schemas.microsoft.com/office/powerpoint/2010/main" val="466900521"/>
       </p:ext>
     </p:extLst>
   </p:cSld>
@@ -548,7 +548,7 @@
           <p:cNvPr id="2" name="Vertikaler Titel 1">
             <a:extLst>
               <a:ext uri="{FF2B5EF4-FFF2-40B4-BE49-F238E27FC236}">
-                <a16:creationId xmlns:a16="http://schemas.microsoft.com/office/drawing/2014/main" id="{FE5C9A0C-FC48-B3F8-B54F-ADF85E65BD04}"/>
+                <a16:creationId xmlns:a16="http://schemas.microsoft.com/office/drawing/2014/main" id="{A62669E7-C593-FD02-2085-ED5ECC763293}"/>
               </a:ext>
             </a:extLst>
           </p:cNvPr>
@@ -581,7 +581,7 @@
           <p:cNvPr id="3" name="Vertikaler Textplatzhalter 2">
             <a:extLst>
               <a:ext uri="{FF2B5EF4-FFF2-40B4-BE49-F238E27FC236}">
-                <a16:creationId xmlns:a16="http://schemas.microsoft.com/office/drawing/2014/main" id="{E5A501C5-E42E-F734-DAC0-D98ACE35C92C}"/>
+                <a16:creationId xmlns:a16="http://schemas.microsoft.com/office/drawing/2014/main" id="{E83E5DBF-3F28-277C-2642-554E95E5097C}"/>
               </a:ext>
             </a:extLst>
           </p:cNvPr>
@@ -643,7 +643,7 @@
           <p:cNvPr id="4" name="Datumsplatzhalter 3">
             <a:extLst>
               <a:ext uri="{FF2B5EF4-FFF2-40B4-BE49-F238E27FC236}">
-                <a16:creationId xmlns:a16="http://schemas.microsoft.com/office/drawing/2014/main" id="{0C5197CD-CFE1-471D-5489-51F1A244468F}"/>
+                <a16:creationId xmlns:a16="http://schemas.microsoft.com/office/drawing/2014/main" id="{9DE19D34-C50E-AE70-FDF3-C857B41FEE8E}"/>
               </a:ext>
             </a:extLst>
           </p:cNvPr>
@@ -659,7 +659,7 @@
           <a:bodyPr/>
           <a:lstStyle/>
           <a:p>
-            <a:fld id="{A6D1D2A2-AD13-4142-B938-4FE911EA0C8A}" type="datetimeFigureOut">
+            <a:fld id="{07E4EA72-3DA5-4AD3-AE39-39BBBD950BD8}" type="datetimeFigureOut">
               <a:rPr lang="de-DE" smtClean="0"/>
               <a:t>08.10.2026</a:t>
             </a:fld>
@@ -672,7 +672,7 @@
           <p:cNvPr id="5" name="Fußzeilenplatzhalter 4">
             <a:extLst>
               <a:ext uri="{FF2B5EF4-FFF2-40B4-BE49-F238E27FC236}">
-                <a16:creationId xmlns:a16="http://schemas.microsoft.com/office/drawing/2014/main" id="{64828635-F2F3-EE16-BAE6-E451A7AE9C05}"/>
+                <a16:creationId xmlns:a16="http://schemas.microsoft.com/office/drawing/2014/main" id="{7DBDF85C-D399-6639-BE31-89F3A3BB0B08}"/>
               </a:ext>
             </a:extLst>
           </p:cNvPr>
@@ -697,7 +697,7 @@
           <p:cNvPr id="6" name="Foliennummernplatzhalter 5">
             <a:extLst>
               <a:ext uri="{FF2B5EF4-FFF2-40B4-BE49-F238E27FC236}">
-                <a16:creationId xmlns:a16="http://schemas.microsoft.com/office/drawing/2014/main" id="{B1767A4B-BAC0-B6F5-268E-5CFD37BA79EF}"/>
+                <a16:creationId xmlns:a16="http://schemas.microsoft.com/office/drawing/2014/main" id="{00FA4F42-2843-D888-1B88-20342C6EC609}"/>
               </a:ext>
             </a:extLst>
           </p:cNvPr>
@@ -713,7 +713,7 @@
           <a:bodyPr/>
           <a:lstStyle/>
           <a:p>
-            <a:fld id="{8EA70C56-1F2C-4F2D-9E80-8179F8AB0650}" type="slidenum">
+            <a:fld id="{1784575D-677E-4E90-8385-507E4A12F277}" type="slidenum">
               <a:rPr lang="de-DE" smtClean="0"/>
               <a:t>‹Nr.›</a:t>
             </a:fld>
@@ -724,7 +724,7 @@
     </p:spTree>
     <p:extLst>
       <p:ext uri="{BB962C8B-B14F-4D97-AF65-F5344CB8AC3E}">
-        <p14:creationId xmlns:p14="http://schemas.microsoft.com/office/powerpoint/2010/main" val="1643278654"/>
+        <p14:creationId xmlns:p14="http://schemas.microsoft.com/office/powerpoint/2010/main" val="3835230378"/>
       </p:ext>
     </p:extLst>
   </p:cSld>
@@ -756,7 +756,7 @@
           <p:cNvPr id="2" name="Titel 1">
             <a:extLst>
               <a:ext uri="{FF2B5EF4-FFF2-40B4-BE49-F238E27FC236}">
-                <a16:creationId xmlns:a16="http://schemas.microsoft.com/office/drawing/2014/main" id="{9FDCA81B-D918-33F8-2F2F-A913451329CF}"/>
+                <a16:creationId xmlns:a16="http://schemas.microsoft.com/office/drawing/2014/main" id="{5F0657C1-0AE5-7591-D98E-58EA33E47BD8}"/>
               </a:ext>
             </a:extLst>
           </p:cNvPr>
@@ -784,7 +784,7 @@
           <p:cNvPr id="3" name="Inhaltsplatzhalter 2">
             <a:extLst>
               <a:ext uri="{FF2B5EF4-FFF2-40B4-BE49-F238E27FC236}">
-                <a16:creationId xmlns:a16="http://schemas.microsoft.com/office/drawing/2014/main" id="{D3529A66-573F-61C0-5B48-0F5A2F0745B4}"/>
+                <a16:creationId xmlns:a16="http://schemas.microsoft.com/office/drawing/2014/main" id="{A8C98F74-1023-11EA-6B86-6F5D09385335}"/>
               </a:ext>
             </a:extLst>
           </p:cNvPr>
@@ -841,7 +841,7 @@
           <p:cNvPr id="4" name="Datumsplatzhalter 3">
             <a:extLst>
               <a:ext uri="{FF2B5EF4-FFF2-40B4-BE49-F238E27FC236}">
-                <a16:creationId xmlns:a16="http://schemas.microsoft.com/office/drawing/2014/main" id="{372841B7-D54B-D483-CC38-121B4AEFD9F2}"/>
+                <a16:creationId xmlns:a16="http://schemas.microsoft.com/office/drawing/2014/main" id="{D19047B2-1B42-81CC-D4A4-27B91C4A927E}"/>
               </a:ext>
             </a:extLst>
           </p:cNvPr>
@@ -857,7 +857,7 @@
           <a:bodyPr/>
           <a:lstStyle/>
           <a:p>
-            <a:fld id="{A6D1D2A2-AD13-4142-B938-4FE911EA0C8A}" type="datetimeFigureOut">
+            <a:fld id="{07E4EA72-3DA5-4AD3-AE39-39BBBD950BD8}" type="datetimeFigureOut">
               <a:rPr lang="de-DE" smtClean="0"/>
               <a:t>08.10.2026</a:t>
             </a:fld>
@@ -870,7 +870,7 @@
           <p:cNvPr id="5" name="Fußzeilenplatzhalter 4">
             <a:extLst>
               <a:ext uri="{FF2B5EF4-FFF2-40B4-BE49-F238E27FC236}">
-                <a16:creationId xmlns:a16="http://schemas.microsoft.com/office/drawing/2014/main" id="{0085C1DA-E6E4-0347-845D-E7D70E90E4A9}"/>
+                <a16:creationId xmlns:a16="http://schemas.microsoft.com/office/drawing/2014/main" id="{DE473E63-F8AB-89C9-9414-9DD2663DF3E1}"/>
               </a:ext>
             </a:extLst>
           </p:cNvPr>
@@ -895,7 +895,7 @@
           <p:cNvPr id="6" name="Foliennummernplatzhalter 5">
             <a:extLst>
               <a:ext uri="{FF2B5EF4-FFF2-40B4-BE49-F238E27FC236}">
-                <a16:creationId xmlns:a16="http://schemas.microsoft.com/office/drawing/2014/main" id="{B6E60779-F259-AD01-029E-E305169D1951}"/>
+                <a16:creationId xmlns:a16="http://schemas.microsoft.com/office/drawing/2014/main" id="{130C1E6C-DB1F-94FD-8448-34ED1DF008E7}"/>
               </a:ext>
             </a:extLst>
           </p:cNvPr>
@@ -911,7 +911,7 @@
           <a:bodyPr/>
           <a:lstStyle/>
           <a:p>
-            <a:fld id="{8EA70C56-1F2C-4F2D-9E80-8179F8AB0650}" type="slidenum">
+            <a:fld id="{1784575D-677E-4E90-8385-507E4A12F277}" type="slidenum">
               <a:rPr lang="de-DE" smtClean="0"/>
               <a:t>‹Nr.›</a:t>
             </a:fld>
@@ -922,7 +922,7 @@
     </p:spTree>
     <p:extLst>
       <p:ext uri="{BB962C8B-B14F-4D97-AF65-F5344CB8AC3E}">
-        <p14:creationId xmlns:p14="http://schemas.microsoft.com/office/powerpoint/2010/main" val="1314783399"/>
+        <p14:creationId xmlns:p14="http://schemas.microsoft.com/office/powerpoint/2010/main" val="2786100655"/>
       </p:ext>
     </p:extLst>
   </p:cSld>
@@ -954,7 +954,7 @@
           <p:cNvPr id="2" name="Titel 1">
             <a:extLst>
               <a:ext uri="{FF2B5EF4-FFF2-40B4-BE49-F238E27FC236}">
-                <a16:creationId xmlns:a16="http://schemas.microsoft.com/office/drawing/2014/main" id="{26CE1CF0-2E6F-8550-AC8E-7CE3C7B5FA0F}"/>
+                <a16:creationId xmlns:a16="http://schemas.microsoft.com/office/drawing/2014/main" id="{62A4FC6A-5AE9-63F7-18D0-BD79841AF418}"/>
               </a:ext>
             </a:extLst>
           </p:cNvPr>
@@ -991,7 +991,7 @@
           <p:cNvPr id="3" name="Textplatzhalter 2">
             <a:extLst>
               <a:ext uri="{FF2B5EF4-FFF2-40B4-BE49-F238E27FC236}">
-                <a16:creationId xmlns:a16="http://schemas.microsoft.com/office/drawing/2014/main" id="{9BA66EF9-B336-B6AB-2229-42593B611CAD}"/>
+                <a16:creationId xmlns:a16="http://schemas.microsoft.com/office/drawing/2014/main" id="{2746BF08-5010-786C-388D-021291550707}"/>
               </a:ext>
             </a:extLst>
           </p:cNvPr>
@@ -1116,7 +1116,7 @@
           <p:cNvPr id="4" name="Datumsplatzhalter 3">
             <a:extLst>
               <a:ext uri="{FF2B5EF4-FFF2-40B4-BE49-F238E27FC236}">
-                <a16:creationId xmlns:a16="http://schemas.microsoft.com/office/drawing/2014/main" id="{15C3CB7F-10AD-EE86-A3E4-F54E1FCC6343}"/>
+                <a16:creationId xmlns:a16="http://schemas.microsoft.com/office/drawing/2014/main" id="{401264C6-1949-F6B8-57CB-886F1555E6D1}"/>
               </a:ext>
             </a:extLst>
           </p:cNvPr>
@@ -1132,7 +1132,7 @@
           <a:bodyPr/>
           <a:lstStyle/>
           <a:p>
-            <a:fld id="{A6D1D2A2-AD13-4142-B938-4FE911EA0C8A}" type="datetimeFigureOut">
+            <a:fld id="{07E4EA72-3DA5-4AD3-AE39-39BBBD950BD8}" type="datetimeFigureOut">
               <a:rPr lang="de-DE" smtClean="0"/>
               <a:t>08.10.2026</a:t>
             </a:fld>
@@ -1145,7 +1145,7 @@
           <p:cNvPr id="5" name="Fußzeilenplatzhalter 4">
             <a:extLst>
               <a:ext uri="{FF2B5EF4-FFF2-40B4-BE49-F238E27FC236}">
-                <a16:creationId xmlns:a16="http://schemas.microsoft.com/office/drawing/2014/main" id="{B1B9EC24-0E17-EDED-4161-70EF93B60743}"/>
+                <a16:creationId xmlns:a16="http://schemas.microsoft.com/office/drawing/2014/main" id="{963F11F8-F6ED-580F-859C-FFF1BB6C2287}"/>
               </a:ext>
             </a:extLst>
           </p:cNvPr>
@@ -1170,7 +1170,7 @@
           <p:cNvPr id="6" name="Foliennummernplatzhalter 5">
             <a:extLst>
               <a:ext uri="{FF2B5EF4-FFF2-40B4-BE49-F238E27FC236}">
-                <a16:creationId xmlns:a16="http://schemas.microsoft.com/office/drawing/2014/main" id="{0AC0C35D-4967-4B63-41C8-D0B6FDABFB15}"/>
+                <a16:creationId xmlns:a16="http://schemas.microsoft.com/office/drawing/2014/main" id="{A1497DE2-B5E0-50F4-D815-6E7ACA8F65D2}"/>
               </a:ext>
             </a:extLst>
           </p:cNvPr>
@@ -1186,7 +1186,7 @@
           <a:bodyPr/>
           <a:lstStyle/>
           <a:p>
-            <a:fld id="{8EA70C56-1F2C-4F2D-9E80-8179F8AB0650}" type="slidenum">
+            <a:fld id="{1784575D-677E-4E90-8385-507E4A12F277}" type="slidenum">
               <a:rPr lang="de-DE" smtClean="0"/>
               <a:t>‹Nr.›</a:t>
             </a:fld>
@@ -1197,7 +1197,7 @@
     </p:spTree>
     <p:extLst>
       <p:ext uri="{BB962C8B-B14F-4D97-AF65-F5344CB8AC3E}">
-        <p14:creationId xmlns:p14="http://schemas.microsoft.com/office/powerpoint/2010/main" val="2431454350"/>
+        <p14:creationId xmlns:p14="http://schemas.microsoft.com/office/powerpoint/2010/main" val="954666239"/>
       </p:ext>
     </p:extLst>
   </p:cSld>
@@ -1229,7 +1229,7 @@
           <p:cNvPr id="2" name="Titel 1">
             <a:extLst>
               <a:ext uri="{FF2B5EF4-FFF2-40B4-BE49-F238E27FC236}">
-                <a16:creationId xmlns:a16="http://schemas.microsoft.com/office/drawing/2014/main" id="{E4191892-6061-FC1A-69DC-09B9297AC35A}"/>
+                <a16:creationId xmlns:a16="http://schemas.microsoft.com/office/drawing/2014/main" id="{B1435119-B579-4D65-F7D5-FB8F11D6F149}"/>
               </a:ext>
             </a:extLst>
           </p:cNvPr>
@@ -1257,7 +1257,7 @@
           <p:cNvPr id="3" name="Inhaltsplatzhalter 2">
             <a:extLst>
               <a:ext uri="{FF2B5EF4-FFF2-40B4-BE49-F238E27FC236}">
-                <a16:creationId xmlns:a16="http://schemas.microsoft.com/office/drawing/2014/main" id="{AC514EFA-CD59-3773-C29F-644E3FF8428F}"/>
+                <a16:creationId xmlns:a16="http://schemas.microsoft.com/office/drawing/2014/main" id="{6D601D2D-9E2B-437D-08E6-7F2BA0EF4C5D}"/>
               </a:ext>
             </a:extLst>
           </p:cNvPr>
@@ -1319,7 +1319,7 @@
           <p:cNvPr id="4" name="Inhaltsplatzhalter 3">
             <a:extLst>
               <a:ext uri="{FF2B5EF4-FFF2-40B4-BE49-F238E27FC236}">
-                <a16:creationId xmlns:a16="http://schemas.microsoft.com/office/drawing/2014/main" id="{906BDF27-A29E-2BE1-861A-64394237C60C}"/>
+                <a16:creationId xmlns:a16="http://schemas.microsoft.com/office/drawing/2014/main" id="{332AD630-CDA2-BAE9-F874-DA65B12047FF}"/>
               </a:ext>
             </a:extLst>
           </p:cNvPr>
@@ -1381,7 +1381,7 @@
           <p:cNvPr id="5" name="Datumsplatzhalter 4">
             <a:extLst>
               <a:ext uri="{FF2B5EF4-FFF2-40B4-BE49-F238E27FC236}">
-                <a16:creationId xmlns:a16="http://schemas.microsoft.com/office/drawing/2014/main" id="{61B40A7C-F353-2280-7F85-63B71B6EFC9C}"/>
+                <a16:creationId xmlns:a16="http://schemas.microsoft.com/office/drawing/2014/main" id="{E7B213E4-1140-F60A-5845-8A97C8A17840}"/>
               </a:ext>
             </a:extLst>
           </p:cNvPr>
@@ -1397,7 +1397,7 @@
           <a:bodyPr/>
           <a:lstStyle/>
           <a:p>
-            <a:fld id="{A6D1D2A2-AD13-4142-B938-4FE911EA0C8A}" type="datetimeFigureOut">
+            <a:fld id="{07E4EA72-3DA5-4AD3-AE39-39BBBD950BD8}" type="datetimeFigureOut">
               <a:rPr lang="de-DE" smtClean="0"/>
               <a:t>08.10.2026</a:t>
             </a:fld>
@@ -1410,7 +1410,7 @@
           <p:cNvPr id="6" name="Fußzeilenplatzhalter 5">
             <a:extLst>
               <a:ext uri="{FF2B5EF4-FFF2-40B4-BE49-F238E27FC236}">
-                <a16:creationId xmlns:a16="http://schemas.microsoft.com/office/drawing/2014/main" id="{F8C735F8-D631-3F20-CAEE-BE3ABD67AF8D}"/>
+                <a16:creationId xmlns:a16="http://schemas.microsoft.com/office/drawing/2014/main" id="{BDB59016-EB47-DAA6-ED21-CE71CF704467}"/>
               </a:ext>
             </a:extLst>
           </p:cNvPr>
@@ -1435,7 +1435,7 @@
           <p:cNvPr id="7" name="Foliennummernplatzhalter 6">
             <a:extLst>
               <a:ext uri="{FF2B5EF4-FFF2-40B4-BE49-F238E27FC236}">
-                <a16:creationId xmlns:a16="http://schemas.microsoft.com/office/drawing/2014/main" id="{45893E0E-2549-27B8-6E4E-3E6A40E0A713}"/>
+                <a16:creationId xmlns:a16="http://schemas.microsoft.com/office/drawing/2014/main" id="{FE54B101-43C5-424F-CAB9-86511327AD48}"/>
               </a:ext>
             </a:extLst>
           </p:cNvPr>
@@ -1451,7 +1451,7 @@
           <a:bodyPr/>
           <a:lstStyle/>
           <a:p>
-            <a:fld id="{8EA70C56-1F2C-4F2D-9E80-8179F8AB0650}" type="slidenum">
+            <a:fld id="{1784575D-677E-4E90-8385-507E4A12F277}" type="slidenum">
               <a:rPr lang="de-DE" smtClean="0"/>
               <a:t>‹Nr.›</a:t>
             </a:fld>
@@ -1462,7 +1462,7 @@
     </p:spTree>
     <p:extLst>
       <p:ext uri="{BB962C8B-B14F-4D97-AF65-F5344CB8AC3E}">
-        <p14:creationId xmlns:p14="http://schemas.microsoft.com/office/powerpoint/2010/main" val="3904398295"/>
+        <p14:creationId xmlns:p14="http://schemas.microsoft.com/office/powerpoint/2010/main" val="386499059"/>
       </p:ext>
     </p:extLst>
   </p:cSld>
@@ -1494,7 +1494,7 @@
           <p:cNvPr id="2" name="Titel 1">
             <a:extLst>
               <a:ext uri="{FF2B5EF4-FFF2-40B4-BE49-F238E27FC236}">
-                <a16:creationId xmlns:a16="http://schemas.microsoft.com/office/drawing/2014/main" id="{5DF7A8D9-ED00-409A-A6C7-1369362E65ED}"/>
+                <a16:creationId xmlns:a16="http://schemas.microsoft.com/office/drawing/2014/main" id="{E2C4F5FC-7E1A-DF2B-45F3-273DF31EBB87}"/>
               </a:ext>
             </a:extLst>
           </p:cNvPr>
@@ -1527,7 +1527,7 @@
           <p:cNvPr id="3" name="Textplatzhalter 2">
             <a:extLst>
               <a:ext uri="{FF2B5EF4-FFF2-40B4-BE49-F238E27FC236}">
-                <a16:creationId xmlns:a16="http://schemas.microsoft.com/office/drawing/2014/main" id="{161BEB8B-133C-A3F0-6129-76A09B0BF75D}"/>
+                <a16:creationId xmlns:a16="http://schemas.microsoft.com/office/drawing/2014/main" id="{81EE8DD9-AFD7-1C99-AA38-E31E7CD485B6}"/>
               </a:ext>
             </a:extLst>
           </p:cNvPr>
@@ -1598,7 +1598,7 @@
           <p:cNvPr id="4" name="Inhaltsplatzhalter 3">
             <a:extLst>
               <a:ext uri="{FF2B5EF4-FFF2-40B4-BE49-F238E27FC236}">
-                <a16:creationId xmlns:a16="http://schemas.microsoft.com/office/drawing/2014/main" id="{22946888-872B-976A-97E6-37B3829C5E7C}"/>
+                <a16:creationId xmlns:a16="http://schemas.microsoft.com/office/drawing/2014/main" id="{CEB1BF07-DB8A-1698-81EF-836FCD166CBD}"/>
               </a:ext>
             </a:extLst>
           </p:cNvPr>
@@ -1660,7 +1660,7 @@
           <p:cNvPr id="5" name="Textplatzhalter 4">
             <a:extLst>
               <a:ext uri="{FF2B5EF4-FFF2-40B4-BE49-F238E27FC236}">
-                <a16:creationId xmlns:a16="http://schemas.microsoft.com/office/drawing/2014/main" id="{F5326D47-6299-1916-9611-737C52CF6099}"/>
+                <a16:creationId xmlns:a16="http://schemas.microsoft.com/office/drawing/2014/main" id="{74C2D621-FEEA-B2CF-FF7A-C6BE6A6C7823}"/>
               </a:ext>
             </a:extLst>
           </p:cNvPr>
@@ -1731,7 +1731,7 @@
           <p:cNvPr id="6" name="Inhaltsplatzhalter 5">
             <a:extLst>
               <a:ext uri="{FF2B5EF4-FFF2-40B4-BE49-F238E27FC236}">
-                <a16:creationId xmlns:a16="http://schemas.microsoft.com/office/drawing/2014/main" id="{767200E8-DCCE-93A3-C28F-8AD2599FF3E1}"/>
+                <a16:creationId xmlns:a16="http://schemas.microsoft.com/office/drawing/2014/main" id="{E3200E45-A3D6-6D13-D0CA-BD221AB3B07E}"/>
               </a:ext>
             </a:extLst>
           </p:cNvPr>
@@ -1793,7 +1793,7 @@
           <p:cNvPr id="7" name="Datumsplatzhalter 6">
             <a:extLst>
               <a:ext uri="{FF2B5EF4-FFF2-40B4-BE49-F238E27FC236}">
-                <a16:creationId xmlns:a16="http://schemas.microsoft.com/office/drawing/2014/main" id="{850D696D-1998-E70B-1A84-D69FC18E4C0A}"/>
+                <a16:creationId xmlns:a16="http://schemas.microsoft.com/office/drawing/2014/main" id="{C9979F03-745A-D183-F594-FE8F33E13D03}"/>
               </a:ext>
             </a:extLst>
           </p:cNvPr>
@@ -1809,7 +1809,7 @@
           <a:bodyPr/>
           <a:lstStyle/>
           <a:p>
-            <a:fld id="{A6D1D2A2-AD13-4142-B938-4FE911EA0C8A}" type="datetimeFigureOut">
+            <a:fld id="{07E4EA72-3DA5-4AD3-AE39-39BBBD950BD8}" type="datetimeFigureOut">
               <a:rPr lang="de-DE" smtClean="0"/>
               <a:t>08.10.2026</a:t>
             </a:fld>
@@ -1822,7 +1822,7 @@
           <p:cNvPr id="8" name="Fußzeilenplatzhalter 7">
             <a:extLst>
               <a:ext uri="{FF2B5EF4-FFF2-40B4-BE49-F238E27FC236}">
-                <a16:creationId xmlns:a16="http://schemas.microsoft.com/office/drawing/2014/main" id="{F9B86181-0CD7-9C0D-6CFC-BDBACF666C60}"/>
+                <a16:creationId xmlns:a16="http://schemas.microsoft.com/office/drawing/2014/main" id="{9A8794FB-1CC5-6E84-F624-912A48E74F83}"/>
               </a:ext>
             </a:extLst>
           </p:cNvPr>
@@ -1847,7 +1847,7 @@
           <p:cNvPr id="9" name="Foliennummernplatzhalter 8">
             <a:extLst>
               <a:ext uri="{FF2B5EF4-FFF2-40B4-BE49-F238E27FC236}">
-                <a16:creationId xmlns:a16="http://schemas.microsoft.com/office/drawing/2014/main" id="{B635C10C-F09E-1F6C-89A3-EA033B103D00}"/>
+                <a16:creationId xmlns:a16="http://schemas.microsoft.com/office/drawing/2014/main" id="{6D7777F0-69BF-D9AC-57A2-85BCBB91C920}"/>
               </a:ext>
             </a:extLst>
           </p:cNvPr>
@@ -1863,7 +1863,7 @@
           <a:bodyPr/>
           <a:lstStyle/>
           <a:p>
-            <a:fld id="{8EA70C56-1F2C-4F2D-9E80-8179F8AB0650}" type="slidenum">
+            <a:fld id="{1784575D-677E-4E90-8385-507E4A12F277}" type="slidenum">
               <a:rPr lang="de-DE" smtClean="0"/>
               <a:t>‹Nr.›</a:t>
             </a:fld>
@@ -1874,7 +1874,7 @@
     </p:spTree>
     <p:extLst>
       <p:ext uri="{BB962C8B-B14F-4D97-AF65-F5344CB8AC3E}">
-        <p14:creationId xmlns:p14="http://schemas.microsoft.com/office/powerpoint/2010/main" val="3741897218"/>
+        <p14:creationId xmlns:p14="http://schemas.microsoft.com/office/powerpoint/2010/main" val="3804571075"/>
       </p:ext>
     </p:extLst>
   </p:cSld>
@@ -1906,7 +1906,7 @@
           <p:cNvPr id="2" name="Titel 1">
             <a:extLst>
               <a:ext uri="{FF2B5EF4-FFF2-40B4-BE49-F238E27FC236}">
-                <a16:creationId xmlns:a16="http://schemas.microsoft.com/office/drawing/2014/main" id="{FAABC53F-EA01-1F7B-1D69-F8AF69A96478}"/>
+                <a16:creationId xmlns:a16="http://schemas.microsoft.com/office/drawing/2014/main" id="{22897167-1EFB-0ADF-273E-7FF6A7A1E331}"/>
               </a:ext>
             </a:extLst>
           </p:cNvPr>
@@ -1934,7 +1934,7 @@
           <p:cNvPr id="3" name="Datumsplatzhalter 2">
             <a:extLst>
               <a:ext uri="{FF2B5EF4-FFF2-40B4-BE49-F238E27FC236}">
-                <a16:creationId xmlns:a16="http://schemas.microsoft.com/office/drawing/2014/main" id="{BAF777B4-4F75-1731-8C66-DD0C86DEF394}"/>
+                <a16:creationId xmlns:a16="http://schemas.microsoft.com/office/drawing/2014/main" id="{4E67FE36-4A9F-665A-1FAF-A9DCB5CF15B5}"/>
               </a:ext>
             </a:extLst>
           </p:cNvPr>
@@ -1950,7 +1950,7 @@
           <a:bodyPr/>
           <a:lstStyle/>
           <a:p>
-            <a:fld id="{A6D1D2A2-AD13-4142-B938-4FE911EA0C8A}" type="datetimeFigureOut">
+            <a:fld id="{07E4EA72-3DA5-4AD3-AE39-39BBBD950BD8}" type="datetimeFigureOut">
               <a:rPr lang="de-DE" smtClean="0"/>
               <a:t>08.10.2026</a:t>
             </a:fld>
@@ -1963,7 +1963,7 @@
           <p:cNvPr id="4" name="Fußzeilenplatzhalter 3">
             <a:extLst>
               <a:ext uri="{FF2B5EF4-FFF2-40B4-BE49-F238E27FC236}">
-                <a16:creationId xmlns:a16="http://schemas.microsoft.com/office/drawing/2014/main" id="{4E399383-B263-2EB1-8B1F-DF06DEAE49C3}"/>
+                <a16:creationId xmlns:a16="http://schemas.microsoft.com/office/drawing/2014/main" id="{7A3E3EC9-FF7A-18BF-17BF-1E345ED641AA}"/>
               </a:ext>
             </a:extLst>
           </p:cNvPr>
@@ -1988,7 +1988,7 @@
           <p:cNvPr id="5" name="Foliennummernplatzhalter 4">
             <a:extLst>
               <a:ext uri="{FF2B5EF4-FFF2-40B4-BE49-F238E27FC236}">
-                <a16:creationId xmlns:a16="http://schemas.microsoft.com/office/drawing/2014/main" id="{FCAABCA0-ADE6-6387-133E-58709C393CCD}"/>
+                <a16:creationId xmlns:a16="http://schemas.microsoft.com/office/drawing/2014/main" id="{B8A66689-3EAC-3C50-C6DC-550B8581976B}"/>
               </a:ext>
             </a:extLst>
           </p:cNvPr>
@@ -2004,7 +2004,7 @@
           <a:bodyPr/>
           <a:lstStyle/>
           <a:p>
-            <a:fld id="{8EA70C56-1F2C-4F2D-9E80-8179F8AB0650}" type="slidenum">
+            <a:fld id="{1784575D-677E-4E90-8385-507E4A12F277}" type="slidenum">
               <a:rPr lang="de-DE" smtClean="0"/>
               <a:t>‹Nr.›</a:t>
             </a:fld>
@@ -2015,7 +2015,7 @@
     </p:spTree>
     <p:extLst>
       <p:ext uri="{BB962C8B-B14F-4D97-AF65-F5344CB8AC3E}">
-        <p14:creationId xmlns:p14="http://schemas.microsoft.com/office/powerpoint/2010/main" val="2860355314"/>
+        <p14:creationId xmlns:p14="http://schemas.microsoft.com/office/powerpoint/2010/main" val="996702380"/>
       </p:ext>
     </p:extLst>
   </p:cSld>
@@ -2047,7 +2047,7 @@
           <p:cNvPr id="2" name="Datumsplatzhalter 1">
             <a:extLst>
               <a:ext uri="{FF2B5EF4-FFF2-40B4-BE49-F238E27FC236}">
-                <a16:creationId xmlns:a16="http://schemas.microsoft.com/office/drawing/2014/main" id="{69DF8851-11F9-ACF6-FA49-3BAB651BACAA}"/>
+                <a16:creationId xmlns:a16="http://schemas.microsoft.com/office/drawing/2014/main" id="{2DFADEFF-2BFB-EA58-C853-7A9728B0286A}"/>
               </a:ext>
             </a:extLst>
           </p:cNvPr>
@@ -2063,7 +2063,7 @@
           <a:bodyPr/>
           <a:lstStyle/>
           <a:p>
-            <a:fld id="{A6D1D2A2-AD13-4142-B938-4FE911EA0C8A}" type="datetimeFigureOut">
+            <a:fld id="{07E4EA72-3DA5-4AD3-AE39-39BBBD950BD8}" type="datetimeFigureOut">
               <a:rPr lang="de-DE" smtClean="0"/>
               <a:t>08.10.2026</a:t>
             </a:fld>
@@ -2076,7 +2076,7 @@
           <p:cNvPr id="3" name="Fußzeilenplatzhalter 2">
             <a:extLst>
               <a:ext uri="{FF2B5EF4-FFF2-40B4-BE49-F238E27FC236}">
-                <a16:creationId xmlns:a16="http://schemas.microsoft.com/office/drawing/2014/main" id="{09A83EDD-C1DF-DAE6-7CBB-879C808AB0F1}"/>
+                <a16:creationId xmlns:a16="http://schemas.microsoft.com/office/drawing/2014/main" id="{6BA79DCB-2FFF-011B-5F50-48195027380A}"/>
               </a:ext>
             </a:extLst>
           </p:cNvPr>
@@ -2101,7 +2101,7 @@
           <p:cNvPr id="4" name="Foliennummernplatzhalter 3">
             <a:extLst>
               <a:ext uri="{FF2B5EF4-FFF2-40B4-BE49-F238E27FC236}">
-                <a16:creationId xmlns:a16="http://schemas.microsoft.com/office/drawing/2014/main" id="{D33E9774-49D3-9CF8-A97E-E4F0797EFA9F}"/>
+                <a16:creationId xmlns:a16="http://schemas.microsoft.com/office/drawing/2014/main" id="{BD362BD2-F3C5-7687-133E-ADC39126438B}"/>
               </a:ext>
             </a:extLst>
           </p:cNvPr>
@@ -2117,7 +2117,7 @@
           <a:bodyPr/>
           <a:lstStyle/>
           <a:p>
-            <a:fld id="{8EA70C56-1F2C-4F2D-9E80-8179F8AB0650}" type="slidenum">
+            <a:fld id="{1784575D-677E-4E90-8385-507E4A12F277}" type="slidenum">
               <a:rPr lang="de-DE" smtClean="0"/>
               <a:t>‹Nr.›</a:t>
             </a:fld>
@@ -2128,7 +2128,7 @@
     </p:spTree>
     <p:extLst>
       <p:ext uri="{BB962C8B-B14F-4D97-AF65-F5344CB8AC3E}">
-        <p14:creationId xmlns:p14="http://schemas.microsoft.com/office/powerpoint/2010/main" val="1937625464"/>
+        <p14:creationId xmlns:p14="http://schemas.microsoft.com/office/powerpoint/2010/main" val="494029250"/>
       </p:ext>
     </p:extLst>
   </p:cSld>
@@ -2160,7 +2160,7 @@
           <p:cNvPr id="2" name="Titel 1">
             <a:extLst>
               <a:ext uri="{FF2B5EF4-FFF2-40B4-BE49-F238E27FC236}">
-                <a16:creationId xmlns:a16="http://schemas.microsoft.com/office/drawing/2014/main" id="{EE70409B-6750-71F5-1CBD-2BF2098DF5CB}"/>
+                <a16:creationId xmlns:a16="http://schemas.microsoft.com/office/drawing/2014/main" id="{1D690440-BCAD-D3DC-F22C-9D5D09771011}"/>
               </a:ext>
             </a:extLst>
           </p:cNvPr>
@@ -2197,7 +2197,7 @@
           <p:cNvPr id="3" name="Inhaltsplatzhalter 2">
             <a:extLst>
               <a:ext uri="{FF2B5EF4-FFF2-40B4-BE49-F238E27FC236}">
-                <a16:creationId xmlns:a16="http://schemas.microsoft.com/office/drawing/2014/main" id="{FE5C73A3-FB9C-5C00-7527-478265BE63F6}"/>
+                <a16:creationId xmlns:a16="http://schemas.microsoft.com/office/drawing/2014/main" id="{33674F46-F53B-94A2-1A3F-702CA95D8D62}"/>
               </a:ext>
             </a:extLst>
           </p:cNvPr>
@@ -2287,7 +2287,7 @@
           <p:cNvPr id="4" name="Textplatzhalter 3">
             <a:extLst>
               <a:ext uri="{FF2B5EF4-FFF2-40B4-BE49-F238E27FC236}">
-                <a16:creationId xmlns:a16="http://schemas.microsoft.com/office/drawing/2014/main" id="{8830FCDE-B960-0BBC-E7C6-5E7C2A3C8D40}"/>
+                <a16:creationId xmlns:a16="http://schemas.microsoft.com/office/drawing/2014/main" id="{277EC8FB-951E-ED0B-0B8A-6C5C48A84A6E}"/>
               </a:ext>
             </a:extLst>
           </p:cNvPr>
@@ -2358,7 +2358,7 @@
           <p:cNvPr id="5" name="Datumsplatzhalter 4">
             <a:extLst>
               <a:ext uri="{FF2B5EF4-FFF2-40B4-BE49-F238E27FC236}">
-                <a16:creationId xmlns:a16="http://schemas.microsoft.com/office/drawing/2014/main" id="{B57558D8-EF34-1189-04B7-DC8C007D69A8}"/>
+                <a16:creationId xmlns:a16="http://schemas.microsoft.com/office/drawing/2014/main" id="{AD7156CA-011C-93D8-2220-2F8886066B01}"/>
               </a:ext>
             </a:extLst>
           </p:cNvPr>
@@ -2374,7 +2374,7 @@
           <a:bodyPr/>
           <a:lstStyle/>
           <a:p>
-            <a:fld id="{A6D1D2A2-AD13-4142-B938-4FE911EA0C8A}" type="datetimeFigureOut">
+            <a:fld id="{07E4EA72-3DA5-4AD3-AE39-39BBBD950BD8}" type="datetimeFigureOut">
               <a:rPr lang="de-DE" smtClean="0"/>
               <a:t>08.10.2026</a:t>
             </a:fld>
@@ -2387,7 +2387,7 @@
           <p:cNvPr id="6" name="Fußzeilenplatzhalter 5">
             <a:extLst>
               <a:ext uri="{FF2B5EF4-FFF2-40B4-BE49-F238E27FC236}">
-                <a16:creationId xmlns:a16="http://schemas.microsoft.com/office/drawing/2014/main" id="{E7CF3DA2-88A4-148F-3981-F2707A87666D}"/>
+                <a16:creationId xmlns:a16="http://schemas.microsoft.com/office/drawing/2014/main" id="{3A7DABAC-046B-573C-4166-6D9E4F97F445}"/>
               </a:ext>
             </a:extLst>
           </p:cNvPr>
@@ -2412,7 +2412,7 @@
           <p:cNvPr id="7" name="Foliennummernplatzhalter 6">
             <a:extLst>
               <a:ext uri="{FF2B5EF4-FFF2-40B4-BE49-F238E27FC236}">
-                <a16:creationId xmlns:a16="http://schemas.microsoft.com/office/drawing/2014/main" id="{63DC42F3-52D6-9394-E742-765881229E98}"/>
+                <a16:creationId xmlns:a16="http://schemas.microsoft.com/office/drawing/2014/main" id="{3921281A-D237-DAEB-80AE-35080BD7E0C5}"/>
               </a:ext>
             </a:extLst>
           </p:cNvPr>
@@ -2428,7 +2428,7 @@
           <a:bodyPr/>
           <a:lstStyle/>
           <a:p>
-            <a:fld id="{8EA70C56-1F2C-4F2D-9E80-8179F8AB0650}" type="slidenum">
+            <a:fld id="{1784575D-677E-4E90-8385-507E4A12F277}" type="slidenum">
               <a:rPr lang="de-DE" smtClean="0"/>
               <a:t>‹Nr.›</a:t>
             </a:fld>
@@ -2439,7 +2439,7 @@
     </p:spTree>
     <p:extLst>
       <p:ext uri="{BB962C8B-B14F-4D97-AF65-F5344CB8AC3E}">
-        <p14:creationId xmlns:p14="http://schemas.microsoft.com/office/powerpoint/2010/main" val="3010766903"/>
+        <p14:creationId xmlns:p14="http://schemas.microsoft.com/office/powerpoint/2010/main" val="237267283"/>
       </p:ext>
     </p:extLst>
   </p:cSld>
@@ -2471,7 +2471,7 @@
           <p:cNvPr id="2" name="Titel 1">
             <a:extLst>
               <a:ext uri="{FF2B5EF4-FFF2-40B4-BE49-F238E27FC236}">
-                <a16:creationId xmlns:a16="http://schemas.microsoft.com/office/drawing/2014/main" id="{B59EACDE-7CA8-36E0-6F89-6EDCD392BE5D}"/>
+                <a16:creationId xmlns:a16="http://schemas.microsoft.com/office/drawing/2014/main" id="{4C98CEEC-38C7-8EB6-91C6-1485723FBBDC}"/>
               </a:ext>
             </a:extLst>
           </p:cNvPr>
@@ -2508,7 +2508,7 @@
           <p:cNvPr id="3" name="Bildplatzhalter 2">
             <a:extLst>
               <a:ext uri="{FF2B5EF4-FFF2-40B4-BE49-F238E27FC236}">
-                <a16:creationId xmlns:a16="http://schemas.microsoft.com/office/drawing/2014/main" id="{981ADD2D-59FB-2AA1-AD8B-100E2B950DF2}"/>
+                <a16:creationId xmlns:a16="http://schemas.microsoft.com/office/drawing/2014/main" id="{88E811A0-5E15-3D28-E834-54766534EB07}"/>
               </a:ext>
             </a:extLst>
           </p:cNvPr>
@@ -2575,7 +2575,7 @@
           <p:cNvPr id="4" name="Textplatzhalter 3">
             <a:extLst>
               <a:ext uri="{FF2B5EF4-FFF2-40B4-BE49-F238E27FC236}">
-                <a16:creationId xmlns:a16="http://schemas.microsoft.com/office/drawing/2014/main" id="{0A0ACD3A-D677-ABBC-E385-971ED080729A}"/>
+                <a16:creationId xmlns:a16="http://schemas.microsoft.com/office/drawing/2014/main" id="{3175CBF8-41FF-8E2C-C004-7B67F15FAB7D}"/>
               </a:ext>
             </a:extLst>
           </p:cNvPr>
@@ -2646,7 +2646,7 @@
           <p:cNvPr id="5" name="Datumsplatzhalter 4">
             <a:extLst>
               <a:ext uri="{FF2B5EF4-FFF2-40B4-BE49-F238E27FC236}">
-                <a16:creationId xmlns:a16="http://schemas.microsoft.com/office/drawing/2014/main" id="{43E76369-9882-E87C-13AD-F852025A704C}"/>
+                <a16:creationId xmlns:a16="http://schemas.microsoft.com/office/drawing/2014/main" id="{888F878A-704B-A655-9C85-0DD3A6ECDC3E}"/>
               </a:ext>
             </a:extLst>
           </p:cNvPr>
@@ -2662,7 +2662,7 @@
           <a:bodyPr/>
           <a:lstStyle/>
           <a:p>
-            <a:fld id="{A6D1D2A2-AD13-4142-B938-4FE911EA0C8A}" type="datetimeFigureOut">
+            <a:fld id="{07E4EA72-3DA5-4AD3-AE39-39BBBD950BD8}" type="datetimeFigureOut">
               <a:rPr lang="de-DE" smtClean="0"/>
               <a:t>08.10.2026</a:t>
             </a:fld>
@@ -2675,7 +2675,7 @@
           <p:cNvPr id="6" name="Fußzeilenplatzhalter 5">
             <a:extLst>
               <a:ext uri="{FF2B5EF4-FFF2-40B4-BE49-F238E27FC236}">
-                <a16:creationId xmlns:a16="http://schemas.microsoft.com/office/drawing/2014/main" id="{7CD3F85C-3822-9A59-2CFF-4DBC1245F767}"/>
+                <a16:creationId xmlns:a16="http://schemas.microsoft.com/office/drawing/2014/main" id="{38987AEA-31B7-1318-EC30-647436FCA82E}"/>
               </a:ext>
             </a:extLst>
           </p:cNvPr>
@@ -2700,7 +2700,7 @@
           <p:cNvPr id="7" name="Foliennummernplatzhalter 6">
             <a:extLst>
               <a:ext uri="{FF2B5EF4-FFF2-40B4-BE49-F238E27FC236}">
-                <a16:creationId xmlns:a16="http://schemas.microsoft.com/office/drawing/2014/main" id="{95D94800-DA98-ED6A-4BE0-BFE1CA1CCAE1}"/>
+                <a16:creationId xmlns:a16="http://schemas.microsoft.com/office/drawing/2014/main" id="{822D158E-ACFA-F5E1-95F1-B2EED7695DF6}"/>
               </a:ext>
             </a:extLst>
           </p:cNvPr>
@@ -2716,7 +2716,7 @@
           <a:bodyPr/>
           <a:lstStyle/>
           <a:p>
-            <a:fld id="{8EA70C56-1F2C-4F2D-9E80-8179F8AB0650}" type="slidenum">
+            <a:fld id="{1784575D-677E-4E90-8385-507E4A12F277}" type="slidenum">
               <a:rPr lang="de-DE" smtClean="0"/>
               <a:t>‹Nr.›</a:t>
             </a:fld>
@@ -2727,7 +2727,7 @@
     </p:spTree>
     <p:extLst>
       <p:ext uri="{BB962C8B-B14F-4D97-AF65-F5344CB8AC3E}">
-        <p14:creationId xmlns:p14="http://schemas.microsoft.com/office/powerpoint/2010/main" val="976357740"/>
+        <p14:creationId xmlns:p14="http://schemas.microsoft.com/office/powerpoint/2010/main" val="4004691295"/>
       </p:ext>
     </p:extLst>
   </p:cSld>
@@ -2764,7 +2764,7 @@
           <p:cNvPr id="2" name="Titelplatzhalter 1">
             <a:extLst>
               <a:ext uri="{FF2B5EF4-FFF2-40B4-BE49-F238E27FC236}">
-                <a16:creationId xmlns:a16="http://schemas.microsoft.com/office/drawing/2014/main" id="{2056B14D-64A2-0EDC-B566-EC03D5167215}"/>
+                <a16:creationId xmlns:a16="http://schemas.microsoft.com/office/drawing/2014/main" id="{064C0A54-B4C8-0AE6-3A0C-034467144C76}"/>
               </a:ext>
             </a:extLst>
           </p:cNvPr>
@@ -2802,7 +2802,7 @@
           <p:cNvPr id="3" name="Textplatzhalter 2">
             <a:extLst>
               <a:ext uri="{FF2B5EF4-FFF2-40B4-BE49-F238E27FC236}">
-                <a16:creationId xmlns:a16="http://schemas.microsoft.com/office/drawing/2014/main" id="{DFA1323B-F0AC-2D49-4D58-634F5A3D86EF}"/>
+                <a16:creationId xmlns:a16="http://schemas.microsoft.com/office/drawing/2014/main" id="{6510FE72-9690-9974-AEB0-40D2B46B82A2}"/>
               </a:ext>
             </a:extLst>
           </p:cNvPr>
@@ -2869,7 +2869,7 @@
           <p:cNvPr id="4" name="Datumsplatzhalter 3">
             <a:extLst>
               <a:ext uri="{FF2B5EF4-FFF2-40B4-BE49-F238E27FC236}">
-                <a16:creationId xmlns:a16="http://schemas.microsoft.com/office/drawing/2014/main" id="{AE4AF9DD-3B76-BD1A-6568-C21A48F40296}"/>
+                <a16:creationId xmlns:a16="http://schemas.microsoft.com/office/drawing/2014/main" id="{ACDCCBF6-3FA6-DE6B-30BC-0E5F1F95F9A1}"/>
               </a:ext>
             </a:extLst>
           </p:cNvPr>
@@ -2903,7 +2903,7 @@
             </a:lvl1pPr>
           </a:lstStyle>
           <a:p>
-            <a:fld id="{A6D1D2A2-AD13-4142-B938-4FE911EA0C8A}" type="datetimeFigureOut">
+            <a:fld id="{07E4EA72-3DA5-4AD3-AE39-39BBBD950BD8}" type="datetimeFigureOut">
               <a:rPr lang="de-DE" smtClean="0"/>
               <a:t>08.10.2026</a:t>
             </a:fld>
@@ -2916,7 +2916,7 @@
           <p:cNvPr id="5" name="Fußzeilenplatzhalter 4">
             <a:extLst>
               <a:ext uri="{FF2B5EF4-FFF2-40B4-BE49-F238E27FC236}">
-                <a16:creationId xmlns:a16="http://schemas.microsoft.com/office/drawing/2014/main" id="{0D29DBB4-DF76-B196-263E-DEB3347705B9}"/>
+                <a16:creationId xmlns:a16="http://schemas.microsoft.com/office/drawing/2014/main" id="{68BDE4AA-EF3D-0766-6BA8-6D48BEF9A7E1}"/>
               </a:ext>
             </a:extLst>
           </p:cNvPr>
@@ -2959,7 +2959,7 @@
           <p:cNvPr id="6" name="Foliennummernplatzhalter 5">
             <a:extLst>
               <a:ext uri="{FF2B5EF4-FFF2-40B4-BE49-F238E27FC236}">
-                <a16:creationId xmlns:a16="http://schemas.microsoft.com/office/drawing/2014/main" id="{49DA36F0-148E-E230-CE69-C12E0AD7B19B}"/>
+                <a16:creationId xmlns:a16="http://schemas.microsoft.com/office/drawing/2014/main" id="{900A9CA5-35B6-6AFB-AAFF-D9F6B795AE50}"/>
               </a:ext>
             </a:extLst>
           </p:cNvPr>
@@ -2993,7 +2993,7 @@
             </a:lvl1pPr>
           </a:lstStyle>
           <a:p>
-            <a:fld id="{8EA70C56-1F2C-4F2D-9E80-8179F8AB0650}" type="slidenum">
+            <a:fld id="{1784575D-677E-4E90-8385-507E4A12F277}" type="slidenum">
               <a:rPr lang="de-DE" smtClean="0"/>
               <a:t>‹Nr.›</a:t>
             </a:fld>
@@ -3004,7 +3004,7 @@
     </p:spTree>
     <p:extLst>
       <p:ext uri="{BB962C8B-B14F-4D97-AF65-F5344CB8AC3E}">
-        <p14:creationId xmlns:p14="http://schemas.microsoft.com/office/powerpoint/2010/main" val="3768285246"/>
+        <p14:creationId xmlns:p14="http://schemas.microsoft.com/office/powerpoint/2010/main" val="2066632098"/>
       </p:ext>
     </p:extLst>
   </p:cSld>
@@ -3327,7 +3327,7 @@
           <p:cNvPr id="2" name="Pfeil: nach rechts 1">
             <a:extLst>
               <a:ext uri="{FF2B5EF4-FFF2-40B4-BE49-F238E27FC236}">
-                <a16:creationId xmlns:a16="http://schemas.microsoft.com/office/drawing/2014/main" id="{53E1E22B-D65F-C47B-E8B8-6664F66A9282}"/>
+                <a16:creationId xmlns:a16="http://schemas.microsoft.com/office/drawing/2014/main" id="{03F49129-CE35-07F4-D820-479F31E027D0}"/>
               </a:ext>
             </a:extLst>
           </p:cNvPr>
@@ -3373,7 +3373,7 @@
           <p:cNvPr id="3" name="Rechteck 2">
             <a:extLst>
               <a:ext uri="{FF2B5EF4-FFF2-40B4-BE49-F238E27FC236}">
-                <a16:creationId xmlns:a16="http://schemas.microsoft.com/office/drawing/2014/main" id="{2EDDB8F5-7368-13CF-47CF-9F3ECE23FFDF}"/>
+                <a16:creationId xmlns:a16="http://schemas.microsoft.com/office/drawing/2014/main" id="{697A999F-6BC7-CE0F-AA08-0BC9022EAA2B}"/>
               </a:ext>
             </a:extLst>
           </p:cNvPr>
@@ -3422,7 +3422,7 @@
           <p:cNvPr id="4" name="Pfeil: nach rechts 3">
             <a:extLst>
               <a:ext uri="{FF2B5EF4-FFF2-40B4-BE49-F238E27FC236}">
-                <a16:creationId xmlns:a16="http://schemas.microsoft.com/office/drawing/2014/main" id="{A35929DA-7D0B-C8DB-6A4B-685E6C0A21C8}"/>
+                <a16:creationId xmlns:a16="http://schemas.microsoft.com/office/drawing/2014/main" id="{36E29528-ACBA-1C9A-88BA-52500E7F16DE}"/>
               </a:ext>
             </a:extLst>
           </p:cNvPr>
@@ -3468,7 +3468,7 @@
           <p:cNvPr id="5" name="Rechteck 4">
             <a:extLst>
               <a:ext uri="{FF2B5EF4-FFF2-40B4-BE49-F238E27FC236}">
-                <a16:creationId xmlns:a16="http://schemas.microsoft.com/office/drawing/2014/main" id="{38352699-2AE4-42DD-C533-BA26D644B998}"/>
+                <a16:creationId xmlns:a16="http://schemas.microsoft.com/office/drawing/2014/main" id="{F7014C8C-A1AE-AA06-23DF-D184E27C10C7}"/>
               </a:ext>
             </a:extLst>
           </p:cNvPr>
@@ -3517,7 +3517,7 @@
           <p:cNvPr id="6" name="Pfeil: nach rechts 5">
             <a:extLst>
               <a:ext uri="{FF2B5EF4-FFF2-40B4-BE49-F238E27FC236}">
-                <a16:creationId xmlns:a16="http://schemas.microsoft.com/office/drawing/2014/main" id="{7A62EFA8-805C-405B-3FAB-F40E3F93D385}"/>
+                <a16:creationId xmlns:a16="http://schemas.microsoft.com/office/drawing/2014/main" id="{D8DCF7F6-EED2-C356-BFC6-0A74E60AD7BD}"/>
               </a:ext>
             </a:extLst>
           </p:cNvPr>
@@ -3563,7 +3563,7 @@
           <p:cNvPr id="7" name="Rechteck 6">
             <a:extLst>
               <a:ext uri="{FF2B5EF4-FFF2-40B4-BE49-F238E27FC236}">
-                <a16:creationId xmlns:a16="http://schemas.microsoft.com/office/drawing/2014/main" id="{5833A65F-D90C-E7E0-CF6D-E1B1EB13DB84}"/>
+                <a16:creationId xmlns:a16="http://schemas.microsoft.com/office/drawing/2014/main" id="{C83D0F18-74EA-82A1-60A4-133499519CCA}"/>
               </a:ext>
             </a:extLst>
           </p:cNvPr>
@@ -3612,7 +3612,7 @@
           <p:cNvPr id="8" name="Pfeil: nach rechts 7">
             <a:extLst>
               <a:ext uri="{FF2B5EF4-FFF2-40B4-BE49-F238E27FC236}">
-                <a16:creationId xmlns:a16="http://schemas.microsoft.com/office/drawing/2014/main" id="{2AC62190-5563-F324-C409-76B890F94858}"/>
+                <a16:creationId xmlns:a16="http://schemas.microsoft.com/office/drawing/2014/main" id="{CA258A63-00ED-3E27-F192-122DC9318A14}"/>
               </a:ext>
             </a:extLst>
           </p:cNvPr>
@@ -3658,7 +3658,7 @@
           <p:cNvPr id="9" name="Rechteck 8">
             <a:extLst>
               <a:ext uri="{FF2B5EF4-FFF2-40B4-BE49-F238E27FC236}">
-                <a16:creationId xmlns:a16="http://schemas.microsoft.com/office/drawing/2014/main" id="{9FDEEF91-8C1C-3448-8DC4-A8BC6CAFC68B}"/>
+                <a16:creationId xmlns:a16="http://schemas.microsoft.com/office/drawing/2014/main" id="{5108F19E-5046-5EEC-54E8-574F210A55E5}"/>
               </a:ext>
             </a:extLst>
           </p:cNvPr>
@@ -3707,7 +3707,7 @@
           <p:cNvPr id="10" name="Pfeil: nach rechts 9">
             <a:extLst>
               <a:ext uri="{FF2B5EF4-FFF2-40B4-BE49-F238E27FC236}">
-                <a16:creationId xmlns:a16="http://schemas.microsoft.com/office/drawing/2014/main" id="{83B5B962-68AF-4493-82CE-DAB5F9939E12}"/>
+                <a16:creationId xmlns:a16="http://schemas.microsoft.com/office/drawing/2014/main" id="{11FF683A-5F0B-412A-D23F-8A76523691FB}"/>
               </a:ext>
             </a:extLst>
           </p:cNvPr>
@@ -3753,7 +3753,7 @@
           <p:cNvPr id="11" name="Rechteck 10">
             <a:extLst>
               <a:ext uri="{FF2B5EF4-FFF2-40B4-BE49-F238E27FC236}">
-                <a16:creationId xmlns:a16="http://schemas.microsoft.com/office/drawing/2014/main" id="{4BC8A6B1-740F-7967-2AB8-27F5318F1863}"/>
+                <a16:creationId xmlns:a16="http://schemas.microsoft.com/office/drawing/2014/main" id="{6B487160-6009-972C-4D2C-0CD313582D80}"/>
               </a:ext>
             </a:extLst>
           </p:cNvPr>
@@ -3802,7 +3802,7 @@
           <p:cNvPr id="12" name="Pfeil: nach rechts 11">
             <a:extLst>
               <a:ext uri="{FF2B5EF4-FFF2-40B4-BE49-F238E27FC236}">
-                <a16:creationId xmlns:a16="http://schemas.microsoft.com/office/drawing/2014/main" id="{CC9CC58D-78EC-AC6C-F15E-DDF09C39F8F7}"/>
+                <a16:creationId xmlns:a16="http://schemas.microsoft.com/office/drawing/2014/main" id="{27DC568B-FDDD-0C01-D874-BCFFFA891ACB}"/>
               </a:ext>
             </a:extLst>
           </p:cNvPr>
@@ -3848,7 +3848,7 @@
           <p:cNvPr id="13" name="Rechteck 12">
             <a:extLst>
               <a:ext uri="{FF2B5EF4-FFF2-40B4-BE49-F238E27FC236}">
-                <a16:creationId xmlns:a16="http://schemas.microsoft.com/office/drawing/2014/main" id="{A6F8231B-D52F-B342-5A4D-98590626CC7D}"/>
+                <a16:creationId xmlns:a16="http://schemas.microsoft.com/office/drawing/2014/main" id="{4D615000-B1E6-8D9D-0473-1CBAA7C36D01}"/>
               </a:ext>
             </a:extLst>
           </p:cNvPr>
@@ -3897,7 +3897,7 @@
           <p:cNvPr id="14" name="Pfeil: nach rechts 13">
             <a:extLst>
               <a:ext uri="{FF2B5EF4-FFF2-40B4-BE49-F238E27FC236}">
-                <a16:creationId xmlns:a16="http://schemas.microsoft.com/office/drawing/2014/main" id="{EBA2662A-3198-4476-33AE-F2E940B734BA}"/>
+                <a16:creationId xmlns:a16="http://schemas.microsoft.com/office/drawing/2014/main" id="{7F922CB6-E3E3-0348-4DCF-73F7D31E1A33}"/>
               </a:ext>
             </a:extLst>
           </p:cNvPr>
@@ -3946,7 +3946,7 @@
           <p:cNvPr id="15" name="Pfeil: nach rechts 14">
             <a:extLst>
               <a:ext uri="{FF2B5EF4-FFF2-40B4-BE49-F238E27FC236}">
-                <a16:creationId xmlns:a16="http://schemas.microsoft.com/office/drawing/2014/main" id="{5D306AFA-2D5E-20BA-1E04-9300DAE14355}"/>
+                <a16:creationId xmlns:a16="http://schemas.microsoft.com/office/drawing/2014/main" id="{D72E7FF0-D70C-F943-3932-892B5ED4FDD7}"/>
               </a:ext>
             </a:extLst>
           </p:cNvPr>
@@ -3995,7 +3995,7 @@
           <p:cNvPr id="16" name="Pfeil: nach rechts 15">
             <a:extLst>
               <a:ext uri="{FF2B5EF4-FFF2-40B4-BE49-F238E27FC236}">
-                <a16:creationId xmlns:a16="http://schemas.microsoft.com/office/drawing/2014/main" id="{BCDA7E30-7861-88DC-BCE3-0A1798BC65C2}"/>
+                <a16:creationId xmlns:a16="http://schemas.microsoft.com/office/drawing/2014/main" id="{D67B5379-62AA-42E4-7F25-6CE665F4737A}"/>
               </a:ext>
             </a:extLst>
           </p:cNvPr>
@@ -4044,7 +4044,7 @@
           <p:cNvPr id="17" name="Pfeil: nach rechts 16">
             <a:extLst>
               <a:ext uri="{FF2B5EF4-FFF2-40B4-BE49-F238E27FC236}">
-                <a16:creationId xmlns:a16="http://schemas.microsoft.com/office/drawing/2014/main" id="{6F072F93-724B-72D2-490E-AB64C430E90C}"/>
+                <a16:creationId xmlns:a16="http://schemas.microsoft.com/office/drawing/2014/main" id="{323FC419-CE71-ABC8-58EC-87B9B4279920}"/>
               </a:ext>
             </a:extLst>
           </p:cNvPr>
@@ -4091,7 +4091,7 @@
     </p:spTree>
     <p:extLst>
       <p:ext uri="{BB962C8B-B14F-4D97-AF65-F5344CB8AC3E}">
-        <p14:creationId xmlns:p14="http://schemas.microsoft.com/office/powerpoint/2010/main" val="1631126142"/>
+        <p14:creationId xmlns:p14="http://schemas.microsoft.com/office/powerpoint/2010/main" val="1870781223"/>
       </p:ext>
     </p:extLst>
   </p:cSld>
@@ -4123,7 +4123,7 @@
           <p:cNvPr id="5" name="Gruppieren 4">
             <a:extLst>
               <a:ext uri="{FF2B5EF4-FFF2-40B4-BE49-F238E27FC236}">
-                <a16:creationId xmlns:a16="http://schemas.microsoft.com/office/drawing/2014/main" id="{779DF130-2DC4-17E3-8CEA-B7854D4A35A9}"/>
+                <a16:creationId xmlns:a16="http://schemas.microsoft.com/office/drawing/2014/main" id="{6E2053DA-0250-25BF-89CF-0F484ED95D4C}"/>
               </a:ext>
             </a:extLst>
           </p:cNvPr>
@@ -4143,7 +4143,7 @@
             <p:cNvPr id="2" name="A">
               <a:extLst>
                 <a:ext uri="{FF2B5EF4-FFF2-40B4-BE49-F238E27FC236}">
-                  <a16:creationId xmlns:a16="http://schemas.microsoft.com/office/drawing/2014/main" id="{CFDD4FF6-7C09-0F50-C1ED-ED8212B1FCB2}"/>
+                  <a16:creationId xmlns:a16="http://schemas.microsoft.com/office/drawing/2014/main" id="{533C1C04-046B-8632-6CFC-F08BE7C4C801}"/>
                 </a:ext>
               </a:extLst>
             </p:cNvPr>
@@ -4189,7 +4189,7 @@
             <p:cNvPr id="3" name="B">
               <a:extLst>
                 <a:ext uri="{FF2B5EF4-FFF2-40B4-BE49-F238E27FC236}">
-                  <a16:creationId xmlns:a16="http://schemas.microsoft.com/office/drawing/2014/main" id="{264A7714-0F05-56EF-AF72-6E14ABA990BE}"/>
+                  <a16:creationId xmlns:a16="http://schemas.microsoft.com/office/drawing/2014/main" id="{59022587-BB35-C047-06DB-4DB432B39CED}"/>
                 </a:ext>
               </a:extLst>
             </p:cNvPr>
@@ -4235,7 +4235,7 @@
             <p:cNvPr id="4" name="C">
               <a:extLst>
                 <a:ext uri="{FF2B5EF4-FFF2-40B4-BE49-F238E27FC236}">
-                  <a16:creationId xmlns:a16="http://schemas.microsoft.com/office/drawing/2014/main" id="{526B2836-3F16-C138-BB0D-2C8A3CEA3A2E}"/>
+                  <a16:creationId xmlns:a16="http://schemas.microsoft.com/office/drawing/2014/main" id="{576797BA-1B34-93B5-6C66-B787E5B25C80}"/>
                 </a:ext>
               </a:extLst>
             </p:cNvPr>
@@ -4282,7 +4282,7 @@
           <p:cNvPr id="6" name="D">
             <a:extLst>
               <a:ext uri="{FF2B5EF4-FFF2-40B4-BE49-F238E27FC236}">
-                <a16:creationId xmlns:a16="http://schemas.microsoft.com/office/drawing/2014/main" id="{3E201273-E95B-A1D0-8E67-4384D7BE7CE1}"/>
+                <a16:creationId xmlns:a16="http://schemas.microsoft.com/office/drawing/2014/main" id="{11788BC8-8745-7FD3-D917-7BB8639F2729}"/>
               </a:ext>
             </a:extLst>
           </p:cNvPr>
@@ -4328,7 +4328,7 @@
           <p:cNvPr id="7" name="E">
             <a:extLst>
               <a:ext uri="{FF2B5EF4-FFF2-40B4-BE49-F238E27FC236}">
-                <a16:creationId xmlns:a16="http://schemas.microsoft.com/office/drawing/2014/main" id="{6301EA8A-4302-8A24-69C1-BE56F6590419}"/>
+                <a16:creationId xmlns:a16="http://schemas.microsoft.com/office/drawing/2014/main" id="{06807525-2832-A07D-5B6E-1A1C71FC1356}"/>
               </a:ext>
             </a:extLst>
           </p:cNvPr>
@@ -4374,7 +4374,7 @@
           <p:cNvPr id="8" name="Gerade Verbindung mit Pfeil 7">
             <a:extLst>
               <a:ext uri="{FF2B5EF4-FFF2-40B4-BE49-F238E27FC236}">
-                <a16:creationId xmlns:a16="http://schemas.microsoft.com/office/drawing/2014/main" id="{65E3A1ED-7CA5-8862-5F6D-6E82E7AD9ED7}"/>
+                <a16:creationId xmlns:a16="http://schemas.microsoft.com/office/drawing/2014/main" id="{5C663E36-2A39-0FE5-1DD2-53DAAC14E889}"/>
               </a:ext>
             </a:extLst>
           </p:cNvPr>
@@ -4415,7 +4415,7 @@
           <p:cNvPr id="9" name="Verbinder: gewinkelt 8">
             <a:extLst>
               <a:ext uri="{FF2B5EF4-FFF2-40B4-BE49-F238E27FC236}">
-                <a16:creationId xmlns:a16="http://schemas.microsoft.com/office/drawing/2014/main" id="{E90BF3C6-A70F-C65C-90B4-83FA7EC92DD3}"/>
+                <a16:creationId xmlns:a16="http://schemas.microsoft.com/office/drawing/2014/main" id="{38303D0B-9C74-C902-70FA-0659FA7A4D02}"/>
               </a:ext>
             </a:extLst>
           </p:cNvPr>
@@ -4456,7 +4456,7 @@
           <p:cNvPr id="10" name="Verbinder: gekrümmt 9">
             <a:extLst>
               <a:ext uri="{FF2B5EF4-FFF2-40B4-BE49-F238E27FC236}">
-                <a16:creationId xmlns:a16="http://schemas.microsoft.com/office/drawing/2014/main" id="{B31D111F-180B-63AD-14D9-23CB1B13A57F}"/>
+                <a16:creationId xmlns:a16="http://schemas.microsoft.com/office/drawing/2014/main" id="{BB50EFDE-2981-BC9B-A94D-300F51FE74A4}"/>
               </a:ext>
             </a:extLst>
           </p:cNvPr>
@@ -4495,7 +4495,7 @@
     </p:spTree>
     <p:extLst>
       <p:ext uri="{BB962C8B-B14F-4D97-AF65-F5344CB8AC3E}">
-        <p14:creationId xmlns:p14="http://schemas.microsoft.com/office/powerpoint/2010/main" val="2294278314"/>
+        <p14:creationId xmlns:p14="http://schemas.microsoft.com/office/powerpoint/2010/main" val="700383764"/>
       </p:ext>
     </p:extLst>
   </p:cSld>
